--- a/第4章-函数与模块化编程/第4章-函数与模块化编程.pptx
+++ b/第4章-函数与模块化编程/第4章-函数与模块化编程.pptx
@@ -6,10 +6,10 @@
     <p:sldMasterId id="2147484986" r:id="rId2"/>
   </p:sldMasterIdLst>
   <p:notesMasterIdLst>
-    <p:notesMasterId r:id="rId28"/>
+    <p:notesMasterId r:id="rId30"/>
   </p:notesMasterIdLst>
   <p:handoutMasterIdLst>
-    <p:handoutMasterId r:id="rId29"/>
+    <p:handoutMasterId r:id="rId31"/>
   </p:handoutMasterIdLst>
   <p:sldIdLst>
     <p:sldId id="2708" r:id="rId3"/>
@@ -32,16 +32,18 @@
     <p:sldId id="2720" r:id="rId20"/>
     <p:sldId id="2778" r:id="rId21"/>
     <p:sldId id="2779" r:id="rId22"/>
-    <p:sldId id="2777" r:id="rId23"/>
-    <p:sldId id="2783" r:id="rId24"/>
-    <p:sldId id="2741" r:id="rId25"/>
-    <p:sldId id="2788" r:id="rId26"/>
-    <p:sldId id="2742" r:id="rId27"/>
+    <p:sldId id="2790" r:id="rId23"/>
+    <p:sldId id="2791" r:id="rId24"/>
+    <p:sldId id="2792" r:id="rId25"/>
+    <p:sldId id="2793" r:id="rId26"/>
+    <p:sldId id="2741" r:id="rId27"/>
+    <p:sldId id="2788" r:id="rId28"/>
+    <p:sldId id="2742" r:id="rId29"/>
   </p:sldIdLst>
   <p:sldSz cx="12192000" cy="6858000"/>
   <p:notesSz cx="7099300" cy="10234613"/>
   <p:custDataLst>
-    <p:tags r:id="rId30"/>
+    <p:tags r:id="rId32"/>
   </p:custDataLst>
   <p:defaultTextStyle>
     <a:defPPr>
@@ -455,2226 +457,32 @@
 <file path=ppt/changesInfos/changesInfo1.xml><?xml version="1.0" encoding="utf-8"?>
 <pc:chgInfo xmlns:a="http://schemas.openxmlformats.org/drawingml/2006/main" xmlns:r="http://schemas.openxmlformats.org/officeDocument/2006/relationships" xmlns:ac="http://schemas.microsoft.com/office/drawing/2013/main/command" xmlns:pc="http://schemas.microsoft.com/office/powerpoint/2013/main/command">
   <pc:docChgLst>
-    <pc:chgData name="Xin Luo" userId="82312ee5779919a4" providerId="LiveId" clId="{3C4A7AF4-6488-5041-B432-D36EF53163D3}"/>
-    <pc:docChg chg="undo custSel addSld delSld modSld sldOrd">
-      <pc:chgData name="Xin Luo" userId="82312ee5779919a4" providerId="LiveId" clId="{3C4A7AF4-6488-5041-B432-D36EF53163D3}" dt="2023-02-23T14:33:41.327" v="6919" actId="478"/>
-      <pc:docMkLst>
-        <pc:docMk/>
-      </pc:docMkLst>
-      <pc:sldChg chg="del">
-        <pc:chgData name="Xin Luo" userId="82312ee5779919a4" providerId="LiveId" clId="{3C4A7AF4-6488-5041-B432-D36EF53163D3}" dt="2023-02-22T05:30:51.981" v="0" actId="2696"/>
-        <pc:sldMkLst>
-          <pc:docMk/>
-          <pc:sldMk cId="1153920038" sldId="2206"/>
-        </pc:sldMkLst>
-      </pc:sldChg>
-      <pc:sldChg chg="addSp modSp mod">
-        <pc:chgData name="Xin Luo" userId="82312ee5779919a4" providerId="LiveId" clId="{3C4A7AF4-6488-5041-B432-D36EF53163D3}" dt="2023-02-23T07:39:26.083" v="2380" actId="20577"/>
-        <pc:sldMkLst>
-          <pc:docMk/>
-          <pc:sldMk cId="1576120367" sldId="2387"/>
-        </pc:sldMkLst>
-      </pc:sldChg>
-      <pc:sldChg chg="modSp mod">
-        <pc:chgData name="Xin Luo" userId="82312ee5779919a4" providerId="LiveId" clId="{3C4A7AF4-6488-5041-B432-D36EF53163D3}" dt="2023-02-22T07:33:21.001" v="351" actId="20577"/>
-        <pc:sldMkLst>
-          <pc:docMk/>
-          <pc:sldMk cId="2415901206" sldId="2447"/>
-        </pc:sldMkLst>
-      </pc:sldChg>
-      <pc:sldChg chg="addSp delSp modSp mod">
-        <pc:chgData name="Xin Luo" userId="82312ee5779919a4" providerId="LiveId" clId="{3C4A7AF4-6488-5041-B432-D36EF53163D3}" dt="2023-02-23T01:16:39.011" v="1571" actId="1037"/>
-        <pc:sldMkLst>
-          <pc:docMk/>
-          <pc:sldMk cId="4067577602" sldId="2605"/>
-        </pc:sldMkLst>
-      </pc:sldChg>
-      <pc:sldChg chg="del">
-        <pc:chgData name="Xin Luo" userId="82312ee5779919a4" providerId="LiveId" clId="{3C4A7AF4-6488-5041-B432-D36EF53163D3}" dt="2023-02-22T05:30:52.002" v="3" actId="2696"/>
-        <pc:sldMkLst>
-          <pc:docMk/>
-          <pc:sldMk cId="2688334957" sldId="2705"/>
-        </pc:sldMkLst>
-      </pc:sldChg>
-      <pc:sldChg chg="del">
-        <pc:chgData name="Xin Luo" userId="82312ee5779919a4" providerId="LiveId" clId="{3C4A7AF4-6488-5041-B432-D36EF53163D3}" dt="2023-02-22T05:30:51.986" v="2" actId="2696"/>
-        <pc:sldMkLst>
-          <pc:docMk/>
-          <pc:sldMk cId="2464444856" sldId="2706"/>
-        </pc:sldMkLst>
-      </pc:sldChg>
-      <pc:sldChg chg="del">
-        <pc:chgData name="Xin Luo" userId="82312ee5779919a4" providerId="LiveId" clId="{3C4A7AF4-6488-5041-B432-D36EF53163D3}" dt="2023-02-22T05:30:51.983" v="1" actId="2696"/>
-        <pc:sldMkLst>
-          <pc:docMk/>
-          <pc:sldMk cId="1602808061" sldId="2707"/>
-        </pc:sldMkLst>
-      </pc:sldChg>
-      <pc:sldChg chg="modSp mod">
-        <pc:chgData name="Xin Luo" userId="82312ee5779919a4" providerId="LiveId" clId="{3C4A7AF4-6488-5041-B432-D36EF53163D3}" dt="2023-02-22T07:27:49.994" v="45" actId="20577"/>
-        <pc:sldMkLst>
-          <pc:docMk/>
-          <pc:sldMk cId="1658607177" sldId="2708"/>
-        </pc:sldMkLst>
-      </pc:sldChg>
-      <pc:sldChg chg="modSp add mod">
-        <pc:chgData name="Xin Luo" userId="82312ee5779919a4" providerId="LiveId" clId="{3C4A7AF4-6488-5041-B432-D36EF53163D3}" dt="2023-02-23T07:39:57.891" v="2394" actId="20577"/>
-        <pc:sldMkLst>
-          <pc:docMk/>
-          <pc:sldMk cId="481122590" sldId="2709"/>
-        </pc:sldMkLst>
-      </pc:sldChg>
-      <pc:sldChg chg="addSp delSp modSp del mod">
-        <pc:chgData name="Xin Luo" userId="82312ee5779919a4" providerId="LiveId" clId="{3C4A7AF4-6488-5041-B432-D36EF53163D3}" dt="2023-02-23T07:26:52.546" v="2336" actId="2696"/>
-        <pc:sldMkLst>
-          <pc:docMk/>
-          <pc:sldMk cId="1257969106" sldId="2709"/>
-        </pc:sldMkLst>
-      </pc:sldChg>
-      <pc:sldChg chg="del">
-        <pc:chgData name="Xin Luo" userId="82312ee5779919a4" providerId="LiveId" clId="{3C4A7AF4-6488-5041-B432-D36EF53163D3}" dt="2023-02-22T07:32:46.487" v="311" actId="2696"/>
-        <pc:sldMkLst>
-          <pc:docMk/>
-          <pc:sldMk cId="2744383376" sldId="2711"/>
-        </pc:sldMkLst>
-      </pc:sldChg>
-      <pc:sldChg chg="del">
-        <pc:chgData name="Xin Luo" userId="82312ee5779919a4" providerId="LiveId" clId="{3C4A7AF4-6488-5041-B432-D36EF53163D3}" dt="2023-02-22T07:32:46.489" v="312" actId="2696"/>
-        <pc:sldMkLst>
-          <pc:docMk/>
-          <pc:sldMk cId="280619949" sldId="2714"/>
-        </pc:sldMkLst>
-      </pc:sldChg>
-      <pc:sldChg chg="del">
-        <pc:chgData name="Xin Luo" userId="82312ee5779919a4" providerId="LiveId" clId="{3C4A7AF4-6488-5041-B432-D36EF53163D3}" dt="2023-02-22T07:32:53.087" v="313" actId="2696"/>
-        <pc:sldMkLst>
-          <pc:docMk/>
-          <pc:sldMk cId="3852391939" sldId="2715"/>
-        </pc:sldMkLst>
-      </pc:sldChg>
-      <pc:sldChg chg="delSp modSp del mod ord">
-        <pc:chgData name="Xin Luo" userId="82312ee5779919a4" providerId="LiveId" clId="{3C4A7AF4-6488-5041-B432-D36EF53163D3}" dt="2023-02-23T07:26:52.546" v="2336" actId="2696"/>
-        <pc:sldMkLst>
-          <pc:docMk/>
-          <pc:sldMk cId="3026715585" sldId="2716"/>
-        </pc:sldMkLst>
-      </pc:sldChg>
-      <pc:sldChg chg="addSp modSp add mod">
-        <pc:chgData name="Xin Luo" userId="82312ee5779919a4" providerId="LiveId" clId="{3C4A7AF4-6488-5041-B432-D36EF53163D3}" dt="2023-02-23T07:58:34.775" v="2627" actId="20577"/>
-        <pc:sldMkLst>
-          <pc:docMk/>
-          <pc:sldMk cId="3833073590" sldId="2716"/>
-        </pc:sldMkLst>
-      </pc:sldChg>
-      <pc:sldChg chg="del">
-        <pc:chgData name="Xin Luo" userId="82312ee5779919a4" providerId="LiveId" clId="{3C4A7AF4-6488-5041-B432-D36EF53163D3}" dt="2023-02-22T07:32:53.106" v="315" actId="2696"/>
-        <pc:sldMkLst>
-          <pc:docMk/>
-          <pc:sldMk cId="4136986794" sldId="2717"/>
-        </pc:sldMkLst>
-      </pc:sldChg>
-      <pc:sldChg chg="del">
-        <pc:chgData name="Xin Luo" userId="82312ee5779919a4" providerId="LiveId" clId="{3C4A7AF4-6488-5041-B432-D36EF53163D3}" dt="2023-02-22T07:32:53.089" v="314" actId="2696"/>
-        <pc:sldMkLst>
-          <pc:docMk/>
-          <pc:sldMk cId="1778017482" sldId="2718"/>
-        </pc:sldMkLst>
-      </pc:sldChg>
-      <pc:sldChg chg="modSp del mod ord">
-        <pc:chgData name="Xin Luo" userId="82312ee5779919a4" providerId="LiveId" clId="{3C4A7AF4-6488-5041-B432-D36EF53163D3}" dt="2023-02-23T07:26:52.546" v="2336" actId="2696"/>
-        <pc:sldMkLst>
-          <pc:docMk/>
-          <pc:sldMk cId="1858913004" sldId="2719"/>
-        </pc:sldMkLst>
-      </pc:sldChg>
-      <pc:sldChg chg="modSp add del mod">
-        <pc:chgData name="Xin Luo" userId="82312ee5779919a4" providerId="LiveId" clId="{3C4A7AF4-6488-5041-B432-D36EF53163D3}" dt="2023-02-23T07:29:10.384" v="2343" actId="2696"/>
-        <pc:sldMkLst>
-          <pc:docMk/>
-          <pc:sldMk cId="3840444413" sldId="2719"/>
-        </pc:sldMkLst>
-      </pc:sldChg>
-      <pc:sldChg chg="modSp add mod ord">
-        <pc:chgData name="Xin Luo" userId="82312ee5779919a4" providerId="LiveId" clId="{3C4A7AF4-6488-5041-B432-D36EF53163D3}" dt="2023-02-23T04:51:04.333" v="1905" actId="20577"/>
-        <pc:sldMkLst>
-          <pc:docMk/>
-          <pc:sldMk cId="972163772" sldId="2720"/>
-        </pc:sldMkLst>
-      </pc:sldChg>
-      <pc:sldChg chg="del">
-        <pc:chgData name="Xin Luo" userId="82312ee5779919a4" providerId="LiveId" clId="{3C4A7AF4-6488-5041-B432-D36EF53163D3}" dt="2023-02-22T07:32:37.778" v="309" actId="2696"/>
-        <pc:sldMkLst>
-          <pc:docMk/>
-          <pc:sldMk cId="3480831675" sldId="2720"/>
-        </pc:sldMkLst>
-      </pc:sldChg>
-      <pc:sldChg chg="del">
-        <pc:chgData name="Xin Luo" userId="82312ee5779919a4" providerId="LiveId" clId="{3C4A7AF4-6488-5041-B432-D36EF53163D3}" dt="2023-02-22T07:32:46.484" v="310" actId="2696"/>
-        <pc:sldMkLst>
-          <pc:docMk/>
-          <pc:sldMk cId="1410676903" sldId="2721"/>
-        </pc:sldMkLst>
-      </pc:sldChg>
-      <pc:sldChg chg="delSp modSp add mod ord">
-        <pc:chgData name="Xin Luo" userId="82312ee5779919a4" providerId="LiveId" clId="{3C4A7AF4-6488-5041-B432-D36EF53163D3}" dt="2023-02-23T07:12:50.196" v="2062" actId="478"/>
-        <pc:sldMkLst>
-          <pc:docMk/>
-          <pc:sldMk cId="2689695864" sldId="2721"/>
-        </pc:sldMkLst>
-      </pc:sldChg>
-      <pc:sldChg chg="add del">
-        <pc:chgData name="Xin Luo" userId="82312ee5779919a4" providerId="LiveId" clId="{3C4A7AF4-6488-5041-B432-D36EF53163D3}" dt="2023-02-23T01:10:59.145" v="1497"/>
-        <pc:sldMkLst>
-          <pc:docMk/>
-          <pc:sldMk cId="2910826875" sldId="2721"/>
-        </pc:sldMkLst>
-      </pc:sldChg>
-      <pc:sldChg chg="addSp delSp modSp add mod ord">
-        <pc:chgData name="Xin Luo" userId="82312ee5779919a4" providerId="LiveId" clId="{3C4A7AF4-6488-5041-B432-D36EF53163D3}" dt="2023-02-23T07:26:03.168" v="2327" actId="20577"/>
-        <pc:sldMkLst>
-          <pc:docMk/>
-          <pc:sldMk cId="1209572041" sldId="2722"/>
-        </pc:sldMkLst>
-      </pc:sldChg>
-      <pc:sldChg chg="add del">
-        <pc:chgData name="Xin Luo" userId="82312ee5779919a4" providerId="LiveId" clId="{3C4A7AF4-6488-5041-B432-D36EF53163D3}" dt="2023-02-23T01:15:26.280" v="1535"/>
-        <pc:sldMkLst>
-          <pc:docMk/>
-          <pc:sldMk cId="1287359691" sldId="2722"/>
-        </pc:sldMkLst>
-      </pc:sldChg>
-      <pc:sldChg chg="add del">
-        <pc:chgData name="Xin Luo" userId="82312ee5779919a4" providerId="LiveId" clId="{3C4A7AF4-6488-5041-B432-D36EF53163D3}" dt="2023-02-23T04:49:30.686" v="1883" actId="2696"/>
-        <pc:sldMkLst>
-          <pc:docMk/>
-          <pc:sldMk cId="510300836" sldId="2723"/>
-        </pc:sldMkLst>
-      </pc:sldChg>
-      <pc:sldChg chg="addSp delSp modSp add del mod">
-        <pc:chgData name="Xin Luo" userId="82312ee5779919a4" providerId="LiveId" clId="{3C4A7AF4-6488-5041-B432-D36EF53163D3}" dt="2023-02-23T07:26:33.576" v="2330" actId="2696"/>
-        <pc:sldMkLst>
-          <pc:docMk/>
-          <pc:sldMk cId="2794277739" sldId="2723"/>
-        </pc:sldMkLst>
-      </pc:sldChg>
-      <pc:sldChg chg="addSp delSp new del mod">
-        <pc:chgData name="Xin Luo" userId="82312ee5779919a4" providerId="LiveId" clId="{3C4A7AF4-6488-5041-B432-D36EF53163D3}" dt="2023-02-23T07:57:59.493" v="2582" actId="2696"/>
-        <pc:sldMkLst>
-          <pc:docMk/>
-          <pc:sldMk cId="2812212654" sldId="2723"/>
-        </pc:sldMkLst>
-      </pc:sldChg>
-      <pc:sldChg chg="delSp modSp add del mod">
-        <pc:chgData name="Xin Luo" userId="82312ee5779919a4" providerId="LiveId" clId="{3C4A7AF4-6488-5041-B432-D36EF53163D3}" dt="2023-02-23T07:58:40.953" v="2629" actId="2696"/>
-        <pc:sldMkLst>
-          <pc:docMk/>
-          <pc:sldMk cId="1937332499" sldId="2724"/>
-        </pc:sldMkLst>
-      </pc:sldChg>
-      <pc:sldChg chg="addSp delSp modSp add mod">
-        <pc:chgData name="Xin Luo" userId="82312ee5779919a4" providerId="LiveId" clId="{3C4A7AF4-6488-5041-B432-D36EF53163D3}" dt="2023-02-23T14:01:10.568" v="6309" actId="403"/>
-        <pc:sldMkLst>
-          <pc:docMk/>
-          <pc:sldMk cId="353940032" sldId="2725"/>
-        </pc:sldMkLst>
-      </pc:sldChg>
-      <pc:sldChg chg="addSp delSp modSp add mod">
-        <pc:chgData name="Xin Luo" userId="82312ee5779919a4" providerId="LiveId" clId="{3C4A7AF4-6488-5041-B432-D36EF53163D3}" dt="2023-02-23T08:31:04.830" v="3778" actId="113"/>
-        <pc:sldMkLst>
-          <pc:docMk/>
-          <pc:sldMk cId="45083394" sldId="2726"/>
-        </pc:sldMkLst>
-      </pc:sldChg>
-      <pc:sldChg chg="addSp delSp modSp add mod">
-        <pc:chgData name="Xin Luo" userId="82312ee5779919a4" providerId="LiveId" clId="{3C4A7AF4-6488-5041-B432-D36EF53163D3}" dt="2023-02-23T09:13:39.268" v="5260" actId="1076"/>
-        <pc:sldMkLst>
-          <pc:docMk/>
-          <pc:sldMk cId="148985918" sldId="2727"/>
-        </pc:sldMkLst>
-      </pc:sldChg>
-      <pc:sldChg chg="addSp delSp modSp add mod">
-        <pc:chgData name="Xin Luo" userId="82312ee5779919a4" providerId="LiveId" clId="{3C4A7AF4-6488-5041-B432-D36EF53163D3}" dt="2023-02-23T08:32:21.875" v="3790" actId="1076"/>
-        <pc:sldMkLst>
-          <pc:docMk/>
-          <pc:sldMk cId="3544980656" sldId="2728"/>
-        </pc:sldMkLst>
-      </pc:sldChg>
-      <pc:sldChg chg="addSp delSp modSp add mod">
-        <pc:chgData name="Xin Luo" userId="82312ee5779919a4" providerId="LiveId" clId="{3C4A7AF4-6488-5041-B432-D36EF53163D3}" dt="2023-02-23T09:02:43.022" v="4809" actId="20577"/>
-        <pc:sldMkLst>
-          <pc:docMk/>
-          <pc:sldMk cId="1664139585" sldId="2729"/>
-        </pc:sldMkLst>
-      </pc:sldChg>
-      <pc:sldChg chg="addSp delSp modSp add mod">
-        <pc:chgData name="Xin Luo" userId="82312ee5779919a4" providerId="LiveId" clId="{3C4A7AF4-6488-5041-B432-D36EF53163D3}" dt="2023-02-23T09:02:46.545" v="4811" actId="20577"/>
-        <pc:sldMkLst>
-          <pc:docMk/>
-          <pc:sldMk cId="3561803108" sldId="2730"/>
-        </pc:sldMkLst>
-      </pc:sldChg>
-      <pc:sldChg chg="addSp delSp modSp add mod">
-        <pc:chgData name="Xin Luo" userId="82312ee5779919a4" providerId="LiveId" clId="{3C4A7AF4-6488-5041-B432-D36EF53163D3}" dt="2023-02-23T11:42:21.434" v="5641" actId="20577"/>
-        <pc:sldMkLst>
-          <pc:docMk/>
-          <pc:sldMk cId="236610701" sldId="2731"/>
-        </pc:sldMkLst>
-      </pc:sldChg>
-      <pc:sldChg chg="add del">
-        <pc:chgData name="Xin Luo" userId="82312ee5779919a4" providerId="LiveId" clId="{3C4A7AF4-6488-5041-B432-D36EF53163D3}" dt="2023-02-23T08:54:40.823" v="4449"/>
-        <pc:sldMkLst>
-          <pc:docMk/>
-          <pc:sldMk cId="3607281671" sldId="2731"/>
-        </pc:sldMkLst>
-      </pc:sldChg>
-      <pc:sldChg chg="addSp delSp modSp add mod modNotesTx">
-        <pc:chgData name="Xin Luo" userId="82312ee5779919a4" providerId="LiveId" clId="{3C4A7AF4-6488-5041-B432-D36EF53163D3}" dt="2023-02-23T13:58:03.496" v="6246" actId="1076"/>
-        <pc:sldMkLst>
-          <pc:docMk/>
-          <pc:sldMk cId="1986913413" sldId="2732"/>
-        </pc:sldMkLst>
-      </pc:sldChg>
-      <pc:sldChg chg="addSp delSp modSp add mod">
-        <pc:chgData name="Xin Luo" userId="82312ee5779919a4" providerId="LiveId" clId="{3C4A7AF4-6488-5041-B432-D36EF53163D3}" dt="2023-02-23T14:00:47.321" v="6304" actId="1076"/>
-        <pc:sldMkLst>
-          <pc:docMk/>
-          <pc:sldMk cId="270311508" sldId="2733"/>
-        </pc:sldMkLst>
-      </pc:sldChg>
-      <pc:sldChg chg="addSp delSp modSp add mod">
-        <pc:chgData name="Xin Luo" userId="82312ee5779919a4" providerId="LiveId" clId="{3C4A7AF4-6488-5041-B432-D36EF53163D3}" dt="2023-02-23T14:29:59.110" v="6746" actId="403"/>
-        <pc:sldMkLst>
-          <pc:docMk/>
-          <pc:sldMk cId="3138813826" sldId="2734"/>
-        </pc:sldMkLst>
-      </pc:sldChg>
-      <pc:sldChg chg="addSp modSp add mod">
-        <pc:chgData name="Xin Luo" userId="82312ee5779919a4" providerId="LiveId" clId="{3C4A7AF4-6488-5041-B432-D36EF53163D3}" dt="2023-02-23T14:33:30.940" v="6917" actId="1037"/>
-        <pc:sldMkLst>
-          <pc:docMk/>
-          <pc:sldMk cId="128317883" sldId="2735"/>
-        </pc:sldMkLst>
-      </pc:sldChg>
-      <pc:sldChg chg="delSp add mod">
-        <pc:chgData name="Xin Luo" userId="82312ee5779919a4" providerId="LiveId" clId="{3C4A7AF4-6488-5041-B432-D36EF53163D3}" dt="2023-02-23T14:33:41.327" v="6919" actId="478"/>
-        <pc:sldMkLst>
-          <pc:docMk/>
-          <pc:sldMk cId="383906436" sldId="2736"/>
-        </pc:sldMkLst>
-      </pc:sldChg>
-    </pc:docChg>
-  </pc:docChgLst>
-  <pc:docChgLst>
-    <pc:chgData name="Xin Luo" userId="82312ee5779919a4" providerId="LiveId" clId="{4DB6C473-8E57-A543-81F7-48BE109E8C13}"/>
-    <pc:docChg chg="undo custSel addSld delSld modSld sldOrd delMainMaster">
-      <pc:chgData name="Xin Luo" userId="82312ee5779919a4" providerId="LiveId" clId="{4DB6C473-8E57-A543-81F7-48BE109E8C13}" dt="2023-02-21T15:10:04.498" v="5724" actId="108"/>
-      <pc:docMkLst>
-        <pc:docMk/>
-      </pc:docMkLst>
-      <pc:sldChg chg="addSp delSp modSp mod">
-        <pc:chgData name="Xin Luo" userId="82312ee5779919a4" providerId="LiveId" clId="{4DB6C473-8E57-A543-81F7-48BE109E8C13}" dt="2023-02-21T08:54:32.554" v="3595" actId="1076"/>
-        <pc:sldMkLst>
-          <pc:docMk/>
-          <pc:sldMk cId="1576120367" sldId="2387"/>
-        </pc:sldMkLst>
-      </pc:sldChg>
-      <pc:sldChg chg="del">
-        <pc:chgData name="Xin Luo" userId="82312ee5779919a4" providerId="LiveId" clId="{4DB6C473-8E57-A543-81F7-48BE109E8C13}" dt="2023-02-21T08:54:15.767" v="3575" actId="2696"/>
-        <pc:sldMkLst>
-          <pc:docMk/>
-          <pc:sldMk cId="0" sldId="2446"/>
-        </pc:sldMkLst>
-      </pc:sldChg>
-      <pc:sldChg chg="modSp mod ord">
-        <pc:chgData name="Xin Luo" userId="82312ee5779919a4" providerId="LiveId" clId="{4DB6C473-8E57-A543-81F7-48BE109E8C13}" dt="2023-02-21T06:59:18.091" v="3225" actId="20578"/>
-        <pc:sldMkLst>
-          <pc:docMk/>
-          <pc:sldMk cId="2415901206" sldId="2447"/>
-        </pc:sldMkLst>
-      </pc:sldChg>
-      <pc:sldChg chg="addSp delSp modSp mod ord">
-        <pc:chgData name="Xin Luo" userId="82312ee5779919a4" providerId="LiveId" clId="{4DB6C473-8E57-A543-81F7-48BE109E8C13}" dt="2023-02-21T07:23:56.843" v="3356" actId="20577"/>
-        <pc:sldMkLst>
-          <pc:docMk/>
-          <pc:sldMk cId="4067577602" sldId="2605"/>
-        </pc:sldMkLst>
-      </pc:sldChg>
-      <pc:sldChg chg="del">
-        <pc:chgData name="Xin Luo" userId="82312ee5779919a4" providerId="LiveId" clId="{4DB6C473-8E57-A543-81F7-48BE109E8C13}" dt="2023-02-21T14:49:50.253" v="5372" actId="2696"/>
-        <pc:sldMkLst>
-          <pc:docMk/>
-          <pc:sldMk cId="963926578" sldId="2613"/>
-        </pc:sldMkLst>
-      </pc:sldChg>
-      <pc:sldChg chg="del">
-        <pc:chgData name="Xin Luo" userId="82312ee5779919a4" providerId="LiveId" clId="{4DB6C473-8E57-A543-81F7-48BE109E8C13}" dt="2023-02-21T14:49:50.286" v="5373" actId="2696"/>
-        <pc:sldMkLst>
-          <pc:docMk/>
-          <pc:sldMk cId="1377829391" sldId="2689"/>
-        </pc:sldMkLst>
-      </pc:sldChg>
-      <pc:sldChg chg="del">
-        <pc:chgData name="Xin Luo" userId="82312ee5779919a4" providerId="LiveId" clId="{4DB6C473-8E57-A543-81F7-48BE109E8C13}" dt="2023-02-21T14:49:50.299" v="5374" actId="2696"/>
-        <pc:sldMkLst>
-          <pc:docMk/>
-          <pc:sldMk cId="2843640805" sldId="2704"/>
-        </pc:sldMkLst>
-      </pc:sldChg>
-      <pc:sldChg chg="delSp modSp add mod ord">
-        <pc:chgData name="Xin Luo" userId="82312ee5779919a4" providerId="LiveId" clId="{4DB6C473-8E57-A543-81F7-48BE109E8C13}" dt="2023-02-21T05:54:53.172" v="2328" actId="113"/>
-        <pc:sldMkLst>
-          <pc:docMk/>
-          <pc:sldMk cId="2688334957" sldId="2705"/>
-        </pc:sldMkLst>
-      </pc:sldChg>
-      <pc:sldChg chg="modSp add mod">
-        <pc:chgData name="Xin Luo" userId="82312ee5779919a4" providerId="LiveId" clId="{4DB6C473-8E57-A543-81F7-48BE109E8C13}" dt="2023-02-21T05:59:45.306" v="2357" actId="2711"/>
-        <pc:sldMkLst>
-          <pc:docMk/>
-          <pc:sldMk cId="2464444856" sldId="2706"/>
-        </pc:sldMkLst>
-      </pc:sldChg>
-      <pc:sldChg chg="modSp add mod">
-        <pc:chgData name="Xin Luo" userId="82312ee5779919a4" providerId="LiveId" clId="{4DB6C473-8E57-A543-81F7-48BE109E8C13}" dt="2023-02-21T06:00:27.005" v="2362" actId="113"/>
-        <pc:sldMkLst>
-          <pc:docMk/>
-          <pc:sldMk cId="1602808061" sldId="2707"/>
-        </pc:sldMkLst>
-      </pc:sldChg>
-      <pc:sldChg chg="addSp modSp add mod">
-        <pc:chgData name="Xin Luo" userId="82312ee5779919a4" providerId="LiveId" clId="{4DB6C473-8E57-A543-81F7-48BE109E8C13}" dt="2023-02-21T03:24:12.660" v="1798" actId="207"/>
-        <pc:sldMkLst>
-          <pc:docMk/>
-          <pc:sldMk cId="1658607177" sldId="2708"/>
-        </pc:sldMkLst>
-      </pc:sldChg>
-      <pc:sldChg chg="add del setBg">
-        <pc:chgData name="Xin Luo" userId="82312ee5779919a4" providerId="LiveId" clId="{4DB6C473-8E57-A543-81F7-48BE109E8C13}" dt="2023-02-21T03:21:36.224" v="1707"/>
-        <pc:sldMkLst>
-          <pc:docMk/>
-          <pc:sldMk cId="3430641667" sldId="2708"/>
-        </pc:sldMkLst>
-      </pc:sldChg>
-      <pc:sldChg chg="modSp add mod ord">
-        <pc:chgData name="Xin Luo" userId="82312ee5779919a4" providerId="LiveId" clId="{4DB6C473-8E57-A543-81F7-48BE109E8C13}" dt="2023-02-21T07:27:15.123" v="3399" actId="20578"/>
-        <pc:sldMkLst>
-          <pc:docMk/>
-          <pc:sldMk cId="1257969106" sldId="2709"/>
-        </pc:sldMkLst>
-      </pc:sldChg>
-      <pc:sldChg chg="add del setBg">
-        <pc:chgData name="Xin Luo" userId="82312ee5779919a4" providerId="LiveId" clId="{4DB6C473-8E57-A543-81F7-48BE109E8C13}" dt="2023-02-21T03:22:38.148" v="1735"/>
-        <pc:sldMkLst>
-          <pc:docMk/>
-          <pc:sldMk cId="2068292362" sldId="2709"/>
-        </pc:sldMkLst>
-      </pc:sldChg>
-      <pc:sldChg chg="add del setBg">
-        <pc:chgData name="Xin Luo" userId="82312ee5779919a4" providerId="LiveId" clId="{4DB6C473-8E57-A543-81F7-48BE109E8C13}" dt="2023-02-21T03:22:29.206" v="1733"/>
-        <pc:sldMkLst>
-          <pc:docMk/>
-          <pc:sldMk cId="4244071672" sldId="2709"/>
-        </pc:sldMkLst>
-      </pc:sldChg>
-      <pc:sldChg chg="modSp add del mod">
-        <pc:chgData name="Xin Luo" userId="82312ee5779919a4" providerId="LiveId" clId="{4DB6C473-8E57-A543-81F7-48BE109E8C13}" dt="2023-02-21T12:49:10.754" v="4207" actId="2696"/>
-        <pc:sldMkLst>
-          <pc:docMk/>
-          <pc:sldMk cId="4096743637" sldId="2710"/>
-        </pc:sldMkLst>
-      </pc:sldChg>
-      <pc:sldChg chg="addSp delSp modSp add mod">
-        <pc:chgData name="Xin Luo" userId="82312ee5779919a4" providerId="LiveId" clId="{4DB6C473-8E57-A543-81F7-48BE109E8C13}" dt="2023-02-21T15:08:47.651" v="5619" actId="113"/>
-        <pc:sldMkLst>
-          <pc:docMk/>
-          <pc:sldMk cId="2744383376" sldId="2711"/>
-        </pc:sldMkLst>
-      </pc:sldChg>
-      <pc:sldChg chg="delSp modSp add del mod">
-        <pc:chgData name="Xin Luo" userId="82312ee5779919a4" providerId="LiveId" clId="{4DB6C473-8E57-A543-81F7-48BE109E8C13}" dt="2023-02-21T07:27:24.620" v="3402" actId="2696"/>
-        <pc:sldMkLst>
-          <pc:docMk/>
-          <pc:sldMk cId="1581220802" sldId="2712"/>
-        </pc:sldMkLst>
-      </pc:sldChg>
-      <pc:sldChg chg="modSp add del mod">
-        <pc:chgData name="Xin Luo" userId="82312ee5779919a4" providerId="LiveId" clId="{4DB6C473-8E57-A543-81F7-48BE109E8C13}" dt="2023-02-21T07:24:13.066" v="3357" actId="2696"/>
-        <pc:sldMkLst>
-          <pc:docMk/>
-          <pc:sldMk cId="2395170792" sldId="2713"/>
-        </pc:sldMkLst>
-      </pc:sldChg>
-      <pc:sldChg chg="addSp modSp add mod">
-        <pc:chgData name="Xin Luo" userId="82312ee5779919a4" providerId="LiveId" clId="{4DB6C473-8E57-A543-81F7-48BE109E8C13}" dt="2023-02-21T07:23:52.393" v="3353" actId="20577"/>
-        <pc:sldMkLst>
-          <pc:docMk/>
-          <pc:sldMk cId="280619949" sldId="2714"/>
-        </pc:sldMkLst>
-      </pc:sldChg>
-      <pc:sldChg chg="addSp modSp add mod">
-        <pc:chgData name="Xin Luo" userId="82312ee5779919a4" providerId="LiveId" clId="{4DB6C473-8E57-A543-81F7-48BE109E8C13}" dt="2023-02-21T13:47:35.461" v="4912" actId="1076"/>
-        <pc:sldMkLst>
-          <pc:docMk/>
-          <pc:sldMk cId="3852391939" sldId="2715"/>
-        </pc:sldMkLst>
-      </pc:sldChg>
-      <pc:sldChg chg="addSp modSp add mod ord">
-        <pc:chgData name="Xin Luo" userId="82312ee5779919a4" providerId="LiveId" clId="{4DB6C473-8E57-A543-81F7-48BE109E8C13}" dt="2023-02-21T13:15:30.678" v="4562" actId="1035"/>
-        <pc:sldMkLst>
-          <pc:docMk/>
-          <pc:sldMk cId="3026715585" sldId="2716"/>
-        </pc:sldMkLst>
-      </pc:sldChg>
-      <pc:sldChg chg="addSp modSp add mod">
-        <pc:chgData name="Xin Luo" userId="82312ee5779919a4" providerId="LiveId" clId="{4DB6C473-8E57-A543-81F7-48BE109E8C13}" dt="2023-02-21T13:48:38.001" v="4936" actId="1076"/>
-        <pc:sldMkLst>
-          <pc:docMk/>
-          <pc:sldMk cId="4136986794" sldId="2717"/>
-        </pc:sldMkLst>
-      </pc:sldChg>
-      <pc:sldChg chg="addSp delSp modSp add mod">
-        <pc:chgData name="Xin Luo" userId="82312ee5779919a4" providerId="LiveId" clId="{4DB6C473-8E57-A543-81F7-48BE109E8C13}" dt="2023-02-21T14:08:09.514" v="5152" actId="1035"/>
-        <pc:sldMkLst>
-          <pc:docMk/>
-          <pc:sldMk cId="1778017482" sldId="2718"/>
-        </pc:sldMkLst>
-      </pc:sldChg>
-      <pc:sldChg chg="delSp modSp add mod">
-        <pc:chgData name="Xin Luo" userId="82312ee5779919a4" providerId="LiveId" clId="{4DB6C473-8E57-A543-81F7-48BE109E8C13}" dt="2023-02-21T15:10:04.498" v="5724" actId="108"/>
-        <pc:sldMkLst>
-          <pc:docMk/>
-          <pc:sldMk cId="1858913004" sldId="2719"/>
-        </pc:sldMkLst>
-      </pc:sldChg>
-      <pc:sldChg chg="addSp delSp modSp add mod ord">
-        <pc:chgData name="Xin Luo" userId="82312ee5779919a4" providerId="LiveId" clId="{4DB6C473-8E57-A543-81F7-48BE109E8C13}" dt="2023-02-21T15:06:45.211" v="5600" actId="20578"/>
-        <pc:sldMkLst>
-          <pc:docMk/>
-          <pc:sldMk cId="3480831675" sldId="2720"/>
-        </pc:sldMkLst>
-      </pc:sldChg>
-      <pc:sldChg chg="add del">
-        <pc:chgData name="Xin Luo" userId="82312ee5779919a4" providerId="LiveId" clId="{4DB6C473-8E57-A543-81F7-48BE109E8C13}" dt="2023-02-21T14:55:30.326" v="5468" actId="2696"/>
-        <pc:sldMkLst>
-          <pc:docMk/>
-          <pc:sldMk cId="120373349" sldId="2721"/>
-        </pc:sldMkLst>
-      </pc:sldChg>
-      <pc:sldChg chg="addSp delSp modSp add mod ord">
-        <pc:chgData name="Xin Luo" userId="82312ee5779919a4" providerId="LiveId" clId="{4DB6C473-8E57-A543-81F7-48BE109E8C13}" dt="2023-02-21T15:06:40.684" v="5599" actId="20578"/>
-        <pc:sldMkLst>
-          <pc:docMk/>
-          <pc:sldMk cId="1410676903" sldId="2721"/>
-        </pc:sldMkLst>
-      </pc:sldChg>
-      <pc:sldMasterChg chg="del delSldLayout">
-        <pc:chgData name="Xin Luo" userId="82312ee5779919a4" providerId="LiveId" clId="{4DB6C473-8E57-A543-81F7-48BE109E8C13}" dt="2023-02-21T08:54:15.791" v="3593" actId="2696"/>
-        <pc:sldMasterMkLst>
-          <pc:docMk/>
-          <pc:sldMasterMk cId="1248561168" sldId="2147484998"/>
-        </pc:sldMasterMkLst>
-        <pc:sldLayoutChg chg="del">
-          <pc:chgData name="Xin Luo" userId="82312ee5779919a4" providerId="LiveId" clId="{4DB6C473-8E57-A543-81F7-48BE109E8C13}" dt="2023-02-21T08:54:15.772" v="3576" actId="2696"/>
-          <pc:sldLayoutMkLst>
-            <pc:docMk/>
-            <pc:sldMasterMk cId="1248561168" sldId="2147484998"/>
-            <pc:sldLayoutMk cId="2755518727" sldId="2147484999"/>
-          </pc:sldLayoutMkLst>
-        </pc:sldLayoutChg>
-        <pc:sldLayoutChg chg="del">
-          <pc:chgData name="Xin Luo" userId="82312ee5779919a4" providerId="LiveId" clId="{4DB6C473-8E57-A543-81F7-48BE109E8C13}" dt="2023-02-21T08:54:15.773" v="3577" actId="2696"/>
-          <pc:sldLayoutMkLst>
-            <pc:docMk/>
-            <pc:sldMasterMk cId="1248561168" sldId="2147484998"/>
-            <pc:sldLayoutMk cId="784447712" sldId="2147485000"/>
-          </pc:sldLayoutMkLst>
-        </pc:sldLayoutChg>
-        <pc:sldLayoutChg chg="del">
-          <pc:chgData name="Xin Luo" userId="82312ee5779919a4" providerId="LiveId" clId="{4DB6C473-8E57-A543-81F7-48BE109E8C13}" dt="2023-02-21T08:54:15.774" v="3578" actId="2696"/>
-          <pc:sldLayoutMkLst>
-            <pc:docMk/>
-            <pc:sldMasterMk cId="1248561168" sldId="2147484998"/>
-            <pc:sldLayoutMk cId="36404751" sldId="2147485001"/>
-          </pc:sldLayoutMkLst>
-        </pc:sldLayoutChg>
-        <pc:sldLayoutChg chg="del">
-          <pc:chgData name="Xin Luo" userId="82312ee5779919a4" providerId="LiveId" clId="{4DB6C473-8E57-A543-81F7-48BE109E8C13}" dt="2023-02-21T08:54:15.775" v="3579" actId="2696"/>
-          <pc:sldLayoutMkLst>
-            <pc:docMk/>
-            <pc:sldMasterMk cId="1248561168" sldId="2147484998"/>
-            <pc:sldLayoutMk cId="2142531553" sldId="2147485002"/>
-          </pc:sldLayoutMkLst>
-        </pc:sldLayoutChg>
-        <pc:sldLayoutChg chg="del">
-          <pc:chgData name="Xin Luo" userId="82312ee5779919a4" providerId="LiveId" clId="{4DB6C473-8E57-A543-81F7-48BE109E8C13}" dt="2023-02-21T08:54:15.776" v="3580" actId="2696"/>
-          <pc:sldLayoutMkLst>
-            <pc:docMk/>
-            <pc:sldMasterMk cId="1248561168" sldId="2147484998"/>
-            <pc:sldLayoutMk cId="646270699" sldId="2147485003"/>
-          </pc:sldLayoutMkLst>
-        </pc:sldLayoutChg>
-        <pc:sldLayoutChg chg="del">
-          <pc:chgData name="Xin Luo" userId="82312ee5779919a4" providerId="LiveId" clId="{4DB6C473-8E57-A543-81F7-48BE109E8C13}" dt="2023-02-21T08:54:15.777" v="3581" actId="2696"/>
-          <pc:sldLayoutMkLst>
-            <pc:docMk/>
-            <pc:sldMasterMk cId="1248561168" sldId="2147484998"/>
-            <pc:sldLayoutMk cId="1316154404" sldId="2147485004"/>
-          </pc:sldLayoutMkLst>
-        </pc:sldLayoutChg>
-        <pc:sldLayoutChg chg="del">
-          <pc:chgData name="Xin Luo" userId="82312ee5779919a4" providerId="LiveId" clId="{4DB6C473-8E57-A543-81F7-48BE109E8C13}" dt="2023-02-21T08:54:15.778" v="3582" actId="2696"/>
-          <pc:sldLayoutMkLst>
-            <pc:docMk/>
-            <pc:sldMasterMk cId="1248561168" sldId="2147484998"/>
-            <pc:sldLayoutMk cId="275448905" sldId="2147485005"/>
-          </pc:sldLayoutMkLst>
-        </pc:sldLayoutChg>
-        <pc:sldLayoutChg chg="del">
-          <pc:chgData name="Xin Luo" userId="82312ee5779919a4" providerId="LiveId" clId="{4DB6C473-8E57-A543-81F7-48BE109E8C13}" dt="2023-02-21T08:54:15.779" v="3583" actId="2696"/>
-          <pc:sldLayoutMkLst>
-            <pc:docMk/>
-            <pc:sldMasterMk cId="1248561168" sldId="2147484998"/>
-            <pc:sldLayoutMk cId="3173493555" sldId="2147485006"/>
-          </pc:sldLayoutMkLst>
-        </pc:sldLayoutChg>
-        <pc:sldLayoutChg chg="del">
-          <pc:chgData name="Xin Luo" userId="82312ee5779919a4" providerId="LiveId" clId="{4DB6C473-8E57-A543-81F7-48BE109E8C13}" dt="2023-02-21T08:54:15.780" v="3584" actId="2696"/>
-          <pc:sldLayoutMkLst>
-            <pc:docMk/>
-            <pc:sldMasterMk cId="1248561168" sldId="2147484998"/>
-            <pc:sldLayoutMk cId="2494408642" sldId="2147485007"/>
-          </pc:sldLayoutMkLst>
-        </pc:sldLayoutChg>
-        <pc:sldLayoutChg chg="del">
-          <pc:chgData name="Xin Luo" userId="82312ee5779919a4" providerId="LiveId" clId="{4DB6C473-8E57-A543-81F7-48BE109E8C13}" dt="2023-02-21T08:54:15.781" v="3585" actId="2696"/>
-          <pc:sldLayoutMkLst>
-            <pc:docMk/>
-            <pc:sldMasterMk cId="1248561168" sldId="2147484998"/>
-            <pc:sldLayoutMk cId="2144339703" sldId="2147485008"/>
-          </pc:sldLayoutMkLst>
-        </pc:sldLayoutChg>
-        <pc:sldLayoutChg chg="del">
-          <pc:chgData name="Xin Luo" userId="82312ee5779919a4" providerId="LiveId" clId="{4DB6C473-8E57-A543-81F7-48BE109E8C13}" dt="2023-02-21T08:54:15.781" v="3586" actId="2696"/>
-          <pc:sldLayoutMkLst>
-            <pc:docMk/>
-            <pc:sldMasterMk cId="1248561168" sldId="2147484998"/>
-            <pc:sldLayoutMk cId="3933479768" sldId="2147485009"/>
-          </pc:sldLayoutMkLst>
-        </pc:sldLayoutChg>
-        <pc:sldLayoutChg chg="del">
-          <pc:chgData name="Xin Luo" userId="82312ee5779919a4" providerId="LiveId" clId="{4DB6C473-8E57-A543-81F7-48BE109E8C13}" dt="2023-02-21T08:54:15.782" v="3587" actId="2696"/>
-          <pc:sldLayoutMkLst>
-            <pc:docMk/>
-            <pc:sldMasterMk cId="1248561168" sldId="2147484998"/>
-            <pc:sldLayoutMk cId="2569911404" sldId="2147485010"/>
-          </pc:sldLayoutMkLst>
-        </pc:sldLayoutChg>
-        <pc:sldLayoutChg chg="del">
-          <pc:chgData name="Xin Luo" userId="82312ee5779919a4" providerId="LiveId" clId="{4DB6C473-8E57-A543-81F7-48BE109E8C13}" dt="2023-02-21T08:54:15.783" v="3588" actId="2696"/>
-          <pc:sldLayoutMkLst>
-            <pc:docMk/>
-            <pc:sldMasterMk cId="1248561168" sldId="2147484998"/>
-            <pc:sldLayoutMk cId="487309151" sldId="2147485011"/>
-          </pc:sldLayoutMkLst>
-        </pc:sldLayoutChg>
-        <pc:sldLayoutChg chg="del">
-          <pc:chgData name="Xin Luo" userId="82312ee5779919a4" providerId="LiveId" clId="{4DB6C473-8E57-A543-81F7-48BE109E8C13}" dt="2023-02-21T08:54:15.784" v="3589" actId="2696"/>
-          <pc:sldLayoutMkLst>
-            <pc:docMk/>
-            <pc:sldMasterMk cId="1248561168" sldId="2147484998"/>
-            <pc:sldLayoutMk cId="940838525" sldId="2147485012"/>
-          </pc:sldLayoutMkLst>
-        </pc:sldLayoutChg>
-        <pc:sldLayoutChg chg="del">
-          <pc:chgData name="Xin Luo" userId="82312ee5779919a4" providerId="LiveId" clId="{4DB6C473-8E57-A543-81F7-48BE109E8C13}" dt="2023-02-21T08:54:15.785" v="3590" actId="2696"/>
-          <pc:sldLayoutMkLst>
-            <pc:docMk/>
-            <pc:sldMasterMk cId="1248561168" sldId="2147484998"/>
-            <pc:sldLayoutMk cId="858249230" sldId="2147485013"/>
-          </pc:sldLayoutMkLst>
-        </pc:sldLayoutChg>
-        <pc:sldLayoutChg chg="del">
-          <pc:chgData name="Xin Luo" userId="82312ee5779919a4" providerId="LiveId" clId="{4DB6C473-8E57-A543-81F7-48BE109E8C13}" dt="2023-02-21T08:54:15.786" v="3591" actId="2696"/>
-          <pc:sldLayoutMkLst>
-            <pc:docMk/>
-            <pc:sldMasterMk cId="1248561168" sldId="2147484998"/>
-            <pc:sldLayoutMk cId="1094809115" sldId="2147485014"/>
-          </pc:sldLayoutMkLst>
-        </pc:sldLayoutChg>
-        <pc:sldLayoutChg chg="del">
-          <pc:chgData name="Xin Luo" userId="82312ee5779919a4" providerId="LiveId" clId="{4DB6C473-8E57-A543-81F7-48BE109E8C13}" dt="2023-02-21T08:54:15.787" v="3592" actId="2696"/>
-          <pc:sldLayoutMkLst>
-            <pc:docMk/>
-            <pc:sldMasterMk cId="1248561168" sldId="2147484998"/>
-            <pc:sldLayoutMk cId="2452001345" sldId="2147485015"/>
-          </pc:sldLayoutMkLst>
-        </pc:sldLayoutChg>
-      </pc:sldMasterChg>
-    </pc:docChg>
-  </pc:docChgLst>
-  <pc:docChgLst>
-    <pc:chgData name="Xin Luo" userId="82312ee5779919a4" providerId="LiveId" clId="{82BFAA31-791A-9843-976C-3AAFAA5AC07D}"/>
-    <pc:docChg chg="undo custSel addSld delSld modSld">
-      <pc:chgData name="Xin Luo" userId="82312ee5779919a4" providerId="LiveId" clId="{82BFAA31-791A-9843-976C-3AAFAA5AC07D}" dt="2023-03-05T13:50:34.172" v="6224" actId="1035"/>
+    <pc:chgData name="Xin Luo" userId="82312ee5779919a4" providerId="LiveId" clId="{4B16E866-FFF1-585A-8670-68209B92BFC1}"/>
+    <pc:docChg chg="modSld">
+      <pc:chgData name="Xin Luo" userId="82312ee5779919a4" providerId="LiveId" clId="{4B16E866-FFF1-585A-8670-68209B92BFC1}" dt="2026-08-27T06:20:42.853" v="159" actId="20577"/>
       <pc:docMkLst>
         <pc:docMk/>
       </pc:docMkLst>
       <pc:sldChg chg="modSp mod">
-        <pc:chgData name="Xin Luo" userId="82312ee5779919a4" providerId="LiveId" clId="{82BFAA31-791A-9843-976C-3AAFAA5AC07D}" dt="2023-03-04T01:58:49.501" v="2918" actId="20577"/>
+        <pc:chgData name="Xin Luo" userId="82312ee5779919a4" providerId="LiveId" clId="{4B16E866-FFF1-585A-8670-68209B92BFC1}" dt="2026-08-27T06:20:42.853" v="159" actId="20577"/>
         <pc:sldMkLst>
           <pc:docMk/>
-          <pc:sldMk cId="4067577602" sldId="2605"/>
+          <pc:sldMk cId="940880124" sldId="2742"/>
         </pc:sldMkLst>
-      </pc:sldChg>
-      <pc:sldChg chg="addSp delSp modSp mod">
-        <pc:chgData name="Xin Luo" userId="82312ee5779919a4" providerId="LiveId" clId="{82BFAA31-791A-9843-976C-3AAFAA5AC07D}" dt="2023-03-04T03:17:04.154" v="3027" actId="20577"/>
-        <pc:sldMkLst>
-          <pc:docMk/>
-          <pc:sldMk cId="3833073590" sldId="2716"/>
-        </pc:sldMkLst>
-      </pc:sldChg>
-      <pc:sldChg chg="addSp delSp modSp mod">
-        <pc:chgData name="Xin Luo" userId="82312ee5779919a4" providerId="LiveId" clId="{82BFAA31-791A-9843-976C-3AAFAA5AC07D}" dt="2023-02-24T08:50:06.402" v="585" actId="20577"/>
-        <pc:sldMkLst>
-          <pc:docMk/>
-          <pc:sldMk cId="972163772" sldId="2720"/>
-        </pc:sldMkLst>
-      </pc:sldChg>
-      <pc:sldChg chg="addSp delSp modSp mod">
-        <pc:chgData name="Xin Luo" userId="82312ee5779919a4" providerId="LiveId" clId="{82BFAA31-791A-9843-976C-3AAFAA5AC07D}" dt="2023-02-24T13:00:34.955" v="2586" actId="1036"/>
-        <pc:sldMkLst>
-          <pc:docMk/>
-          <pc:sldMk cId="2689695864" sldId="2721"/>
-        </pc:sldMkLst>
-      </pc:sldChg>
-      <pc:sldChg chg="modSp add del mod">
-        <pc:chgData name="Xin Luo" userId="82312ee5779919a4" providerId="LiveId" clId="{82BFAA31-791A-9843-976C-3AAFAA5AC07D}" dt="2023-03-05T13:50:34.172" v="6224" actId="1035"/>
-        <pc:sldMkLst>
-          <pc:docMk/>
-          <pc:sldMk cId="1209572041" sldId="2722"/>
-        </pc:sldMkLst>
-      </pc:sldChg>
-      <pc:sldChg chg="add del">
-        <pc:chgData name="Xin Luo" userId="82312ee5779919a4" providerId="LiveId" clId="{82BFAA31-791A-9843-976C-3AAFAA5AC07D}" dt="2023-03-04T02:01:30.300" v="3010" actId="2696"/>
-        <pc:sldMkLst>
-          <pc:docMk/>
-          <pc:sldMk cId="2179406886" sldId="2724"/>
-        </pc:sldMkLst>
-      </pc:sldChg>
-      <pc:sldChg chg="addSp delSp modSp add mod">
-        <pc:chgData name="Xin Luo" userId="82312ee5779919a4" providerId="LiveId" clId="{82BFAA31-791A-9843-976C-3AAFAA5AC07D}" dt="2023-03-04T03:20:48.887" v="3034" actId="1036"/>
-        <pc:sldMkLst>
-          <pc:docMk/>
-          <pc:sldMk cId="4156684215" sldId="2738"/>
-        </pc:sldMkLst>
-      </pc:sldChg>
-      <pc:sldChg chg="delSp modSp add mod">
-        <pc:chgData name="Xin Luo" userId="82312ee5779919a4" providerId="LiveId" clId="{82BFAA31-791A-9843-976C-3AAFAA5AC07D}" dt="2023-03-04T03:45:03.441" v="3776" actId="21"/>
-        <pc:sldMkLst>
-          <pc:docMk/>
-          <pc:sldMk cId="2776132283" sldId="2739"/>
-        </pc:sldMkLst>
-      </pc:sldChg>
-      <pc:sldChg chg="delSp modSp add mod">
-        <pc:chgData name="Xin Luo" userId="82312ee5779919a4" providerId="LiveId" clId="{82BFAA31-791A-9843-976C-3AAFAA5AC07D}" dt="2023-02-24T12:42:54.354" v="2196" actId="20577"/>
-        <pc:sldMkLst>
-          <pc:docMk/>
-          <pc:sldMk cId="2510358707" sldId="2740"/>
-        </pc:sldMkLst>
-      </pc:sldChg>
-      <pc:sldChg chg="add del">
-        <pc:chgData name="Xin Luo" userId="82312ee5779919a4" providerId="LiveId" clId="{82BFAA31-791A-9843-976C-3AAFAA5AC07D}" dt="2023-02-24T12:26:24.988" v="1931"/>
-        <pc:sldMkLst>
-          <pc:docMk/>
-          <pc:sldMk cId="2028886328" sldId="2741"/>
-        </pc:sldMkLst>
-      </pc:sldChg>
-      <pc:sldChg chg="delSp modSp add mod">
-        <pc:chgData name="Xin Luo" userId="82312ee5779919a4" providerId="LiveId" clId="{82BFAA31-791A-9843-976C-3AAFAA5AC07D}" dt="2023-03-04T15:50:04.739" v="6144" actId="1076"/>
-        <pc:sldMkLst>
-          <pc:docMk/>
-          <pc:sldMk cId="2476237792" sldId="2741"/>
-        </pc:sldMkLst>
-      </pc:sldChg>
-      <pc:sldChg chg="addSp delSp modSp add mod">
-        <pc:chgData name="Xin Luo" userId="82312ee5779919a4" providerId="LiveId" clId="{82BFAA31-791A-9843-976C-3AAFAA5AC07D}" dt="2023-03-04T03:03:29.776" v="3020" actId="1036"/>
-        <pc:sldMkLst>
-          <pc:docMk/>
-          <pc:sldMk cId="3151170836" sldId="2742"/>
-        </pc:sldMkLst>
-      </pc:sldChg>
-      <pc:sldChg chg="addSp delSp modSp add mod">
-        <pc:chgData name="Xin Luo" userId="82312ee5779919a4" providerId="LiveId" clId="{82BFAA31-791A-9843-976C-3AAFAA5AC07D}" dt="2023-03-04T03:37:26.975" v="3431" actId="1076"/>
-        <pc:sldMkLst>
-          <pc:docMk/>
-          <pc:sldMk cId="4194482579" sldId="2743"/>
-        </pc:sldMkLst>
-      </pc:sldChg>
-      <pc:sldChg chg="addSp delSp modSp add mod">
-        <pc:chgData name="Xin Luo" userId="82312ee5779919a4" providerId="LiveId" clId="{82BFAA31-791A-9843-976C-3AAFAA5AC07D}" dt="2023-03-04T15:11:00.971" v="4794" actId="2711"/>
-        <pc:sldMkLst>
-          <pc:docMk/>
-          <pc:sldMk cId="3883315984" sldId="2744"/>
-        </pc:sldMkLst>
-      </pc:sldChg>
-      <pc:sldChg chg="modSp add mod">
-        <pc:chgData name="Xin Luo" userId="82312ee5779919a4" providerId="LiveId" clId="{82BFAA31-791A-9843-976C-3AAFAA5AC07D}" dt="2023-03-04T15:21:58.766" v="5230" actId="1038"/>
-        <pc:sldMkLst>
-          <pc:docMk/>
-          <pc:sldMk cId="3741103209" sldId="2745"/>
-        </pc:sldMkLst>
-      </pc:sldChg>
-      <pc:sldChg chg="modSp add mod">
-        <pc:chgData name="Xin Luo" userId="82312ee5779919a4" providerId="LiveId" clId="{82BFAA31-791A-9843-976C-3AAFAA5AC07D}" dt="2023-03-04T15:08:22.005" v="4615" actId="1035"/>
-        <pc:sldMkLst>
-          <pc:docMk/>
-          <pc:sldMk cId="322086101" sldId="2746"/>
-        </pc:sldMkLst>
-      </pc:sldChg>
-      <pc:sldChg chg="addSp modSp add mod">
-        <pc:chgData name="Xin Luo" userId="82312ee5779919a4" providerId="LiveId" clId="{82BFAA31-791A-9843-976C-3AAFAA5AC07D}" dt="2023-03-04T15:26:46.366" v="5547" actId="1076"/>
-        <pc:sldMkLst>
-          <pc:docMk/>
-          <pc:sldMk cId="2920839983" sldId="2747"/>
-        </pc:sldMkLst>
-      </pc:sldChg>
-      <pc:sldChg chg="addSp delSp modSp add mod">
-        <pc:chgData name="Xin Luo" userId="82312ee5779919a4" providerId="LiveId" clId="{82BFAA31-791A-9843-976C-3AAFAA5AC07D}" dt="2023-03-04T15:46:20.499" v="5952" actId="1582"/>
-        <pc:sldMkLst>
-          <pc:docMk/>
-          <pc:sldMk cId="2081473989" sldId="2748"/>
-        </pc:sldMkLst>
-      </pc:sldChg>
-      <pc:sldChg chg="addSp delSp modSp add mod">
-        <pc:chgData name="Xin Luo" userId="82312ee5779919a4" providerId="LiveId" clId="{82BFAA31-791A-9843-976C-3AAFAA5AC07D}" dt="2023-03-04T15:48:59.888" v="6079" actId="1076"/>
-        <pc:sldMkLst>
-          <pc:docMk/>
-          <pc:sldMk cId="1994915307" sldId="2749"/>
-        </pc:sldMkLst>
-      </pc:sldChg>
-      <pc:sldChg chg="addSp delSp modSp add mod">
-        <pc:chgData name="Xin Luo" userId="82312ee5779919a4" providerId="LiveId" clId="{82BFAA31-791A-9843-976C-3AAFAA5AC07D}" dt="2023-03-04T15:43:09.927" v="5903" actId="1035"/>
-        <pc:sldMkLst>
-          <pc:docMk/>
-          <pc:sldMk cId="202264030" sldId="2750"/>
-        </pc:sldMkLst>
-      </pc:sldChg>
-      <pc:sldChg chg="add del">
-        <pc:chgData name="Xin Luo" userId="82312ee5779919a4" providerId="LiveId" clId="{82BFAA31-791A-9843-976C-3AAFAA5AC07D}" dt="2023-03-04T15:46:42.673" v="5956" actId="2696"/>
-        <pc:sldMkLst>
-          <pc:docMk/>
-          <pc:sldMk cId="1628918360" sldId="2751"/>
-        </pc:sldMkLst>
-      </pc:sldChg>
-    </pc:docChg>
-  </pc:docChgLst>
-  <pc:docChgLst>
-    <pc:chgData name="Xin Luo" userId="82312ee5779919a4" providerId="LiveId" clId="{44968A38-E2ED-AB49-A7AA-4E241E470C4E}"/>
-    <pc:docChg chg="custSel addSld modSld">
-      <pc:chgData name="Xin Luo" userId="82312ee5779919a4" providerId="LiveId" clId="{44968A38-E2ED-AB49-A7AA-4E241E470C4E}" dt="2024-04-06T05:28:09.746" v="48" actId="20577"/>
-      <pc:docMkLst>
-        <pc:docMk/>
-      </pc:docMkLst>
-      <pc:sldChg chg="addSp delSp modSp mod">
-        <pc:chgData name="Xin Luo" userId="82312ee5779919a4" providerId="LiveId" clId="{44968A38-E2ED-AB49-A7AA-4E241E470C4E}" dt="2024-04-06T05:28:09.746" v="48" actId="20577"/>
-        <pc:sldMkLst>
-          <pc:docMk/>
-          <pc:sldMk cId="1209572041" sldId="2722"/>
-        </pc:sldMkLst>
-      </pc:sldChg>
-      <pc:sldChg chg="add">
-        <pc:chgData name="Xin Luo" userId="82312ee5779919a4" providerId="LiveId" clId="{44968A38-E2ED-AB49-A7AA-4E241E470C4E}" dt="2024-04-06T03:15:35.142" v="0"/>
-        <pc:sldMkLst>
-          <pc:docMk/>
-          <pc:sldMk cId="472418319" sldId="2759"/>
-        </pc:sldMkLst>
-      </pc:sldChg>
-      <pc:sldChg chg="add">
-        <pc:chgData name="Xin Luo" userId="82312ee5779919a4" providerId="LiveId" clId="{44968A38-E2ED-AB49-A7AA-4E241E470C4E}" dt="2024-04-06T03:15:37.385" v="1"/>
-        <pc:sldMkLst>
-          <pc:docMk/>
-          <pc:sldMk cId="1125183986" sldId="2760"/>
-        </pc:sldMkLst>
-      </pc:sldChg>
-      <pc:sldChg chg="add">
-        <pc:chgData name="Xin Luo" userId="82312ee5779919a4" providerId="LiveId" clId="{44968A38-E2ED-AB49-A7AA-4E241E470C4E}" dt="2024-04-06T03:16:16.152" v="10"/>
-        <pc:sldMkLst>
-          <pc:docMk/>
-          <pc:sldMk cId="1417780723" sldId="2761"/>
-        </pc:sldMkLst>
-      </pc:sldChg>
-    </pc:docChg>
-  </pc:docChgLst>
-  <pc:docChgLst>
-    <pc:chgData name="Xin Luo" userId="82312ee5779919a4" providerId="LiveId" clId="{EC6CD411-4DB4-4D4B-8848-3139AC647B53}"/>
-    <pc:docChg chg="undo custSel modSld">
-      <pc:chgData name="Xin Luo" userId="82312ee5779919a4" providerId="LiveId" clId="{EC6CD411-4DB4-4D4B-8848-3139AC647B53}" dt="2025-05-30T02:40:19.504" v="197" actId="208"/>
-      <pc:docMkLst>
-        <pc:docMk/>
-      </pc:docMkLst>
-      <pc:sldChg chg="addSp delSp modSp mod">
-        <pc:chgData name="Xin Luo" userId="82312ee5779919a4" providerId="LiveId" clId="{EC6CD411-4DB4-4D4B-8848-3139AC647B53}" dt="2025-05-30T02:40:19.504" v="197" actId="208"/>
-        <pc:sldMkLst>
-          <pc:docMk/>
-          <pc:sldMk cId="1924830660" sldId="2774"/>
-        </pc:sldMkLst>
-      </pc:sldChg>
-    </pc:docChg>
-  </pc:docChgLst>
-  <pc:docChgLst>
-    <pc:chgData name="Xin Luo" userId="82312ee5779919a4" providerId="LiveId" clId="{D28526AD-BB72-0B4E-9638-04907E1F3622}"/>
-    <pc:docChg chg="delSld modSld">
-      <pc:chgData name="Xin Luo" userId="82312ee5779919a4" providerId="LiveId" clId="{D28526AD-BB72-0B4E-9638-04907E1F3622}" dt="2023-09-18T01:27:13.837" v="116" actId="2696"/>
-      <pc:docMkLst>
-        <pc:docMk/>
-      </pc:docMkLst>
-      <pc:sldChg chg="modSp mod">
-        <pc:chgData name="Xin Luo" userId="82312ee5779919a4" providerId="LiveId" clId="{D28526AD-BB72-0B4E-9638-04907E1F3622}" dt="2023-09-18T01:27:09.604" v="115" actId="255"/>
-        <pc:sldMkLst>
-          <pc:docMk/>
-          <pc:sldMk cId="1209572041" sldId="2722"/>
-        </pc:sldMkLst>
-      </pc:sldChg>
-      <pc:sldChg chg="del">
-        <pc:chgData name="Xin Luo" userId="82312ee5779919a4" providerId="LiveId" clId="{D28526AD-BB72-0B4E-9638-04907E1F3622}" dt="2023-09-18T01:27:13.837" v="116" actId="2696"/>
-        <pc:sldMkLst>
-          <pc:docMk/>
-          <pc:sldMk cId="2476237792" sldId="2741"/>
-        </pc:sldMkLst>
-      </pc:sldChg>
-    </pc:docChg>
-  </pc:docChgLst>
-  <pc:docChgLst>
-    <pc:chgData name="Xin Luo" userId="82312ee5779919a4" providerId="LiveId" clId="{FCEC1DB3-1553-A84D-BEB3-196FBFC1F716}"/>
-    <pc:docChg chg="addSld delSld modSld">
-      <pc:chgData name="Xin Luo" userId="82312ee5779919a4" providerId="LiveId" clId="{FCEC1DB3-1553-A84D-BEB3-196FBFC1F716}" dt="2025-05-08T15:33:24.759" v="211"/>
-      <pc:docMkLst>
-        <pc:docMk/>
-      </pc:docMkLst>
-      <pc:sldChg chg="modSp mod">
-        <pc:chgData name="Xin Luo" userId="82312ee5779919a4" providerId="LiveId" clId="{FCEC1DB3-1553-A84D-BEB3-196FBFC1F716}" dt="2025-05-08T15:24:38.315" v="107" actId="20577"/>
-        <pc:sldMkLst>
-          <pc:docMk/>
-          <pc:sldMk cId="1576120367" sldId="2387"/>
-        </pc:sldMkLst>
-      </pc:sldChg>
-      <pc:sldChg chg="modSp mod">
-        <pc:chgData name="Xin Luo" userId="82312ee5779919a4" providerId="LiveId" clId="{FCEC1DB3-1553-A84D-BEB3-196FBFC1F716}" dt="2025-05-08T15:24:52.755" v="136" actId="20577"/>
-        <pc:sldMkLst>
-          <pc:docMk/>
-          <pc:sldMk cId="2415901206" sldId="2447"/>
-        </pc:sldMkLst>
-      </pc:sldChg>
-      <pc:sldChg chg="modSp mod">
-        <pc:chgData name="Xin Luo" userId="82312ee5779919a4" providerId="LiveId" clId="{FCEC1DB3-1553-A84D-BEB3-196FBFC1F716}" dt="2025-05-08T15:22:52.715" v="29" actId="20577"/>
-        <pc:sldMkLst>
-          <pc:docMk/>
-          <pc:sldMk cId="1658607177" sldId="2708"/>
-        </pc:sldMkLst>
-      </pc:sldChg>
-      <pc:sldChg chg="modSp mod">
-        <pc:chgData name="Xin Luo" userId="82312ee5779919a4" providerId="LiveId" clId="{FCEC1DB3-1553-A84D-BEB3-196FBFC1F716}" dt="2025-05-08T15:25:39.642" v="181" actId="20577"/>
-        <pc:sldMkLst>
-          <pc:docMk/>
-          <pc:sldMk cId="481122590" sldId="2709"/>
-        </pc:sldMkLst>
-      </pc:sldChg>
-      <pc:sldChg chg="modSp mod">
-        <pc:chgData name="Xin Luo" userId="82312ee5779919a4" providerId="LiveId" clId="{FCEC1DB3-1553-A84D-BEB3-196FBFC1F716}" dt="2025-05-08T15:25:50.393" v="210" actId="20577"/>
-        <pc:sldMkLst>
-          <pc:docMk/>
-          <pc:sldMk cId="972163772" sldId="2720"/>
-        </pc:sldMkLst>
-      </pc:sldChg>
-      <pc:sldChg chg="del">
-        <pc:chgData name="Xin Luo" userId="82312ee5779919a4" providerId="LiveId" clId="{FCEC1DB3-1553-A84D-BEB3-196FBFC1F716}" dt="2025-05-08T15:25:22.706" v="140" actId="2696"/>
-        <pc:sldMkLst>
-          <pc:docMk/>
-          <pc:sldMk cId="2742362314" sldId="2727"/>
-        </pc:sldMkLst>
-      </pc:sldChg>
-      <pc:sldChg chg="del">
-        <pc:chgData name="Xin Luo" userId="82312ee5779919a4" providerId="LiveId" clId="{FCEC1DB3-1553-A84D-BEB3-196FBFC1F716}" dt="2025-05-08T15:25:25.326" v="141" actId="2696"/>
-        <pc:sldMkLst>
-          <pc:docMk/>
-          <pc:sldMk cId="3682048310" sldId="2728"/>
-        </pc:sldMkLst>
-      </pc:sldChg>
-      <pc:sldChg chg="add">
-        <pc:chgData name="Xin Luo" userId="82312ee5779919a4" providerId="LiveId" clId="{FCEC1DB3-1553-A84D-BEB3-196FBFC1F716}" dt="2025-05-08T15:25:20.139" v="139"/>
-        <pc:sldMkLst>
-          <pc:docMk/>
-          <pc:sldMk cId="3053350483" sldId="2729"/>
-        </pc:sldMkLst>
-      </pc:sldChg>
-      <pc:sldChg chg="add">
-        <pc:chgData name="Xin Luo" userId="82312ee5779919a4" providerId="LiveId" clId="{FCEC1DB3-1553-A84D-BEB3-196FBFC1F716}" dt="2025-05-08T15:33:24.759" v="211"/>
-        <pc:sldMkLst>
-          <pc:docMk/>
-          <pc:sldMk cId="1201927867" sldId="2730"/>
-        </pc:sldMkLst>
-      </pc:sldChg>
-      <pc:sldChg chg="del">
-        <pc:chgData name="Xin Luo" userId="82312ee5779919a4" providerId="LiveId" clId="{FCEC1DB3-1553-A84D-BEB3-196FBFC1F716}" dt="2025-05-08T15:25:25.332" v="142" actId="2696"/>
-        <pc:sldMkLst>
-          <pc:docMk/>
-          <pc:sldMk cId="13868781" sldId="2732"/>
-        </pc:sldMkLst>
-      </pc:sldChg>
-      <pc:sldChg chg="add del">
-        <pc:chgData name="Xin Luo" userId="82312ee5779919a4" providerId="LiveId" clId="{FCEC1DB3-1553-A84D-BEB3-196FBFC1F716}" dt="2025-05-08T15:25:15.117" v="138"/>
-        <pc:sldMkLst>
-          <pc:docMk/>
-          <pc:sldMk cId="402523077" sldId="2765"/>
-        </pc:sldMkLst>
-      </pc:sldChg>
-      <pc:sldChg chg="add">
-        <pc:chgData name="Xin Luo" userId="82312ee5779919a4" providerId="LiveId" clId="{FCEC1DB3-1553-A84D-BEB3-196FBFC1F716}" dt="2025-05-08T15:33:24.759" v="211"/>
-        <pc:sldMkLst>
-          <pc:docMk/>
-          <pc:sldMk cId="3947651410" sldId="2767"/>
-        </pc:sldMkLst>
-      </pc:sldChg>
-      <pc:sldChg chg="add">
-        <pc:chgData name="Xin Luo" userId="82312ee5779919a4" providerId="LiveId" clId="{FCEC1DB3-1553-A84D-BEB3-196FBFC1F716}" dt="2025-05-08T15:33:24.759" v="211"/>
-        <pc:sldMkLst>
-          <pc:docMk/>
-          <pc:sldMk cId="4149704501" sldId="2768"/>
-        </pc:sldMkLst>
-      </pc:sldChg>
-    </pc:docChg>
-  </pc:docChgLst>
-  <pc:docChgLst>
-    <pc:chgData name="Xin Luo" userId="82312ee5779919a4" providerId="LiveId" clId="{9073B790-108B-9A41-B544-91FBC3D671E5}"/>
-    <pc:docChg chg="custSel delSld modSld sldOrd">
-      <pc:chgData name="Xin Luo" userId="82312ee5779919a4" providerId="LiveId" clId="{9073B790-108B-9A41-B544-91FBC3D671E5}" dt="2025-05-08T15:08:38.626" v="318" actId="20578"/>
-      <pc:docMkLst>
-        <pc:docMk/>
-      </pc:docMkLst>
-      <pc:sldChg chg="modSp mod">
-        <pc:chgData name="Xin Luo" userId="82312ee5779919a4" providerId="LiveId" clId="{9073B790-108B-9A41-B544-91FBC3D671E5}" dt="2025-05-08T15:07:42.200" v="225" actId="1076"/>
-        <pc:sldMkLst>
-          <pc:docMk/>
-          <pc:sldMk cId="1576120367" sldId="2387"/>
-        </pc:sldMkLst>
-      </pc:sldChg>
-      <pc:sldChg chg="modSp mod">
-        <pc:chgData name="Xin Luo" userId="82312ee5779919a4" providerId="LiveId" clId="{9073B790-108B-9A41-B544-91FBC3D671E5}" dt="2025-05-08T15:07:54.688" v="256" actId="20577"/>
-        <pc:sldMkLst>
-          <pc:docMk/>
-          <pc:sldMk cId="2415901206" sldId="2447"/>
-        </pc:sldMkLst>
-      </pc:sldChg>
-      <pc:sldChg chg="modSp mod">
-        <pc:chgData name="Xin Luo" userId="82312ee5779919a4" providerId="LiveId" clId="{9073B790-108B-9A41-B544-91FBC3D671E5}" dt="2025-05-08T15:06:05.338" v="98" actId="20577"/>
-        <pc:sldMkLst>
-          <pc:docMk/>
-          <pc:sldMk cId="1658607177" sldId="2708"/>
-        </pc:sldMkLst>
-      </pc:sldChg>
-      <pc:sldChg chg="modSp mod">
-        <pc:chgData name="Xin Luo" userId="82312ee5779919a4" providerId="LiveId" clId="{9073B790-108B-9A41-B544-91FBC3D671E5}" dt="2025-05-08T15:08:09.867" v="289" actId="20577"/>
-        <pc:sldMkLst>
-          <pc:docMk/>
-          <pc:sldMk cId="481122590" sldId="2709"/>
-        </pc:sldMkLst>
-      </pc:sldChg>
-      <pc:sldChg chg="ord">
-        <pc:chgData name="Xin Luo" userId="82312ee5779919a4" providerId="LiveId" clId="{9073B790-108B-9A41-B544-91FBC3D671E5}" dt="2025-05-08T15:08:38.626" v="318" actId="20578"/>
-        <pc:sldMkLst>
-          <pc:docMk/>
-          <pc:sldMk cId="3833073590" sldId="2716"/>
-        </pc:sldMkLst>
-      </pc:sldChg>
-      <pc:sldChg chg="modSp mod">
-        <pc:chgData name="Xin Luo" userId="82312ee5779919a4" providerId="LiveId" clId="{9073B790-108B-9A41-B544-91FBC3D671E5}" dt="2025-05-08T15:08:23.041" v="317" actId="20577"/>
-        <pc:sldMkLst>
-          <pc:docMk/>
-          <pc:sldMk cId="972163772" sldId="2720"/>
-        </pc:sldMkLst>
-      </pc:sldChg>
-      <pc:sldChg chg="del">
-        <pc:chgData name="Xin Luo" userId="82312ee5779919a4" providerId="LiveId" clId="{9073B790-108B-9A41-B544-91FBC3D671E5}" dt="2025-05-08T15:05:09.672" v="25" actId="2696"/>
-        <pc:sldMkLst>
-          <pc:docMk/>
-          <pc:sldMk cId="1209572041" sldId="2722"/>
-        </pc:sldMkLst>
-      </pc:sldChg>
-      <pc:sldChg chg="ord">
-        <pc:chgData name="Xin Luo" userId="82312ee5779919a4" providerId="LiveId" clId="{9073B790-108B-9A41-B544-91FBC3D671E5}" dt="2025-05-08T15:08:38.626" v="318" actId="20578"/>
-        <pc:sldMkLst>
-          <pc:docMk/>
-          <pc:sldMk cId="2371836296" sldId="2756"/>
-        </pc:sldMkLst>
-      </pc:sldChg>
-      <pc:sldChg chg="ord">
-        <pc:chgData name="Xin Luo" userId="82312ee5779919a4" providerId="LiveId" clId="{9073B790-108B-9A41-B544-91FBC3D671E5}" dt="2025-05-08T15:08:38.626" v="318" actId="20578"/>
-        <pc:sldMkLst>
-          <pc:docMk/>
-          <pc:sldMk cId="397779649" sldId="2757"/>
-        </pc:sldMkLst>
-      </pc:sldChg>
-      <pc:sldChg chg="del">
-        <pc:chgData name="Xin Luo" userId="82312ee5779919a4" providerId="LiveId" clId="{9073B790-108B-9A41-B544-91FBC3D671E5}" dt="2025-05-08T15:04:45.007" v="0" actId="2696"/>
-        <pc:sldMkLst>
-          <pc:docMk/>
-          <pc:sldMk cId="472418319" sldId="2759"/>
-        </pc:sldMkLst>
-      </pc:sldChg>
-      <pc:sldChg chg="modSp mod">
-        <pc:chgData name="Xin Luo" userId="82312ee5779919a4" providerId="LiveId" clId="{9073B790-108B-9A41-B544-91FBC3D671E5}" dt="2025-05-08T15:05:06.820" v="23" actId="14100"/>
-        <pc:sldMkLst>
-          <pc:docMk/>
-          <pc:sldMk cId="1125183986" sldId="2760"/>
-        </pc:sldMkLst>
-      </pc:sldChg>
-      <pc:sldChg chg="del">
-        <pc:chgData name="Xin Luo" userId="82312ee5779919a4" providerId="LiveId" clId="{9073B790-108B-9A41-B544-91FBC3D671E5}" dt="2025-05-08T15:05:09.671" v="24" actId="2696"/>
-        <pc:sldMkLst>
-          <pc:docMk/>
-          <pc:sldMk cId="1417780723" sldId="2761"/>
-        </pc:sldMkLst>
-      </pc:sldChg>
-    </pc:docChg>
-  </pc:docChgLst>
-  <pc:docChgLst>
-    <pc:chgData name="Xin Luo" userId="82312ee5779919a4" providerId="LiveId" clId="{A508F461-0D73-864F-B88A-277BCD613B0A}"/>
-    <pc:docChg chg="modSld">
-      <pc:chgData name="Xin Luo" userId="82312ee5779919a4" providerId="LiveId" clId="{A508F461-0D73-864F-B88A-277BCD613B0A}" dt="2023-09-11T02:08:48.074" v="121" actId="1076"/>
-      <pc:docMkLst>
-        <pc:docMk/>
-      </pc:docMkLst>
-      <pc:sldChg chg="modSp mod">
-        <pc:chgData name="Xin Luo" userId="82312ee5779919a4" providerId="LiveId" clId="{A508F461-0D73-864F-B88A-277BCD613B0A}" dt="2023-09-11T01:25:36.157" v="49" actId="255"/>
-        <pc:sldMkLst>
-          <pc:docMk/>
-          <pc:sldMk cId="1209572041" sldId="2722"/>
-        </pc:sldMkLst>
-      </pc:sldChg>
-      <pc:sldChg chg="modSp mod">
-        <pc:chgData name="Xin Luo" userId="82312ee5779919a4" providerId="LiveId" clId="{A508F461-0D73-864F-B88A-277BCD613B0A}" dt="2023-09-11T02:08:48.074" v="121" actId="1076"/>
-        <pc:sldMkLst>
-          <pc:docMk/>
-          <pc:sldMk cId="3151170836" sldId="2742"/>
-        </pc:sldMkLst>
-      </pc:sldChg>
-      <pc:sldChg chg="modSp mod">
-        <pc:chgData name="Xin Luo" userId="82312ee5779919a4" providerId="LiveId" clId="{A508F461-0D73-864F-B88A-277BCD613B0A}" dt="2023-09-11T01:24:19.474" v="26" actId="255"/>
-        <pc:sldMkLst>
-          <pc:docMk/>
-          <pc:sldMk cId="3741103209" sldId="2745"/>
-        </pc:sldMkLst>
-      </pc:sldChg>
-      <pc:sldChg chg="modSp mod">
-        <pc:chgData name="Xin Luo" userId="82312ee5779919a4" providerId="LiveId" clId="{A508F461-0D73-864F-B88A-277BCD613B0A}" dt="2023-09-11T01:25:10.921" v="46" actId="1035"/>
-        <pc:sldMkLst>
-          <pc:docMk/>
-          <pc:sldMk cId="2081473989" sldId="2748"/>
-        </pc:sldMkLst>
-      </pc:sldChg>
-      <pc:sldChg chg="modSp mod">
-        <pc:chgData name="Xin Luo" userId="82312ee5779919a4" providerId="LiveId" clId="{A508F461-0D73-864F-B88A-277BCD613B0A}" dt="2023-09-11T01:23:28.376" v="25" actId="1037"/>
-        <pc:sldMkLst>
-          <pc:docMk/>
-          <pc:sldMk cId="2927474256" sldId="2754"/>
-        </pc:sldMkLst>
-      </pc:sldChg>
-    </pc:docChg>
-  </pc:docChgLst>
-  <pc:docChgLst>
-    <pc:chgData name="Xin Luo" userId="82312ee5779919a4" providerId="LiveId" clId="{4807F875-6F75-AB41-83F0-5AE490FE2F1C}"/>
-    <pc:docChg chg="custSel addSld modSld">
-      <pc:chgData name="Xin Luo" userId="82312ee5779919a4" providerId="LiveId" clId="{4807F875-6F75-AB41-83F0-5AE490FE2F1C}" dt="2023-09-13T14:07:01.122" v="8" actId="1076"/>
-      <pc:docMkLst>
-        <pc:docMk/>
-      </pc:docMkLst>
-      <pc:sldChg chg="addSp delSp modSp mod">
-        <pc:chgData name="Xin Luo" userId="82312ee5779919a4" providerId="LiveId" clId="{4807F875-6F75-AB41-83F0-5AE490FE2F1C}" dt="2023-09-13T14:06:41.345" v="2" actId="478"/>
-        <pc:sldMkLst>
-          <pc:docMk/>
-          <pc:sldMk cId="3741103209" sldId="2745"/>
-        </pc:sldMkLst>
-      </pc:sldChg>
-      <pc:sldChg chg="modSp add mod">
-        <pc:chgData name="Xin Luo" userId="82312ee5779919a4" providerId="LiveId" clId="{4807F875-6F75-AB41-83F0-5AE490FE2F1C}" dt="2023-09-13T14:07:01.122" v="8" actId="1076"/>
-        <pc:sldMkLst>
-          <pc:docMk/>
-          <pc:sldMk cId="1878724924" sldId="2758"/>
-        </pc:sldMkLst>
-      </pc:sldChg>
-    </pc:docChg>
-  </pc:docChgLst>
-  <pc:docChgLst>
-    <pc:chgData name="Xin Luo" userId="82312ee5779919a4" providerId="LiveId" clId="{ABECCF1F-1CAA-3A42-9710-47D9CB1C5B21}"/>
-    <pc:docChg chg="undo custSel addSld modSld sldOrd">
-      <pc:chgData name="Xin Luo" userId="82312ee5779919a4" providerId="LiveId" clId="{ABECCF1F-1CAA-3A42-9710-47D9CB1C5B21}" dt="2023-08-21T09:31:16.266" v="879" actId="20577"/>
-      <pc:docMkLst>
-        <pc:docMk/>
-      </pc:docMkLst>
-      <pc:sldChg chg="modSp mod">
-        <pc:chgData name="Xin Luo" userId="82312ee5779919a4" providerId="LiveId" clId="{ABECCF1F-1CAA-3A42-9710-47D9CB1C5B21}" dt="2023-08-21T02:55:15.471" v="67" actId="20577"/>
-        <pc:sldMkLst>
-          <pc:docMk/>
-          <pc:sldMk cId="1576120367" sldId="2387"/>
-        </pc:sldMkLst>
-      </pc:sldChg>
-      <pc:sldChg chg="modSp mod">
-        <pc:chgData name="Xin Luo" userId="82312ee5779919a4" providerId="LiveId" clId="{ABECCF1F-1CAA-3A42-9710-47D9CB1C5B21}" dt="2023-08-21T03:50:02.826" v="70" actId="14100"/>
-        <pc:sldMkLst>
-          <pc:docMk/>
-          <pc:sldMk cId="3833073590" sldId="2716"/>
-        </pc:sldMkLst>
-      </pc:sldChg>
-      <pc:sldChg chg="addSp delSp modSp mod">
-        <pc:chgData name="Xin Luo" userId="82312ee5779919a4" providerId="LiveId" clId="{ABECCF1F-1CAA-3A42-9710-47D9CB1C5B21}" dt="2023-08-21T03:52:56.239" v="118"/>
-        <pc:sldMkLst>
-          <pc:docMk/>
-          <pc:sldMk cId="2776132283" sldId="2739"/>
-        </pc:sldMkLst>
-      </pc:sldChg>
-      <pc:sldChg chg="addSp modSp mod ord">
-        <pc:chgData name="Xin Luo" userId="82312ee5779919a4" providerId="LiveId" clId="{ABECCF1F-1CAA-3A42-9710-47D9CB1C5B21}" dt="2023-08-21T07:26:51.742" v="177" actId="20578"/>
-        <pc:sldMkLst>
-          <pc:docMk/>
-          <pc:sldMk cId="4194482579" sldId="2743"/>
-        </pc:sldMkLst>
-      </pc:sldChg>
-      <pc:sldChg chg="addSp delSp modSp add mod">
-        <pc:chgData name="Xin Luo" userId="82312ee5779919a4" providerId="LiveId" clId="{ABECCF1F-1CAA-3A42-9710-47D9CB1C5B21}" dt="2023-08-21T07:50:33.166" v="356" actId="20577"/>
-        <pc:sldMkLst>
-          <pc:docMk/>
-          <pc:sldMk cId="738332523" sldId="2751"/>
-        </pc:sldMkLst>
-      </pc:sldChg>
-      <pc:sldChg chg="addSp delSp modSp add mod">
-        <pc:chgData name="Xin Luo" userId="82312ee5779919a4" providerId="LiveId" clId="{ABECCF1F-1CAA-3A42-9710-47D9CB1C5B21}" dt="2023-08-21T07:50:29.891" v="352" actId="20577"/>
-        <pc:sldMkLst>
-          <pc:docMk/>
-          <pc:sldMk cId="3189639985" sldId="2752"/>
-        </pc:sldMkLst>
-      </pc:sldChg>
-      <pc:sldChg chg="addSp delSp modSp add mod">
-        <pc:chgData name="Xin Luo" userId="82312ee5779919a4" providerId="LiveId" clId="{ABECCF1F-1CAA-3A42-9710-47D9CB1C5B21}" dt="2023-08-21T08:59:24.857" v="602" actId="478"/>
-        <pc:sldMkLst>
-          <pc:docMk/>
-          <pc:sldMk cId="2878944048" sldId="2753"/>
-        </pc:sldMkLst>
-      </pc:sldChg>
-      <pc:sldChg chg="addSp delSp modSp add mod">
-        <pc:chgData name="Xin Luo" userId="82312ee5779919a4" providerId="LiveId" clId="{ABECCF1F-1CAA-3A42-9710-47D9CB1C5B21}" dt="2023-08-21T09:09:03.859" v="781" actId="14100"/>
-        <pc:sldMkLst>
-          <pc:docMk/>
-          <pc:sldMk cId="2927474256" sldId="2754"/>
-        </pc:sldMkLst>
-      </pc:sldChg>
-      <pc:sldChg chg="delSp modSp add mod">
-        <pc:chgData name="Xin Luo" userId="82312ee5779919a4" providerId="LiveId" clId="{ABECCF1F-1CAA-3A42-9710-47D9CB1C5B21}" dt="2023-08-21T09:31:16.266" v="879" actId="20577"/>
-        <pc:sldMkLst>
-          <pc:docMk/>
-          <pc:sldMk cId="3593416967" sldId="2755"/>
-        </pc:sldMkLst>
-      </pc:sldChg>
-    </pc:docChg>
-  </pc:docChgLst>
-  <pc:docChgLst>
-    <pc:chgData name="Xin Luo" userId="82312ee5779919a4" providerId="LiveId" clId="{98EC8ECB-A80D-1449-ACFE-0D931F29C13A}"/>
-    <pc:docChg chg="undo custSel addSld delSld modSld">
-      <pc:chgData name="Xin Luo" userId="82312ee5779919a4" providerId="LiveId" clId="{98EC8ECB-A80D-1449-ACFE-0D931F29C13A}" dt="2023-02-23T15:47:30.471" v="734" actId="478"/>
-      <pc:docMkLst>
-        <pc:docMk/>
-      </pc:docMkLst>
-      <pc:sldChg chg="modSp mod">
-        <pc:chgData name="Xin Luo" userId="82312ee5779919a4" providerId="LiveId" clId="{98EC8ECB-A80D-1449-ACFE-0D931F29C13A}" dt="2023-02-23T15:07:38.481" v="282" actId="20577"/>
-        <pc:sldMkLst>
-          <pc:docMk/>
-          <pc:sldMk cId="1576120367" sldId="2387"/>
-        </pc:sldMkLst>
-      </pc:sldChg>
-      <pc:sldChg chg="modSp mod">
-        <pc:chgData name="Xin Luo" userId="82312ee5779919a4" providerId="LiveId" clId="{98EC8ECB-A80D-1449-ACFE-0D931F29C13A}" dt="2023-02-23T15:23:38.561" v="288" actId="20577"/>
-        <pc:sldMkLst>
-          <pc:docMk/>
-          <pc:sldMk cId="2415901206" sldId="2447"/>
-        </pc:sldMkLst>
-      </pc:sldChg>
-      <pc:sldChg chg="addSp delSp modSp mod">
-        <pc:chgData name="Xin Luo" userId="82312ee5779919a4" providerId="LiveId" clId="{98EC8ECB-A80D-1449-ACFE-0D931F29C13A}" dt="2023-02-23T15:32:00.813" v="490" actId="20577"/>
-        <pc:sldMkLst>
-          <pc:docMk/>
-          <pc:sldMk cId="4067577602" sldId="2605"/>
-        </pc:sldMkLst>
-      </pc:sldChg>
-      <pc:sldChg chg="modSp mod">
-        <pc:chgData name="Xin Luo" userId="82312ee5779919a4" providerId="LiveId" clId="{98EC8ECB-A80D-1449-ACFE-0D931F29C13A}" dt="2023-02-23T15:03:54.789" v="48" actId="20577"/>
-        <pc:sldMkLst>
-          <pc:docMk/>
-          <pc:sldMk cId="1658607177" sldId="2708"/>
-        </pc:sldMkLst>
-      </pc:sldChg>
-      <pc:sldChg chg="modSp mod">
-        <pc:chgData name="Xin Luo" userId="82312ee5779919a4" providerId="LiveId" clId="{98EC8ECB-A80D-1449-ACFE-0D931F29C13A}" dt="2023-02-23T15:46:16.929" v="710" actId="20577"/>
-        <pc:sldMkLst>
-          <pc:docMk/>
-          <pc:sldMk cId="481122590" sldId="2709"/>
-        </pc:sldMkLst>
-      </pc:sldChg>
-      <pc:sldChg chg="modSp mod">
-        <pc:chgData name="Xin Luo" userId="82312ee5779919a4" providerId="LiveId" clId="{98EC8ECB-A80D-1449-ACFE-0D931F29C13A}" dt="2023-02-23T15:46:36.362" v="717" actId="20577"/>
-        <pc:sldMkLst>
-          <pc:docMk/>
-          <pc:sldMk cId="3833073590" sldId="2716"/>
-        </pc:sldMkLst>
-      </pc:sldChg>
-      <pc:sldChg chg="modSp mod">
-        <pc:chgData name="Xin Luo" userId="82312ee5779919a4" providerId="LiveId" clId="{98EC8ECB-A80D-1449-ACFE-0D931F29C13A}" dt="2023-02-23T15:47:08.933" v="728" actId="20577"/>
-        <pc:sldMkLst>
-          <pc:docMk/>
-          <pc:sldMk cId="972163772" sldId="2720"/>
-        </pc:sldMkLst>
-      </pc:sldChg>
-      <pc:sldChg chg="modSp mod">
-        <pc:chgData name="Xin Luo" userId="82312ee5779919a4" providerId="LiveId" clId="{98EC8ECB-A80D-1449-ACFE-0D931F29C13A}" dt="2023-02-23T15:47:17.016" v="729"/>
-        <pc:sldMkLst>
-          <pc:docMk/>
-          <pc:sldMk cId="2689695864" sldId="2721"/>
-        </pc:sldMkLst>
-      </pc:sldChg>
-      <pc:sldChg chg="delSp modSp mod">
-        <pc:chgData name="Xin Luo" userId="82312ee5779919a4" providerId="LiveId" clId="{98EC8ECB-A80D-1449-ACFE-0D931F29C13A}" dt="2023-02-23T15:47:30.471" v="734" actId="478"/>
-        <pc:sldMkLst>
-          <pc:docMk/>
-          <pc:sldMk cId="1209572041" sldId="2722"/>
-        </pc:sldMkLst>
-      </pc:sldChg>
-      <pc:sldChg chg="del">
-        <pc:chgData name="Xin Luo" userId="82312ee5779919a4" providerId="LiveId" clId="{98EC8ECB-A80D-1449-ACFE-0D931F29C13A}" dt="2023-02-23T15:46:08.434" v="701" actId="2696"/>
-        <pc:sldMkLst>
-          <pc:docMk/>
-          <pc:sldMk cId="353940032" sldId="2725"/>
-        </pc:sldMkLst>
-      </pc:sldChg>
-      <pc:sldChg chg="del">
-        <pc:chgData name="Xin Luo" userId="82312ee5779919a4" providerId="LiveId" clId="{98EC8ECB-A80D-1449-ACFE-0D931F29C13A}" dt="2023-02-23T15:46:08.455" v="709" actId="2696"/>
-        <pc:sldMkLst>
-          <pc:docMk/>
-          <pc:sldMk cId="45083394" sldId="2726"/>
-        </pc:sldMkLst>
-      </pc:sldChg>
-      <pc:sldChg chg="del">
-        <pc:chgData name="Xin Luo" userId="82312ee5779919a4" providerId="LiveId" clId="{98EC8ECB-A80D-1449-ACFE-0D931F29C13A}" dt="2023-02-23T15:46:08.437" v="702" actId="2696"/>
-        <pc:sldMkLst>
-          <pc:docMk/>
-          <pc:sldMk cId="148985918" sldId="2727"/>
-        </pc:sldMkLst>
-      </pc:sldChg>
-      <pc:sldChg chg="del">
-        <pc:chgData name="Xin Luo" userId="82312ee5779919a4" providerId="LiveId" clId="{98EC8ECB-A80D-1449-ACFE-0D931F29C13A}" dt="2023-02-23T15:46:08.445" v="706" actId="2696"/>
-        <pc:sldMkLst>
-          <pc:docMk/>
-          <pc:sldMk cId="3544980656" sldId="2728"/>
-        </pc:sldMkLst>
-      </pc:sldChg>
-      <pc:sldChg chg="del">
-        <pc:chgData name="Xin Luo" userId="82312ee5779919a4" providerId="LiveId" clId="{98EC8ECB-A80D-1449-ACFE-0D931F29C13A}" dt="2023-02-23T15:46:08.448" v="708" actId="2696"/>
-        <pc:sldMkLst>
-          <pc:docMk/>
-          <pc:sldMk cId="1664139585" sldId="2729"/>
-        </pc:sldMkLst>
-      </pc:sldChg>
-      <pc:sldChg chg="del">
-        <pc:chgData name="Xin Luo" userId="82312ee5779919a4" providerId="LiveId" clId="{98EC8ECB-A80D-1449-ACFE-0D931F29C13A}" dt="2023-02-23T15:46:08.446" v="707" actId="2696"/>
-        <pc:sldMkLst>
-          <pc:docMk/>
-          <pc:sldMk cId="3561803108" sldId="2730"/>
-        </pc:sldMkLst>
-      </pc:sldChg>
-      <pc:sldChg chg="del">
-        <pc:chgData name="Xin Luo" userId="82312ee5779919a4" providerId="LiveId" clId="{98EC8ECB-A80D-1449-ACFE-0D931F29C13A}" dt="2023-02-23T15:46:08.439" v="703" actId="2696"/>
-        <pc:sldMkLst>
-          <pc:docMk/>
-          <pc:sldMk cId="236610701" sldId="2731"/>
-        </pc:sldMkLst>
-      </pc:sldChg>
-      <pc:sldChg chg="del">
-        <pc:chgData name="Xin Luo" userId="82312ee5779919a4" providerId="LiveId" clId="{98EC8ECB-A80D-1449-ACFE-0D931F29C13A}" dt="2023-02-23T15:46:08.441" v="704" actId="2696"/>
-        <pc:sldMkLst>
-          <pc:docMk/>
-          <pc:sldMk cId="1986913413" sldId="2732"/>
-        </pc:sldMkLst>
-      </pc:sldChg>
-      <pc:sldChg chg="del">
-        <pc:chgData name="Xin Luo" userId="82312ee5779919a4" providerId="LiveId" clId="{98EC8ECB-A80D-1449-ACFE-0D931F29C13A}" dt="2023-02-23T15:46:08.443" v="705" actId="2696"/>
-        <pc:sldMkLst>
-          <pc:docMk/>
-          <pc:sldMk cId="270311508" sldId="2733"/>
-        </pc:sldMkLst>
-      </pc:sldChg>
-      <pc:sldChg chg="del">
-        <pc:chgData name="Xin Luo" userId="82312ee5779919a4" providerId="LiveId" clId="{98EC8ECB-A80D-1449-ACFE-0D931F29C13A}" dt="2023-02-23T15:47:22.827" v="730" actId="2696"/>
-        <pc:sldMkLst>
-          <pc:docMk/>
-          <pc:sldMk cId="3138813826" sldId="2734"/>
-        </pc:sldMkLst>
-      </pc:sldChg>
-      <pc:sldChg chg="del">
-        <pc:chgData name="Xin Luo" userId="82312ee5779919a4" providerId="LiveId" clId="{98EC8ECB-A80D-1449-ACFE-0D931F29C13A}" dt="2023-02-23T15:47:22.864" v="732" actId="2696"/>
-        <pc:sldMkLst>
-          <pc:docMk/>
-          <pc:sldMk cId="128317883" sldId="2735"/>
-        </pc:sldMkLst>
-      </pc:sldChg>
-      <pc:sldChg chg="del">
-        <pc:chgData name="Xin Luo" userId="82312ee5779919a4" providerId="LiveId" clId="{98EC8ECB-A80D-1449-ACFE-0D931F29C13A}" dt="2023-02-23T15:47:22.829" v="731" actId="2696"/>
-        <pc:sldMkLst>
-          <pc:docMk/>
-          <pc:sldMk cId="383906436" sldId="2736"/>
-        </pc:sldMkLst>
-      </pc:sldChg>
-      <pc:sldChg chg="addSp delSp modSp add mod">
-        <pc:chgData name="Xin Luo" userId="82312ee5779919a4" providerId="LiveId" clId="{98EC8ECB-A80D-1449-ACFE-0D931F29C13A}" dt="2023-02-23T15:45:27.987" v="683" actId="1037"/>
-        <pc:sldMkLst>
-          <pc:docMk/>
-          <pc:sldMk cId="655142816" sldId="2737"/>
-        </pc:sldMkLst>
-      </pc:sldChg>
-    </pc:docChg>
-  </pc:docChgLst>
-  <pc:docChgLst>
-    <pc:chgData name="Xin Luo" userId="82312ee5779919a4" providerId="LiveId" clId="{9DD00C57-1E20-5F45-A5A7-A6F833EE305E}"/>
-    <pc:docChg chg="custSel delSld modSld">
-      <pc:chgData name="Xin Luo" userId="82312ee5779919a4" providerId="LiveId" clId="{9DD00C57-1E20-5F45-A5A7-A6F833EE305E}" dt="2024-04-05T07:56:38.877" v="69" actId="2696"/>
-      <pc:docMkLst>
-        <pc:docMk/>
-      </pc:docMkLst>
-      <pc:sldChg chg="del">
-        <pc:chgData name="Xin Luo" userId="82312ee5779919a4" providerId="LiveId" clId="{9DD00C57-1E20-5F45-A5A7-A6F833EE305E}" dt="2024-04-05T07:51:34.265" v="18" actId="2696"/>
-        <pc:sldMkLst>
-          <pc:docMk/>
-          <pc:sldMk cId="4067577602" sldId="2605"/>
-        </pc:sldMkLst>
-      </pc:sldChg>
-      <pc:sldChg chg="modSp mod">
-        <pc:chgData name="Xin Luo" userId="82312ee5779919a4" providerId="LiveId" clId="{9DD00C57-1E20-5F45-A5A7-A6F833EE305E}" dt="2024-04-05T07:42:36.104" v="17" actId="5793"/>
-        <pc:sldMkLst>
-          <pc:docMk/>
-          <pc:sldMk cId="1658607177" sldId="2708"/>
-        </pc:sldMkLst>
-      </pc:sldChg>
-      <pc:sldChg chg="modSp mod">
-        <pc:chgData name="Xin Luo" userId="82312ee5779919a4" providerId="LiveId" clId="{9DD00C57-1E20-5F45-A5A7-A6F833EE305E}" dt="2024-04-05T07:52:08.536" v="62" actId="20577"/>
-        <pc:sldMkLst>
-          <pc:docMk/>
-          <pc:sldMk cId="481122590" sldId="2709"/>
-        </pc:sldMkLst>
-      </pc:sldChg>
-      <pc:sldChg chg="del">
-        <pc:chgData name="Xin Luo" userId="82312ee5779919a4" providerId="LiveId" clId="{9DD00C57-1E20-5F45-A5A7-A6F833EE305E}" dt="2024-04-05T07:51:35.106" v="19" actId="2696"/>
-        <pc:sldMkLst>
-          <pc:docMk/>
-          <pc:sldMk cId="655142816" sldId="2737"/>
-        </pc:sldMkLst>
-      </pc:sldChg>
-      <pc:sldChg chg="del">
-        <pc:chgData name="Xin Luo" userId="82312ee5779919a4" providerId="LiveId" clId="{9DD00C57-1E20-5F45-A5A7-A6F833EE305E}" dt="2024-04-05T07:56:34.386" v="63" actId="2696"/>
-        <pc:sldMkLst>
-          <pc:docMk/>
-          <pc:sldMk cId="4156684215" sldId="2738"/>
-        </pc:sldMkLst>
-      </pc:sldChg>
-      <pc:sldChg chg="del">
-        <pc:chgData name="Xin Luo" userId="82312ee5779919a4" providerId="LiveId" clId="{9DD00C57-1E20-5F45-A5A7-A6F833EE305E}" dt="2024-04-05T07:56:38.877" v="69" actId="2696"/>
-        <pc:sldMkLst>
-          <pc:docMk/>
-          <pc:sldMk cId="2776132283" sldId="2739"/>
-        </pc:sldMkLst>
-      </pc:sldChg>
-      <pc:sldChg chg="del">
-        <pc:chgData name="Xin Luo" userId="82312ee5779919a4" providerId="LiveId" clId="{9DD00C57-1E20-5F45-A5A7-A6F833EE305E}" dt="2024-04-05T07:51:37.161" v="20" actId="2696"/>
-        <pc:sldMkLst>
-          <pc:docMk/>
-          <pc:sldMk cId="3151170836" sldId="2742"/>
-        </pc:sldMkLst>
-      </pc:sldChg>
-      <pc:sldChg chg="del">
-        <pc:chgData name="Xin Luo" userId="82312ee5779919a4" providerId="LiveId" clId="{9DD00C57-1E20-5F45-A5A7-A6F833EE305E}" dt="2024-04-05T07:56:34.962" v="64" actId="2696"/>
-        <pc:sldMkLst>
-          <pc:docMk/>
-          <pc:sldMk cId="738332523" sldId="2751"/>
-        </pc:sldMkLst>
-      </pc:sldChg>
-      <pc:sldChg chg="del">
-        <pc:chgData name="Xin Luo" userId="82312ee5779919a4" providerId="LiveId" clId="{9DD00C57-1E20-5F45-A5A7-A6F833EE305E}" dt="2024-04-05T07:56:35.443" v="65" actId="2696"/>
-        <pc:sldMkLst>
-          <pc:docMk/>
-          <pc:sldMk cId="3189639985" sldId="2752"/>
-        </pc:sldMkLst>
-      </pc:sldChg>
-      <pc:sldChg chg="del">
-        <pc:chgData name="Xin Luo" userId="82312ee5779919a4" providerId="LiveId" clId="{9DD00C57-1E20-5F45-A5A7-A6F833EE305E}" dt="2024-04-05T07:56:35.917" v="66" actId="2696"/>
-        <pc:sldMkLst>
-          <pc:docMk/>
-          <pc:sldMk cId="2878944048" sldId="2753"/>
-        </pc:sldMkLst>
-      </pc:sldChg>
-      <pc:sldChg chg="del">
-        <pc:chgData name="Xin Luo" userId="82312ee5779919a4" providerId="LiveId" clId="{9DD00C57-1E20-5F45-A5A7-A6F833EE305E}" dt="2024-04-05T07:56:36.696" v="67" actId="2696"/>
-        <pc:sldMkLst>
-          <pc:docMk/>
-          <pc:sldMk cId="2927474256" sldId="2754"/>
-        </pc:sldMkLst>
-      </pc:sldChg>
-      <pc:sldChg chg="del">
-        <pc:chgData name="Xin Luo" userId="82312ee5779919a4" providerId="LiveId" clId="{9DD00C57-1E20-5F45-A5A7-A6F833EE305E}" dt="2024-04-05T07:56:37.562" v="68" actId="2696"/>
-        <pc:sldMkLst>
-          <pc:docMk/>
-          <pc:sldMk cId="3593416967" sldId="2755"/>
-        </pc:sldMkLst>
-      </pc:sldChg>
-    </pc:docChg>
-  </pc:docChgLst>
-  <pc:docChgLst>
-    <pc:chgData name="Xin Luo" userId="82312ee5779919a4" providerId="LiveId" clId="{7C35D78A-E8DF-394E-816A-D2222F18F092}"/>
-    <pc:docChg chg="delSld modSld">
-      <pc:chgData name="Xin Luo" userId="82312ee5779919a4" providerId="LiveId" clId="{7C35D78A-E8DF-394E-816A-D2222F18F092}" dt="2022-11-28T03:56:42.353" v="21" actId="2696"/>
-      <pc:docMkLst>
-        <pc:docMk/>
-      </pc:docMkLst>
-      <pc:sldChg chg="del">
-        <pc:chgData name="Xin Luo" userId="82312ee5779919a4" providerId="LiveId" clId="{7C35D78A-E8DF-394E-816A-D2222F18F092}" dt="2022-11-28T03:56:38.106" v="20" actId="2696"/>
-        <pc:sldMkLst>
-          <pc:docMk/>
-          <pc:sldMk cId="0" sldId="279"/>
-        </pc:sldMkLst>
-      </pc:sldChg>
-      <pc:sldChg chg="modSp mod">
-        <pc:chgData name="Xin Luo" userId="82312ee5779919a4" providerId="LiveId" clId="{7C35D78A-E8DF-394E-816A-D2222F18F092}" dt="2022-11-28T03:56:03.446" v="17" actId="20577"/>
-        <pc:sldMkLst>
-          <pc:docMk/>
-          <pc:sldMk cId="1153920038" sldId="2206"/>
-        </pc:sldMkLst>
-      </pc:sldChg>
-      <pc:sldChg chg="del">
-        <pc:chgData name="Xin Luo" userId="82312ee5779919a4" providerId="LiveId" clId="{7C35D78A-E8DF-394E-816A-D2222F18F092}" dt="2022-11-28T03:56:42.353" v="21" actId="2696"/>
-        <pc:sldMkLst>
-          <pc:docMk/>
-          <pc:sldMk cId="0" sldId="2501"/>
-        </pc:sldMkLst>
-      </pc:sldChg>
-      <pc:sldChg chg="del">
-        <pc:chgData name="Xin Luo" userId="82312ee5779919a4" providerId="LiveId" clId="{7C35D78A-E8DF-394E-816A-D2222F18F092}" dt="2022-11-28T03:56:17.803" v="18" actId="2696"/>
-        <pc:sldMkLst>
-          <pc:docMk/>
-          <pc:sldMk cId="2689840772" sldId="2604"/>
-        </pc:sldMkLst>
-      </pc:sldChg>
-      <pc:sldChg chg="del">
-        <pc:chgData name="Xin Luo" userId="82312ee5779919a4" providerId="LiveId" clId="{7C35D78A-E8DF-394E-816A-D2222F18F092}" dt="2022-11-28T03:56:33.667" v="19" actId="2696"/>
-        <pc:sldMkLst>
-          <pc:docMk/>
-          <pc:sldMk cId="1392274363" sldId="2606"/>
-        </pc:sldMkLst>
-      </pc:sldChg>
-      <pc:sldChg chg="del">
-        <pc:chgData name="Xin Luo" userId="82312ee5779919a4" providerId="LiveId" clId="{7C35D78A-E8DF-394E-816A-D2222F18F092}" dt="2022-11-28T03:56:33.667" v="19" actId="2696"/>
-        <pc:sldMkLst>
-          <pc:docMk/>
-          <pc:sldMk cId="292605530" sldId="2607"/>
-        </pc:sldMkLst>
-      </pc:sldChg>
-      <pc:sldChg chg="del">
-        <pc:chgData name="Xin Luo" userId="82312ee5779919a4" providerId="LiveId" clId="{7C35D78A-E8DF-394E-816A-D2222F18F092}" dt="2022-11-28T03:56:33.667" v="19" actId="2696"/>
-        <pc:sldMkLst>
-          <pc:docMk/>
-          <pc:sldMk cId="1432126823" sldId="2608"/>
-        </pc:sldMkLst>
-      </pc:sldChg>
-      <pc:sldChg chg="del">
-        <pc:chgData name="Xin Luo" userId="82312ee5779919a4" providerId="LiveId" clId="{7C35D78A-E8DF-394E-816A-D2222F18F092}" dt="2022-11-28T03:56:33.667" v="19" actId="2696"/>
-        <pc:sldMkLst>
-          <pc:docMk/>
-          <pc:sldMk cId="2780969545" sldId="2609"/>
-        </pc:sldMkLst>
-      </pc:sldChg>
-      <pc:sldChg chg="del">
-        <pc:chgData name="Xin Luo" userId="82312ee5779919a4" providerId="LiveId" clId="{7C35D78A-E8DF-394E-816A-D2222F18F092}" dt="2022-11-28T03:56:33.667" v="19" actId="2696"/>
-        <pc:sldMkLst>
-          <pc:docMk/>
-          <pc:sldMk cId="1351738911" sldId="2610"/>
-        </pc:sldMkLst>
-      </pc:sldChg>
-      <pc:sldChg chg="del">
-        <pc:chgData name="Xin Luo" userId="82312ee5779919a4" providerId="LiveId" clId="{7C35D78A-E8DF-394E-816A-D2222F18F092}" dt="2022-11-28T03:56:33.667" v="19" actId="2696"/>
-        <pc:sldMkLst>
-          <pc:docMk/>
-          <pc:sldMk cId="1504723508" sldId="2611"/>
-        </pc:sldMkLst>
-      </pc:sldChg>
-      <pc:sldChg chg="del">
-        <pc:chgData name="Xin Luo" userId="82312ee5779919a4" providerId="LiveId" clId="{7C35D78A-E8DF-394E-816A-D2222F18F092}" dt="2022-11-28T03:56:38.106" v="20" actId="2696"/>
-        <pc:sldMkLst>
-          <pc:docMk/>
-          <pc:sldMk cId="63705705" sldId="2612"/>
-        </pc:sldMkLst>
-      </pc:sldChg>
-      <pc:sldChg chg="del">
-        <pc:chgData name="Xin Luo" userId="82312ee5779919a4" providerId="LiveId" clId="{7C35D78A-E8DF-394E-816A-D2222F18F092}" dt="2022-11-28T03:56:42.353" v="21" actId="2696"/>
-        <pc:sldMkLst>
-          <pc:docMk/>
-          <pc:sldMk cId="3070817833" sldId="2652"/>
-        </pc:sldMkLst>
-      </pc:sldChg>
-      <pc:sldChg chg="del">
-        <pc:chgData name="Xin Luo" userId="82312ee5779919a4" providerId="LiveId" clId="{7C35D78A-E8DF-394E-816A-D2222F18F092}" dt="2022-11-28T03:56:42.353" v="21" actId="2696"/>
-        <pc:sldMkLst>
-          <pc:docMk/>
-          <pc:sldMk cId="2261973024" sldId="2686"/>
-        </pc:sldMkLst>
-      </pc:sldChg>
-      <pc:sldChg chg="del">
-        <pc:chgData name="Xin Luo" userId="82312ee5779919a4" providerId="LiveId" clId="{7C35D78A-E8DF-394E-816A-D2222F18F092}" dt="2022-11-28T03:56:38.106" v="20" actId="2696"/>
-        <pc:sldMkLst>
-          <pc:docMk/>
-          <pc:sldMk cId="1836653143" sldId="2688"/>
-        </pc:sldMkLst>
-      </pc:sldChg>
-      <pc:sldChg chg="del">
-        <pc:chgData name="Xin Luo" userId="82312ee5779919a4" providerId="LiveId" clId="{7C35D78A-E8DF-394E-816A-D2222F18F092}" dt="2022-11-28T03:56:38.106" v="20" actId="2696"/>
-        <pc:sldMkLst>
-          <pc:docMk/>
-          <pc:sldMk cId="715274259" sldId="2690"/>
-        </pc:sldMkLst>
-      </pc:sldChg>
-      <pc:sldChg chg="del">
-        <pc:chgData name="Xin Luo" userId="82312ee5779919a4" providerId="LiveId" clId="{7C35D78A-E8DF-394E-816A-D2222F18F092}" dt="2022-11-28T03:56:42.353" v="21" actId="2696"/>
-        <pc:sldMkLst>
-          <pc:docMk/>
-          <pc:sldMk cId="3906920652" sldId="2694"/>
-        </pc:sldMkLst>
-      </pc:sldChg>
-      <pc:sldChg chg="del">
-        <pc:chgData name="Xin Luo" userId="82312ee5779919a4" providerId="LiveId" clId="{7C35D78A-E8DF-394E-816A-D2222F18F092}" dt="2022-11-28T03:56:42.353" v="21" actId="2696"/>
-        <pc:sldMkLst>
-          <pc:docMk/>
-          <pc:sldMk cId="558234131" sldId="2697"/>
-        </pc:sldMkLst>
-      </pc:sldChg>
-      <pc:sldChg chg="del">
-        <pc:chgData name="Xin Luo" userId="82312ee5779919a4" providerId="LiveId" clId="{7C35D78A-E8DF-394E-816A-D2222F18F092}" dt="2022-11-28T03:56:38.106" v="20" actId="2696"/>
-        <pc:sldMkLst>
-          <pc:docMk/>
-          <pc:sldMk cId="507602036" sldId="2700"/>
-        </pc:sldMkLst>
-      </pc:sldChg>
-      <pc:sldChg chg="del">
-        <pc:chgData name="Xin Luo" userId="82312ee5779919a4" providerId="LiveId" clId="{7C35D78A-E8DF-394E-816A-D2222F18F092}" dt="2022-11-28T03:56:38.106" v="20" actId="2696"/>
-        <pc:sldMkLst>
-          <pc:docMk/>
-          <pc:sldMk cId="569668922" sldId="2703"/>
-        </pc:sldMkLst>
-      </pc:sldChg>
-      <pc:sldChg chg="del">
-        <pc:chgData name="Xin Luo" userId="82312ee5779919a4" providerId="LiveId" clId="{7C35D78A-E8DF-394E-816A-D2222F18F092}" dt="2022-11-28T03:56:38.106" v="20" actId="2696"/>
-        <pc:sldMkLst>
-          <pc:docMk/>
-          <pc:sldMk cId="693600848" sldId="2705"/>
-        </pc:sldMkLst>
-      </pc:sldChg>
-      <pc:sldChg chg="del">
-        <pc:chgData name="Xin Luo" userId="82312ee5779919a4" providerId="LiveId" clId="{7C35D78A-E8DF-394E-816A-D2222F18F092}" dt="2022-11-28T03:56:38.106" v="20" actId="2696"/>
-        <pc:sldMkLst>
-          <pc:docMk/>
-          <pc:sldMk cId="2447019445" sldId="2706"/>
-        </pc:sldMkLst>
-      </pc:sldChg>
-      <pc:sldChg chg="del">
-        <pc:chgData name="Xin Luo" userId="82312ee5779919a4" providerId="LiveId" clId="{7C35D78A-E8DF-394E-816A-D2222F18F092}" dt="2022-11-28T03:56:42.353" v="21" actId="2696"/>
-        <pc:sldMkLst>
-          <pc:docMk/>
-          <pc:sldMk cId="3037020054" sldId="2707"/>
-        </pc:sldMkLst>
-      </pc:sldChg>
-      <pc:sldChg chg="del">
-        <pc:chgData name="Xin Luo" userId="82312ee5779919a4" providerId="LiveId" clId="{7C35D78A-E8DF-394E-816A-D2222F18F092}" dt="2022-11-28T03:56:42.353" v="21" actId="2696"/>
-        <pc:sldMkLst>
-          <pc:docMk/>
-          <pc:sldMk cId="446628750" sldId="2708"/>
-        </pc:sldMkLst>
-      </pc:sldChg>
-      <pc:sldChg chg="del">
-        <pc:chgData name="Xin Luo" userId="82312ee5779919a4" providerId="LiveId" clId="{7C35D78A-E8DF-394E-816A-D2222F18F092}" dt="2022-11-28T03:56:42.353" v="21" actId="2696"/>
-        <pc:sldMkLst>
-          <pc:docMk/>
-          <pc:sldMk cId="770366385" sldId="2709"/>
-        </pc:sldMkLst>
-      </pc:sldChg>
-      <pc:sldChg chg="del">
-        <pc:chgData name="Xin Luo" userId="82312ee5779919a4" providerId="LiveId" clId="{7C35D78A-E8DF-394E-816A-D2222F18F092}" dt="2022-11-28T03:56:42.353" v="21" actId="2696"/>
-        <pc:sldMkLst>
-          <pc:docMk/>
-          <pc:sldMk cId="1259562490" sldId="2710"/>
-        </pc:sldMkLst>
-      </pc:sldChg>
-      <pc:sldChg chg="del">
-        <pc:chgData name="Xin Luo" userId="82312ee5779919a4" providerId="LiveId" clId="{7C35D78A-E8DF-394E-816A-D2222F18F092}" dt="2022-11-28T03:56:42.353" v="21" actId="2696"/>
-        <pc:sldMkLst>
-          <pc:docMk/>
-          <pc:sldMk cId="573676958" sldId="2711"/>
-        </pc:sldMkLst>
-      </pc:sldChg>
-      <pc:sldChg chg="del">
-        <pc:chgData name="Xin Luo" userId="82312ee5779919a4" providerId="LiveId" clId="{7C35D78A-E8DF-394E-816A-D2222F18F092}" dt="2022-11-28T03:56:33.667" v="19" actId="2696"/>
-        <pc:sldMkLst>
-          <pc:docMk/>
-          <pc:sldMk cId="2970267871" sldId="2712"/>
-        </pc:sldMkLst>
-      </pc:sldChg>
-      <pc:sldChg chg="del">
-        <pc:chgData name="Xin Luo" userId="82312ee5779919a4" providerId="LiveId" clId="{7C35D78A-E8DF-394E-816A-D2222F18F092}" dt="2022-11-28T03:56:42.353" v="21" actId="2696"/>
-        <pc:sldMkLst>
-          <pc:docMk/>
-          <pc:sldMk cId="4061658258" sldId="2713"/>
-        </pc:sldMkLst>
-      </pc:sldChg>
-      <pc:sldChg chg="del">
-        <pc:chgData name="Xin Luo" userId="82312ee5779919a4" providerId="LiveId" clId="{7C35D78A-E8DF-394E-816A-D2222F18F092}" dt="2022-11-28T03:56:17.803" v="18" actId="2696"/>
-        <pc:sldMkLst>
-          <pc:docMk/>
-          <pc:sldMk cId="2358282757" sldId="2714"/>
-        </pc:sldMkLst>
-      </pc:sldChg>
-    </pc:docChg>
-  </pc:docChgLst>
-  <pc:docChgLst>
-    <pc:chgData name="Xin Luo" userId="82312ee5779919a4" providerId="LiveId" clId="{23920C8D-EBCE-A347-9C82-C14316D20539}"/>
-    <pc:docChg chg="undo custSel addSld modSld">
-      <pc:chgData name="Xin Luo" userId="82312ee5779919a4" providerId="LiveId" clId="{23920C8D-EBCE-A347-9C82-C14316D20539}" dt="2022-10-26T12:19:06.428" v="501" actId="767"/>
-      <pc:docMkLst>
-        <pc:docMk/>
-      </pc:docMkLst>
-      <pc:sldChg chg="modSp mod">
-        <pc:chgData name="Xin Luo" userId="82312ee5779919a4" providerId="LiveId" clId="{23920C8D-EBCE-A347-9C82-C14316D20539}" dt="2022-10-10T01:06:29.261" v="368" actId="404"/>
-        <pc:sldMkLst>
-          <pc:docMk/>
-          <pc:sldMk cId="1576120367" sldId="2387"/>
-        </pc:sldMkLst>
-      </pc:sldChg>
-      <pc:sldChg chg="modSp mod">
-        <pc:chgData name="Xin Luo" userId="82312ee5779919a4" providerId="LiveId" clId="{23920C8D-EBCE-A347-9C82-C14316D20539}" dt="2022-10-10T01:06:39.449" v="369" actId="403"/>
-        <pc:sldMkLst>
-          <pc:docMk/>
-          <pc:sldMk cId="2415901206" sldId="2447"/>
-        </pc:sldMkLst>
-      </pc:sldChg>
-      <pc:sldChg chg="addSp delSp modSp mod">
-        <pc:chgData name="Xin Luo" userId="82312ee5779919a4" providerId="LiveId" clId="{23920C8D-EBCE-A347-9C82-C14316D20539}" dt="2022-10-26T11:18:20.490" v="500"/>
-        <pc:sldMkLst>
-          <pc:docMk/>
-          <pc:sldMk cId="2689840772" sldId="2604"/>
-        </pc:sldMkLst>
-      </pc:sldChg>
-      <pc:sldChg chg="modSp mod">
-        <pc:chgData name="Xin Luo" userId="82312ee5779919a4" providerId="LiveId" clId="{23920C8D-EBCE-A347-9C82-C14316D20539}" dt="2022-10-25T11:53:23.523" v="402" actId="207"/>
-        <pc:sldMkLst>
-          <pc:docMk/>
-          <pc:sldMk cId="1392274363" sldId="2606"/>
-        </pc:sldMkLst>
-      </pc:sldChg>
-      <pc:sldChg chg="modSp mod">
-        <pc:chgData name="Xin Luo" userId="82312ee5779919a4" providerId="LiveId" clId="{23920C8D-EBCE-A347-9C82-C14316D20539}" dt="2022-10-25T12:03:26.240" v="414" actId="14100"/>
-        <pc:sldMkLst>
-          <pc:docMk/>
-          <pc:sldMk cId="292605530" sldId="2607"/>
-        </pc:sldMkLst>
-      </pc:sldChg>
-      <pc:sldChg chg="modSp mod">
-        <pc:chgData name="Xin Luo" userId="82312ee5779919a4" providerId="LiveId" clId="{23920C8D-EBCE-A347-9C82-C14316D20539}" dt="2022-10-25T12:09:03.730" v="478" actId="1036"/>
-        <pc:sldMkLst>
-          <pc:docMk/>
-          <pc:sldMk cId="2780969545" sldId="2609"/>
-        </pc:sldMkLst>
-      </pc:sldChg>
-      <pc:sldChg chg="modSp mod">
-        <pc:chgData name="Xin Luo" userId="82312ee5779919a4" providerId="LiveId" clId="{23920C8D-EBCE-A347-9C82-C14316D20539}" dt="2022-10-26T02:56:58.658" v="480" actId="207"/>
-        <pc:sldMkLst>
-          <pc:docMk/>
-          <pc:sldMk cId="63705705" sldId="2612"/>
-        </pc:sldMkLst>
-      </pc:sldChg>
-      <pc:sldChg chg="addSp modSp">
-        <pc:chgData name="Xin Luo" userId="82312ee5779919a4" providerId="LiveId" clId="{23920C8D-EBCE-A347-9C82-C14316D20539}" dt="2022-10-26T12:19:06.428" v="501" actId="767"/>
-        <pc:sldMkLst>
-          <pc:docMk/>
-          <pc:sldMk cId="963926578" sldId="2613"/>
-        </pc:sldMkLst>
-      </pc:sldChg>
-      <pc:sldChg chg="modSp add mod">
-        <pc:chgData name="Xin Luo" userId="82312ee5779919a4" providerId="LiveId" clId="{23920C8D-EBCE-A347-9C82-C14316D20539}" dt="2022-10-10T01:06:02.902" v="365" actId="403"/>
-        <pc:sldMkLst>
-          <pc:docMk/>
-          <pc:sldMk cId="2358282757" sldId="2714"/>
-        </pc:sldMkLst>
-      </pc:sldChg>
-    </pc:docChg>
-  </pc:docChgLst>
-  <pc:docChgLst>
-    <pc:chgData name="Xin Luo" userId="82312ee5779919a4" providerId="LiveId" clId="{743256A7-6CE7-B242-894F-C640845B5FDB}"/>
-    <pc:docChg chg="addSld delSld modSld">
-      <pc:chgData name="Xin Luo" userId="82312ee5779919a4" providerId="LiveId" clId="{743256A7-6CE7-B242-894F-C640845B5FDB}" dt="2025-05-08T15:21:00.183" v="109" actId="2696"/>
-      <pc:docMkLst>
-        <pc:docMk/>
-      </pc:docMkLst>
-      <pc:sldChg chg="modSp mod">
-        <pc:chgData name="Xin Luo" userId="82312ee5779919a4" providerId="LiveId" clId="{743256A7-6CE7-B242-894F-C640845B5FDB}" dt="2025-05-08T15:20:46.798" v="105" actId="20577"/>
-        <pc:sldMkLst>
-          <pc:docMk/>
-          <pc:sldMk cId="2415901206" sldId="2447"/>
-        </pc:sldMkLst>
-      </pc:sldChg>
-      <pc:sldChg chg="modSp mod">
-        <pc:chgData name="Xin Luo" userId="82312ee5779919a4" providerId="LiveId" clId="{743256A7-6CE7-B242-894F-C640845B5FDB}" dt="2025-05-08T15:19:20.037" v="22" actId="20577"/>
-        <pc:sldMkLst>
-          <pc:docMk/>
-          <pc:sldMk cId="1658607177" sldId="2708"/>
-        </pc:sldMkLst>
-      </pc:sldChg>
-      <pc:sldChg chg="del">
-        <pc:chgData name="Xin Luo" userId="82312ee5779919a4" providerId="LiveId" clId="{743256A7-6CE7-B242-894F-C640845B5FDB}" dt="2025-05-08T15:21:00.169" v="107" actId="2696"/>
-        <pc:sldMkLst>
-          <pc:docMk/>
-          <pc:sldMk cId="2826444872" sldId="2723"/>
-        </pc:sldMkLst>
-      </pc:sldChg>
-      <pc:sldChg chg="del">
-        <pc:chgData name="Xin Luo" userId="82312ee5779919a4" providerId="LiveId" clId="{743256A7-6CE7-B242-894F-C640845B5FDB}" dt="2025-05-08T15:21:00.180" v="108" actId="2696"/>
-        <pc:sldMkLst>
-          <pc:docMk/>
-          <pc:sldMk cId="965496355" sldId="2726"/>
-        </pc:sldMkLst>
-      </pc:sldChg>
-      <pc:sldChg chg="add">
-        <pc:chgData name="Xin Luo" userId="82312ee5779919a4" providerId="LiveId" clId="{743256A7-6CE7-B242-894F-C640845B5FDB}" dt="2025-05-08T15:20:56.193" v="106"/>
-        <pc:sldMkLst>
-          <pc:docMk/>
-          <pc:sldMk cId="2742362314" sldId="2727"/>
-        </pc:sldMkLst>
-      </pc:sldChg>
-      <pc:sldChg chg="add">
-        <pc:chgData name="Xin Luo" userId="82312ee5779919a4" providerId="LiveId" clId="{743256A7-6CE7-B242-894F-C640845B5FDB}" dt="2025-05-08T15:20:56.193" v="106"/>
-        <pc:sldMkLst>
-          <pc:docMk/>
-          <pc:sldMk cId="3682048310" sldId="2728"/>
-        </pc:sldMkLst>
-      </pc:sldChg>
-      <pc:sldChg chg="add">
-        <pc:chgData name="Xin Luo" userId="82312ee5779919a4" providerId="LiveId" clId="{743256A7-6CE7-B242-894F-C640845B5FDB}" dt="2025-05-08T15:20:56.193" v="106"/>
-        <pc:sldMkLst>
-          <pc:docMk/>
-          <pc:sldMk cId="13868781" sldId="2732"/>
-        </pc:sldMkLst>
-      </pc:sldChg>
-      <pc:sldChg chg="del">
-        <pc:chgData name="Xin Luo" userId="82312ee5779919a4" providerId="LiveId" clId="{743256A7-6CE7-B242-894F-C640845B5FDB}" dt="2025-05-08T15:21:00.183" v="109" actId="2696"/>
-        <pc:sldMkLst>
-          <pc:docMk/>
-          <pc:sldMk cId="3506380824" sldId="2764"/>
-        </pc:sldMkLst>
-      </pc:sldChg>
-    </pc:docChg>
-  </pc:docChgLst>
-  <pc:docChgLst>
-    <pc:chgData name="Xin Luo" userId="82312ee5779919a4" providerId="LiveId" clId="{A5D610E5-752B-7B4A-889B-D40C860DA0F0}"/>
-    <pc:docChg chg="addSld delSld modSld">
-      <pc:chgData name="Xin Luo" userId="82312ee5779919a4" providerId="LiveId" clId="{A5D610E5-752B-7B4A-889B-D40C860DA0F0}" dt="2025-05-08T15:18:36.457" v="210" actId="2696"/>
-      <pc:docMkLst>
-        <pc:docMk/>
-      </pc:docMkLst>
-      <pc:sldChg chg="modSp mod">
-        <pc:chgData name="Xin Luo" userId="82312ee5779919a4" providerId="LiveId" clId="{A5D610E5-752B-7B4A-889B-D40C860DA0F0}" dt="2025-05-08T15:13:36.832" v="125" actId="20577"/>
-        <pc:sldMkLst>
-          <pc:docMk/>
-          <pc:sldMk cId="1576120367" sldId="2387"/>
-        </pc:sldMkLst>
-      </pc:sldChg>
-      <pc:sldChg chg="modSp mod">
-        <pc:chgData name="Xin Luo" userId="82312ee5779919a4" providerId="LiveId" clId="{A5D610E5-752B-7B4A-889B-D40C860DA0F0}" dt="2025-05-08T15:14:31.896" v="150" actId="20577"/>
-        <pc:sldMkLst>
-          <pc:docMk/>
-          <pc:sldMk cId="2415901206" sldId="2447"/>
-        </pc:sldMkLst>
-      </pc:sldChg>
-      <pc:sldChg chg="modSp mod">
-        <pc:chgData name="Xin Luo" userId="82312ee5779919a4" providerId="LiveId" clId="{A5D610E5-752B-7B4A-889B-D40C860DA0F0}" dt="2025-05-08T15:12:24.990" v="38" actId="20577"/>
-        <pc:sldMkLst>
-          <pc:docMk/>
-          <pc:sldMk cId="1658607177" sldId="2708"/>
-        </pc:sldMkLst>
-      </pc:sldChg>
-      <pc:sldChg chg="modSp mod">
-        <pc:chgData name="Xin Luo" userId="82312ee5779919a4" providerId="LiveId" clId="{A5D610E5-752B-7B4A-889B-D40C860DA0F0}" dt="2025-05-08T15:14:38.806" v="166" actId="20577"/>
-        <pc:sldMkLst>
-          <pc:docMk/>
-          <pc:sldMk cId="481122590" sldId="2709"/>
-        </pc:sldMkLst>
-      </pc:sldChg>
-      <pc:sldChg chg="del">
-        <pc:chgData name="Xin Luo" userId="82312ee5779919a4" providerId="LiveId" clId="{A5D610E5-752B-7B4A-889B-D40C860DA0F0}" dt="2025-05-08T15:18:36.427" v="198" actId="2696"/>
-        <pc:sldMkLst>
-          <pc:docMk/>
-          <pc:sldMk cId="3833073590" sldId="2716"/>
-        </pc:sldMkLst>
-      </pc:sldChg>
-      <pc:sldChg chg="modSp mod">
-        <pc:chgData name="Xin Luo" userId="82312ee5779919a4" providerId="LiveId" clId="{A5D610E5-752B-7B4A-889B-D40C860DA0F0}" dt="2025-05-08T15:15:01.919" v="196" actId="20577"/>
-        <pc:sldMkLst>
-          <pc:docMk/>
-          <pc:sldMk cId="972163772" sldId="2720"/>
-        </pc:sldMkLst>
-      </pc:sldChg>
-      <pc:sldChg chg="del">
-        <pc:chgData name="Xin Luo" userId="82312ee5779919a4" providerId="LiveId" clId="{A5D610E5-752B-7B4A-889B-D40C860DA0F0}" dt="2025-05-08T15:18:36.438" v="205" actId="2696"/>
-        <pc:sldMkLst>
-          <pc:docMk/>
-          <pc:sldMk cId="2689695864" sldId="2721"/>
-        </pc:sldMkLst>
-      </pc:sldChg>
-      <pc:sldChg chg="add">
-        <pc:chgData name="Xin Luo" userId="82312ee5779919a4" providerId="LiveId" clId="{A5D610E5-752B-7B4A-889B-D40C860DA0F0}" dt="2025-05-08T15:18:29.209" v="197"/>
-        <pc:sldMkLst>
-          <pc:docMk/>
-          <pc:sldMk cId="2826444872" sldId="2723"/>
-        </pc:sldMkLst>
-      </pc:sldChg>
-      <pc:sldChg chg="add">
-        <pc:chgData name="Xin Luo" userId="82312ee5779919a4" providerId="LiveId" clId="{A5D610E5-752B-7B4A-889B-D40C860DA0F0}" dt="2025-05-08T15:18:29.209" v="197"/>
-        <pc:sldMkLst>
-          <pc:docMk/>
-          <pc:sldMk cId="965496355" sldId="2726"/>
-        </pc:sldMkLst>
-      </pc:sldChg>
-      <pc:sldChg chg="del">
-        <pc:chgData name="Xin Luo" userId="82312ee5779919a4" providerId="LiveId" clId="{A5D610E5-752B-7B4A-889B-D40C860DA0F0}" dt="2025-05-08T15:18:36.451" v="208" actId="2696"/>
-        <pc:sldMkLst>
-          <pc:docMk/>
-          <pc:sldMk cId="2510358707" sldId="2740"/>
-        </pc:sldMkLst>
-      </pc:sldChg>
-      <pc:sldChg chg="del">
-        <pc:chgData name="Xin Luo" userId="82312ee5779919a4" providerId="LiveId" clId="{A5D610E5-752B-7B4A-889B-D40C860DA0F0}" dt="2025-05-08T15:18:36.428" v="199" actId="2696"/>
-        <pc:sldMkLst>
-          <pc:docMk/>
-          <pc:sldMk cId="3883315984" sldId="2744"/>
-        </pc:sldMkLst>
-      </pc:sldChg>
-      <pc:sldChg chg="del">
-        <pc:chgData name="Xin Luo" userId="82312ee5779919a4" providerId="LiveId" clId="{A5D610E5-752B-7B4A-889B-D40C860DA0F0}" dt="2025-05-08T15:18:36.439" v="206" actId="2696"/>
-        <pc:sldMkLst>
-          <pc:docMk/>
-          <pc:sldMk cId="3741103209" sldId="2745"/>
-        </pc:sldMkLst>
-      </pc:sldChg>
-      <pc:sldChg chg="del">
-        <pc:chgData name="Xin Luo" userId="82312ee5779919a4" providerId="LiveId" clId="{A5D610E5-752B-7B4A-889B-D40C860DA0F0}" dt="2025-05-08T15:18:36.432" v="203" actId="2696"/>
-        <pc:sldMkLst>
-          <pc:docMk/>
-          <pc:sldMk cId="322086101" sldId="2746"/>
-        </pc:sldMkLst>
-      </pc:sldChg>
-      <pc:sldChg chg="del">
-        <pc:chgData name="Xin Luo" userId="82312ee5779919a4" providerId="LiveId" clId="{A5D610E5-752B-7B4A-889B-D40C860DA0F0}" dt="2025-05-08T15:18:36.429" v="200" actId="2696"/>
-        <pc:sldMkLst>
-          <pc:docMk/>
-          <pc:sldMk cId="2920839983" sldId="2747"/>
-        </pc:sldMkLst>
-      </pc:sldChg>
-      <pc:sldChg chg="del">
-        <pc:chgData name="Xin Luo" userId="82312ee5779919a4" providerId="LiveId" clId="{A5D610E5-752B-7B4A-889B-D40C860DA0F0}" dt="2025-05-08T15:18:36.431" v="202" actId="2696"/>
-        <pc:sldMkLst>
-          <pc:docMk/>
-          <pc:sldMk cId="2081473989" sldId="2748"/>
-        </pc:sldMkLst>
-      </pc:sldChg>
-      <pc:sldChg chg="del">
-        <pc:chgData name="Xin Luo" userId="82312ee5779919a4" providerId="LiveId" clId="{A5D610E5-752B-7B4A-889B-D40C860DA0F0}" dt="2025-05-08T15:18:36.457" v="210" actId="2696"/>
-        <pc:sldMkLst>
-          <pc:docMk/>
-          <pc:sldMk cId="1994915307" sldId="2749"/>
-        </pc:sldMkLst>
-      </pc:sldChg>
-      <pc:sldChg chg="del">
-        <pc:chgData name="Xin Luo" userId="82312ee5779919a4" providerId="LiveId" clId="{A5D610E5-752B-7B4A-889B-D40C860DA0F0}" dt="2025-05-08T15:18:36.430" v="201" actId="2696"/>
-        <pc:sldMkLst>
-          <pc:docMk/>
-          <pc:sldMk cId="202264030" sldId="2750"/>
-        </pc:sldMkLst>
-      </pc:sldChg>
-      <pc:sldChg chg="del">
-        <pc:chgData name="Xin Luo" userId="82312ee5779919a4" providerId="LiveId" clId="{A5D610E5-752B-7B4A-889B-D40C860DA0F0}" dt="2025-05-08T15:18:36.448" v="207" actId="2696"/>
-        <pc:sldMkLst>
-          <pc:docMk/>
-          <pc:sldMk cId="2371836296" sldId="2756"/>
-        </pc:sldMkLst>
-      </pc:sldChg>
-      <pc:sldChg chg="del">
-        <pc:chgData name="Xin Luo" userId="82312ee5779919a4" providerId="LiveId" clId="{A5D610E5-752B-7B4A-889B-D40C860DA0F0}" dt="2025-05-08T15:18:36.437" v="204" actId="2696"/>
-        <pc:sldMkLst>
-          <pc:docMk/>
-          <pc:sldMk cId="397779649" sldId="2757"/>
-        </pc:sldMkLst>
-      </pc:sldChg>
-      <pc:sldChg chg="del">
-        <pc:chgData name="Xin Luo" userId="82312ee5779919a4" providerId="LiveId" clId="{A5D610E5-752B-7B4A-889B-D40C860DA0F0}" dt="2025-05-08T15:18:36.455" v="209" actId="2696"/>
-        <pc:sldMkLst>
-          <pc:docMk/>
-          <pc:sldMk cId="1878724924" sldId="2758"/>
-        </pc:sldMkLst>
-      </pc:sldChg>
-      <pc:sldChg chg="add">
-        <pc:chgData name="Xin Luo" userId="82312ee5779919a4" providerId="LiveId" clId="{A5D610E5-752B-7B4A-889B-D40C860DA0F0}" dt="2025-05-08T15:18:29.209" v="197"/>
-        <pc:sldMkLst>
-          <pc:docMk/>
-          <pc:sldMk cId="3506380824" sldId="2764"/>
-        </pc:sldMkLst>
-      </pc:sldChg>
-    </pc:docChg>
-  </pc:docChgLst>
-  <pc:docChgLst>
-    <pc:chgData name="Xin Luo" userId="82312ee5779919a4" providerId="LiveId" clId="{D14C59B8-0981-EC4B-B26C-2D65043E6DB4}"/>
-    <pc:docChg chg="undo custSel addSld delSld modSld sldOrd">
-      <pc:chgData name="Xin Luo" userId="82312ee5779919a4" providerId="LiveId" clId="{D14C59B8-0981-EC4B-B26C-2D65043E6DB4}" dt="2025-06-01T09:04:21.621" v="2970" actId="2696"/>
-      <pc:docMkLst>
-        <pc:docMk/>
-      </pc:docMkLst>
-      <pc:sldChg chg="modSp mod">
-        <pc:chgData name="Xin Luo" userId="82312ee5779919a4" providerId="LiveId" clId="{D14C59B8-0981-EC4B-B26C-2D65043E6DB4}" dt="2025-05-25T10:21:09.231" v="163" actId="20577"/>
-        <pc:sldMkLst>
-          <pc:docMk/>
-          <pc:sldMk cId="1576120367" sldId="2387"/>
-        </pc:sldMkLst>
-      </pc:sldChg>
-      <pc:sldChg chg="modSp mod">
-        <pc:chgData name="Xin Luo" userId="82312ee5779919a4" providerId="LiveId" clId="{D14C59B8-0981-EC4B-B26C-2D65043E6DB4}" dt="2025-05-25T10:21:20.908" v="164" actId="20577"/>
-        <pc:sldMkLst>
-          <pc:docMk/>
-          <pc:sldMk cId="2415901206" sldId="2447"/>
-        </pc:sldMkLst>
-      </pc:sldChg>
-      <pc:sldChg chg="modSp mod">
-        <pc:chgData name="Xin Luo" userId="82312ee5779919a4" providerId="LiveId" clId="{D14C59B8-0981-EC4B-B26C-2D65043E6DB4}" dt="2025-05-25T10:21:32.920" v="188" actId="20577"/>
-        <pc:sldMkLst>
-          <pc:docMk/>
-          <pc:sldMk cId="481122590" sldId="2709"/>
-        </pc:sldMkLst>
-      </pc:sldChg>
-      <pc:sldChg chg="modSp mod">
-        <pc:chgData name="Xin Luo" userId="82312ee5779919a4" providerId="LiveId" clId="{D14C59B8-0981-EC4B-B26C-2D65043E6DB4}" dt="2025-05-25T10:21:57.525" v="205" actId="20577"/>
-        <pc:sldMkLst>
-          <pc:docMk/>
-          <pc:sldMk cId="972163772" sldId="2720"/>
-        </pc:sldMkLst>
-      </pc:sldChg>
-      <pc:sldChg chg="addSp delSp modSp mod">
-        <pc:chgData name="Xin Luo" userId="82312ee5779919a4" providerId="LiveId" clId="{D14C59B8-0981-EC4B-B26C-2D65043E6DB4}" dt="2025-06-01T03:22:25.060" v="2669" actId="14100"/>
-        <pc:sldMkLst>
-          <pc:docMk/>
-          <pc:sldMk cId="3053350483" sldId="2729"/>
-        </pc:sldMkLst>
-      </pc:sldChg>
-      <pc:sldChg chg="del">
-        <pc:chgData name="Xin Luo" userId="82312ee5779919a4" providerId="LiveId" clId="{D14C59B8-0981-EC4B-B26C-2D65043E6DB4}" dt="2025-05-25T10:21:41.943" v="189" actId="2696"/>
-        <pc:sldMkLst>
-          <pc:docMk/>
-          <pc:sldMk cId="1201927867" sldId="2730"/>
-        </pc:sldMkLst>
-      </pc:sldChg>
-      <pc:sldChg chg="add ord">
-        <pc:chgData name="Xin Luo" userId="82312ee5779919a4" providerId="LiveId" clId="{D14C59B8-0981-EC4B-B26C-2D65043E6DB4}" dt="2025-05-25T11:06:40.016" v="797" actId="20578"/>
-        <pc:sldMkLst>
-          <pc:docMk/>
-          <pc:sldMk cId="1658887241" sldId="2730"/>
-        </pc:sldMkLst>
-      </pc:sldChg>
-      <pc:sldChg chg="addSp delSp modSp add mod">
-        <pc:chgData name="Xin Luo" userId="82312ee5779919a4" providerId="LiveId" clId="{D14C59B8-0981-EC4B-B26C-2D65043E6DB4}" dt="2025-06-01T05:03:19.029" v="2739" actId="20577"/>
-        <pc:sldMkLst>
-          <pc:docMk/>
-          <pc:sldMk cId="345114206" sldId="2767"/>
-        </pc:sldMkLst>
-      </pc:sldChg>
-      <pc:sldChg chg="del">
-        <pc:chgData name="Xin Luo" userId="82312ee5779919a4" providerId="LiveId" clId="{D14C59B8-0981-EC4B-B26C-2D65043E6DB4}" dt="2025-05-25T10:21:41.943" v="189" actId="2696"/>
-        <pc:sldMkLst>
-          <pc:docMk/>
-          <pc:sldMk cId="3947651410" sldId="2767"/>
-        </pc:sldMkLst>
-      </pc:sldChg>
-      <pc:sldChg chg="add modNotesTx">
-        <pc:chgData name="Xin Luo" userId="82312ee5779919a4" providerId="LiveId" clId="{D14C59B8-0981-EC4B-B26C-2D65043E6DB4}" dt="2025-06-01T05:12:21.342" v="2832" actId="20577"/>
-        <pc:sldMkLst>
-          <pc:docMk/>
-          <pc:sldMk cId="523723600" sldId="2768"/>
-        </pc:sldMkLst>
-      </pc:sldChg>
-      <pc:sldChg chg="del">
-        <pc:chgData name="Xin Luo" userId="82312ee5779919a4" providerId="LiveId" clId="{D14C59B8-0981-EC4B-B26C-2D65043E6DB4}" dt="2025-05-25T10:21:41.943" v="189" actId="2696"/>
-        <pc:sldMkLst>
-          <pc:docMk/>
-          <pc:sldMk cId="4149704501" sldId="2768"/>
-        </pc:sldMkLst>
-      </pc:sldChg>
-      <pc:sldChg chg="addSp delSp modSp add mod">
-        <pc:chgData name="Xin Luo" userId="82312ee5779919a4" providerId="LiveId" clId="{D14C59B8-0981-EC4B-B26C-2D65043E6DB4}" dt="2025-06-01T03:22:34.786" v="2671" actId="113"/>
-        <pc:sldMkLst>
-          <pc:docMk/>
-          <pc:sldMk cId="4191734053" sldId="2769"/>
-        </pc:sldMkLst>
-      </pc:sldChg>
-      <pc:sldChg chg="delSp modSp add del mod">
-        <pc:chgData name="Xin Luo" userId="82312ee5779919a4" providerId="LiveId" clId="{D14C59B8-0981-EC4B-B26C-2D65043E6DB4}" dt="2025-05-25T11:07:26.945" v="798" actId="2696"/>
-        <pc:sldMkLst>
-          <pc:docMk/>
-          <pc:sldMk cId="2593144733" sldId="2770"/>
-        </pc:sldMkLst>
-      </pc:sldChg>
-      <pc:sldChg chg="addSp delSp modSp add mod modNotesTx">
-        <pc:chgData name="Xin Luo" userId="82312ee5779919a4" providerId="LiveId" clId="{D14C59B8-0981-EC4B-B26C-2D65043E6DB4}" dt="2025-06-01T03:22:57.140" v="2689" actId="207"/>
-        <pc:sldMkLst>
-          <pc:docMk/>
-          <pc:sldMk cId="4120474075" sldId="2771"/>
-        </pc:sldMkLst>
-      </pc:sldChg>
-      <pc:sldChg chg="addSp delSp modSp add mod">
-        <pc:chgData name="Xin Luo" userId="82312ee5779919a4" providerId="LiveId" clId="{D14C59B8-0981-EC4B-B26C-2D65043E6DB4}" dt="2025-06-01T03:23:12.880" v="2693" actId="1076"/>
-        <pc:sldMkLst>
-          <pc:docMk/>
-          <pc:sldMk cId="3183286210" sldId="2772"/>
-        </pc:sldMkLst>
-      </pc:sldChg>
-      <pc:sldChg chg="addSp delSp modSp add mod">
-        <pc:chgData name="Xin Luo" userId="82312ee5779919a4" providerId="LiveId" clId="{D14C59B8-0981-EC4B-B26C-2D65043E6DB4}" dt="2025-06-01T03:32:36.210" v="2714" actId="1076"/>
-        <pc:sldMkLst>
-          <pc:docMk/>
-          <pc:sldMk cId="2871118410" sldId="2773"/>
-        </pc:sldMkLst>
-      </pc:sldChg>
-      <pc:sldChg chg="addSp delSp modSp add mod">
-        <pc:chgData name="Xin Luo" userId="82312ee5779919a4" providerId="LiveId" clId="{D14C59B8-0981-EC4B-B26C-2D65043E6DB4}" dt="2025-06-01T03:33:07.162" v="2722" actId="1076"/>
-        <pc:sldMkLst>
-          <pc:docMk/>
-          <pc:sldMk cId="1924830660" sldId="2774"/>
-        </pc:sldMkLst>
-      </pc:sldChg>
-      <pc:sldChg chg="addSp delSp modSp add mod">
-        <pc:chgData name="Xin Luo" userId="82312ee5779919a4" providerId="LiveId" clId="{D14C59B8-0981-EC4B-B26C-2D65043E6DB4}" dt="2025-06-01T04:58:50.742" v="2734" actId="1036"/>
-        <pc:sldMkLst>
-          <pc:docMk/>
-          <pc:sldMk cId="2132556518" sldId="2775"/>
-        </pc:sldMkLst>
-      </pc:sldChg>
-      <pc:sldChg chg="addSp delSp modSp add del mod ord modNotesTx">
-        <pc:chgData name="Xin Luo" userId="82312ee5779919a4" providerId="LiveId" clId="{D14C59B8-0981-EC4B-B26C-2D65043E6DB4}" dt="2025-06-01T09:03:34.763" v="2967" actId="2696"/>
-        <pc:sldMkLst>
-          <pc:docMk/>
-          <pc:sldMk cId="152024502" sldId="2776"/>
-        </pc:sldMkLst>
-      </pc:sldChg>
-      <pc:sldChg chg="addSp delSp modSp add mod">
-        <pc:chgData name="Xin Luo" userId="82312ee5779919a4" providerId="LiveId" clId="{D14C59B8-0981-EC4B-B26C-2D65043E6DB4}" dt="2025-06-01T08:40:56.987" v="2866" actId="1076"/>
-        <pc:sldMkLst>
-          <pc:docMk/>
-          <pc:sldMk cId="4290921164" sldId="2777"/>
-        </pc:sldMkLst>
-      </pc:sldChg>
-      <pc:sldChg chg="addSp delSp modSp add mod ord">
-        <pc:chgData name="Xin Luo" userId="82312ee5779919a4" providerId="LiveId" clId="{D14C59B8-0981-EC4B-B26C-2D65043E6DB4}" dt="2025-06-01T08:42:28.113" v="2897" actId="1035"/>
-        <pc:sldMkLst>
-          <pc:docMk/>
-          <pc:sldMk cId="3297208711" sldId="2778"/>
-        </pc:sldMkLst>
-      </pc:sldChg>
-      <pc:sldChg chg="addSp delSp modSp add mod">
-        <pc:chgData name="Xin Luo" userId="82312ee5779919a4" providerId="LiveId" clId="{D14C59B8-0981-EC4B-B26C-2D65043E6DB4}" dt="2025-06-01T09:00:31.318" v="2961" actId="1035"/>
-        <pc:sldMkLst>
-          <pc:docMk/>
-          <pc:sldMk cId="1983522713" sldId="2779"/>
-        </pc:sldMkLst>
-      </pc:sldChg>
-      <pc:sldChg chg="addSp delSp modSp add mod">
-        <pc:chgData name="Xin Luo" userId="82312ee5779919a4" providerId="LiveId" clId="{D14C59B8-0981-EC4B-B26C-2D65043E6DB4}" dt="2025-06-01T09:03:28.266" v="2966" actId="1076"/>
-        <pc:sldMkLst>
-          <pc:docMk/>
-          <pc:sldMk cId="1227656408" sldId="2780"/>
-        </pc:sldMkLst>
-      </pc:sldChg>
-      <pc:sldChg chg="addSp delSp modSp add del mod">
-        <pc:chgData name="Xin Luo" userId="82312ee5779919a4" providerId="LiveId" clId="{D14C59B8-0981-EC4B-B26C-2D65043E6DB4}" dt="2025-06-01T09:02:58.707" v="2962" actId="2696"/>
-        <pc:sldMkLst>
-          <pc:docMk/>
-          <pc:sldMk cId="466510342" sldId="2781"/>
-        </pc:sldMkLst>
-      </pc:sldChg>
-      <pc:sldChg chg="delSp modSp add del mod">
-        <pc:chgData name="Xin Luo" userId="82312ee5779919a4" providerId="LiveId" clId="{D14C59B8-0981-EC4B-B26C-2D65043E6DB4}" dt="2025-06-01T09:04:21.621" v="2970" actId="2696"/>
-        <pc:sldMkLst>
-          <pc:docMk/>
-          <pc:sldMk cId="3963623095" sldId="2782"/>
-        </pc:sldMkLst>
-      </pc:sldChg>
-      <pc:sldChg chg="modSp add mod">
-        <pc:chgData name="Xin Luo" userId="82312ee5779919a4" providerId="LiveId" clId="{D14C59B8-0981-EC4B-B26C-2D65043E6DB4}" dt="2025-06-01T08:26:52.802" v="2863" actId="14100"/>
-        <pc:sldMkLst>
-          <pc:docMk/>
-          <pc:sldMk cId="116747266" sldId="2783"/>
-        </pc:sldMkLst>
-      </pc:sldChg>
-      <pc:sldChg chg="addSp delSp modSp add mod">
-        <pc:chgData name="Xin Luo" userId="82312ee5779919a4" providerId="LiveId" clId="{D14C59B8-0981-EC4B-B26C-2D65043E6DB4}" dt="2025-05-31T01:59:00.341" v="1534" actId="113"/>
-        <pc:sldMkLst>
-          <pc:docMk/>
-          <pc:sldMk cId="1141366588" sldId="2784"/>
-        </pc:sldMkLst>
-      </pc:sldChg>
-      <pc:sldChg chg="addSp delSp modSp add mod">
-        <pc:chgData name="Xin Luo" userId="82312ee5779919a4" providerId="LiveId" clId="{D14C59B8-0981-EC4B-B26C-2D65043E6DB4}" dt="2025-05-31T02:33:55.649" v="2045" actId="1076"/>
-        <pc:sldMkLst>
-          <pc:docMk/>
-          <pc:sldMk cId="1406963904" sldId="2785"/>
-        </pc:sldMkLst>
-      </pc:sldChg>
-      <pc:sldChg chg="addSp delSp modSp add mod">
-        <pc:chgData name="Xin Luo" userId="82312ee5779919a4" providerId="LiveId" clId="{D14C59B8-0981-EC4B-B26C-2D65043E6DB4}" dt="2025-06-01T03:24:12.833" v="2707" actId="1036"/>
-        <pc:sldMkLst>
-          <pc:docMk/>
-          <pc:sldMk cId="3353334114" sldId="2786"/>
-        </pc:sldMkLst>
-      </pc:sldChg>
-      <pc:sldChg chg="add del">
-        <pc:chgData name="Xin Luo" userId="82312ee5779919a4" providerId="LiveId" clId="{D14C59B8-0981-EC4B-B26C-2D65043E6DB4}" dt="2025-06-01T09:04:08.217" v="2969"/>
-        <pc:sldMkLst>
-          <pc:docMk/>
-          <pc:sldMk cId="1887173609" sldId="2787"/>
-        </pc:sldMkLst>
-      </pc:sldChg>
-    </pc:docChg>
-  </pc:docChgLst>
-  <pc:docChgLst>
-    <pc:chgData name="Xin Luo" userId="82312ee5779919a4" providerId="LiveId" clId="{6D7995D0-6D12-7441-A7A8-BA6591145C00}"/>
-    <pc:docChg chg="custSel modSld">
-      <pc:chgData name="Xin Luo" userId="82312ee5779919a4" providerId="LiveId" clId="{6D7995D0-6D12-7441-A7A8-BA6591145C00}" dt="2025-08-12T09:58:00.791" v="3" actId="478"/>
-      <pc:docMkLst>
-        <pc:docMk/>
-      </pc:docMkLst>
-      <pc:sldChg chg="addSp delSp modSp mod">
-        <pc:chgData name="Xin Luo" userId="82312ee5779919a4" providerId="LiveId" clId="{6D7995D0-6D12-7441-A7A8-BA6591145C00}" dt="2025-08-12T09:58:00.791" v="3" actId="478"/>
-        <pc:sldMkLst>
-          <pc:docMk/>
-          <pc:sldMk cId="4120474075" sldId="2771"/>
-        </pc:sldMkLst>
-        <pc:spChg chg="add del mod">
-          <ac:chgData name="Xin Luo" userId="82312ee5779919a4" providerId="LiveId" clId="{6D7995D0-6D12-7441-A7A8-BA6591145C00}" dt="2025-08-12T09:58:00.791" v="3" actId="478"/>
+        <pc:spChg chg="mod">
+          <ac:chgData name="Xin Luo" userId="82312ee5779919a4" providerId="LiveId" clId="{4B16E866-FFF1-585A-8670-68209B92BFC1}" dt="2026-08-27T06:20:42.853" v="159" actId="20577"/>
           <ac:spMkLst>
             <pc:docMk/>
-            <pc:sldMk cId="4120474075" sldId="2771"/>
-            <ac:spMk id="6" creationId="{D261D712-2D5E-6750-6F8E-245EC7569FBA}"/>
+            <pc:sldMk cId="940880124" sldId="2742"/>
+            <ac:spMk id="4" creationId="{F17BA0C2-A265-EE38-7F87-B0E3E08CDBEB}"/>
+          </ac:spMkLst>
+        </pc:spChg>
+        <pc:spChg chg="mod">
+          <ac:chgData name="Xin Luo" userId="82312ee5779919a4" providerId="LiveId" clId="{4B16E866-FFF1-585A-8670-68209B92BFC1}" dt="2026-08-27T06:19:00.765" v="104" actId="20577"/>
+          <ac:spMkLst>
+            <pc:docMk/>
+            <pc:sldMk cId="940880124" sldId="2742"/>
+            <ac:spMk id="13" creationId="{303BC878-BC57-D350-27A3-F03AE48213AC}"/>
           </ac:spMkLst>
         </pc:spChg>
       </pc:sldChg>
@@ -4678,6 +2486,174 @@
   <p:cSld>
     <p:spTree>
       <p:nvGrpSpPr>
+        <p:cNvPr id="1" name="">
+          <a:extLst>
+            <a:ext uri="{FF2B5EF4-FFF2-40B4-BE49-F238E27FC236}">
+              <a16:creationId xmlns:a16="http://schemas.microsoft.com/office/drawing/2014/main" id="{C15F107C-4B73-F527-120D-1B731AC881A4}"/>
+            </a:ext>
+          </a:extLst>
+        </p:cNvPr>
+        <p:cNvGrpSpPr/>
+        <p:nvPr/>
+      </p:nvGrpSpPr>
+      <p:grpSpPr>
+        <a:xfrm>
+          <a:off x="0" y="0"/>
+          <a:ext cx="0" cy="0"/>
+          <a:chOff x="0" y="0"/>
+          <a:chExt cx="0" cy="0"/>
+        </a:xfrm>
+      </p:grpSpPr>
+      <p:sp>
+        <p:nvSpPr>
+          <p:cNvPr id="2" name="幻灯片图像占位符 1">
+            <a:extLst>
+              <a:ext uri="{FF2B5EF4-FFF2-40B4-BE49-F238E27FC236}">
+                <a16:creationId xmlns:a16="http://schemas.microsoft.com/office/drawing/2014/main" id="{83A43166-1C72-47E2-1576-F25D6BA31C13}"/>
+              </a:ext>
+            </a:extLst>
+          </p:cNvPr>
+          <p:cNvSpPr>
+            <a:spLocks noGrp="1" noRot="1" noChangeAspect="1"/>
+          </p:cNvSpPr>
+          <p:nvPr>
+            <p:ph type="sldImg"/>
+          </p:nvPr>
+        </p:nvSpPr>
+        <p:spPr>
+          <a:xfrm>
+            <a:off x="142875" y="768350"/>
+            <a:ext cx="6818313" cy="3836988"/>
+          </a:xfrm>
+        </p:spPr>
+      </p:sp>
+      <p:sp>
+        <p:nvSpPr>
+          <p:cNvPr id="3" name="备注占位符 2">
+            <a:extLst>
+              <a:ext uri="{FF2B5EF4-FFF2-40B4-BE49-F238E27FC236}">
+                <a16:creationId xmlns:a16="http://schemas.microsoft.com/office/drawing/2014/main" id="{B0237B0D-A842-0522-1B19-2ECC0A264D0D}"/>
+              </a:ext>
+            </a:extLst>
+          </p:cNvPr>
+          <p:cNvSpPr>
+            <a:spLocks noGrp="1"/>
+          </p:cNvSpPr>
+          <p:nvPr>
+            <p:ph type="body" idx="1"/>
+          </p:nvPr>
+        </p:nvSpPr>
+        <p:spPr/>
+        <p:txBody>
+          <a:bodyPr/>
+          <a:lstStyle/>
+          <a:p>
+            <a:endParaRPr lang="zh-CN" altLang="en-US" dirty="0"/>
+          </a:p>
+        </p:txBody>
+      </p:sp>
+    </p:spTree>
+    <p:extLst>
+      <p:ext uri="{BB962C8B-B14F-4D97-AF65-F5344CB8AC3E}">
+        <p14:creationId xmlns:p14="http://schemas.microsoft.com/office/powerpoint/2010/main" val="3184401922"/>
+      </p:ext>
+    </p:extLst>
+  </p:cSld>
+  <p:clrMapOvr>
+    <a:masterClrMapping/>
+  </p:clrMapOvr>
+</p:notes>
+</file>
+
+<file path=ppt/notesSlides/notesSlide24.xml><?xml version="1.0" encoding="utf-8"?>
+<p:notes xmlns:a="http://schemas.openxmlformats.org/drawingml/2006/main" xmlns:r="http://schemas.openxmlformats.org/officeDocument/2006/relationships" xmlns:p="http://schemas.openxmlformats.org/presentationml/2006/main">
+  <p:cSld>
+    <p:spTree>
+      <p:nvGrpSpPr>
+        <p:cNvPr id="1" name="">
+          <a:extLst>
+            <a:ext uri="{FF2B5EF4-FFF2-40B4-BE49-F238E27FC236}">
+              <a16:creationId xmlns:a16="http://schemas.microsoft.com/office/drawing/2014/main" id="{10246C0E-44D4-112E-2669-727D71730C95}"/>
+            </a:ext>
+          </a:extLst>
+        </p:cNvPr>
+        <p:cNvGrpSpPr/>
+        <p:nvPr/>
+      </p:nvGrpSpPr>
+      <p:grpSpPr>
+        <a:xfrm>
+          <a:off x="0" y="0"/>
+          <a:ext cx="0" cy="0"/>
+          <a:chOff x="0" y="0"/>
+          <a:chExt cx="0" cy="0"/>
+        </a:xfrm>
+      </p:grpSpPr>
+      <p:sp>
+        <p:nvSpPr>
+          <p:cNvPr id="2" name="幻灯片图像占位符 1">
+            <a:extLst>
+              <a:ext uri="{FF2B5EF4-FFF2-40B4-BE49-F238E27FC236}">
+                <a16:creationId xmlns:a16="http://schemas.microsoft.com/office/drawing/2014/main" id="{AACEB13E-6FC9-2E95-1A6C-6C33ED028775}"/>
+              </a:ext>
+            </a:extLst>
+          </p:cNvPr>
+          <p:cNvSpPr>
+            <a:spLocks noGrp="1" noRot="1" noChangeAspect="1"/>
+          </p:cNvSpPr>
+          <p:nvPr>
+            <p:ph type="sldImg"/>
+          </p:nvPr>
+        </p:nvSpPr>
+        <p:spPr>
+          <a:xfrm>
+            <a:off x="142875" y="768350"/>
+            <a:ext cx="6818313" cy="3836988"/>
+          </a:xfrm>
+        </p:spPr>
+      </p:sp>
+      <p:sp>
+        <p:nvSpPr>
+          <p:cNvPr id="3" name="备注占位符 2">
+            <a:extLst>
+              <a:ext uri="{FF2B5EF4-FFF2-40B4-BE49-F238E27FC236}">
+                <a16:creationId xmlns:a16="http://schemas.microsoft.com/office/drawing/2014/main" id="{E9E16379-D646-7BDF-7AA6-67BC85A15244}"/>
+              </a:ext>
+            </a:extLst>
+          </p:cNvPr>
+          <p:cNvSpPr>
+            <a:spLocks noGrp="1"/>
+          </p:cNvSpPr>
+          <p:nvPr>
+            <p:ph type="body" idx="1"/>
+          </p:nvPr>
+        </p:nvSpPr>
+        <p:spPr/>
+        <p:txBody>
+          <a:bodyPr/>
+          <a:lstStyle/>
+          <a:p>
+            <a:endParaRPr lang="zh-CN" altLang="en-US" dirty="0"/>
+          </a:p>
+        </p:txBody>
+      </p:sp>
+    </p:spTree>
+    <p:extLst>
+      <p:ext uri="{BB962C8B-B14F-4D97-AF65-F5344CB8AC3E}">
+        <p14:creationId xmlns:p14="http://schemas.microsoft.com/office/powerpoint/2010/main" val="1507532335"/>
+      </p:ext>
+    </p:extLst>
+  </p:cSld>
+  <p:clrMapOvr>
+    <a:masterClrMapping/>
+  </p:clrMapOvr>
+</p:notes>
+</file>
+
+<file path=ppt/notesSlides/notesSlide25.xml><?xml version="1.0" encoding="utf-8"?>
+<p:notes xmlns:a="http://schemas.openxmlformats.org/drawingml/2006/main" xmlns:r="http://schemas.openxmlformats.org/officeDocument/2006/relationships" xmlns:p="http://schemas.openxmlformats.org/presentationml/2006/main">
+  <p:cSld>
+    <p:spTree>
+      <p:nvGrpSpPr>
         <p:cNvPr id="1" name=""/>
         <p:cNvGrpSpPr/>
         <p:nvPr/>
@@ -4734,7 +2710,7 @@
 </p:notes>
 </file>
 
-<file path=ppt/notesSlides/notesSlide24.xml><?xml version="1.0" encoding="utf-8"?>
+<file path=ppt/notesSlides/notesSlide26.xml><?xml version="1.0" encoding="utf-8"?>
 <p:notes xmlns:a="http://schemas.openxmlformats.org/drawingml/2006/main" xmlns:r="http://schemas.openxmlformats.org/officeDocument/2006/relationships" xmlns:p="http://schemas.openxmlformats.org/presentationml/2006/main">
   <p:cSld>
     <p:spTree>
@@ -4813,7 +2789,7 @@
 </p:notes>
 </file>
 
-<file path=ppt/notesSlides/notesSlide25.xml><?xml version="1.0" encoding="utf-8"?>
+<file path=ppt/notesSlides/notesSlide27.xml><?xml version="1.0" encoding="utf-8"?>
 <p:notes xmlns:a="http://schemas.openxmlformats.org/drawingml/2006/main" xmlns:r="http://schemas.openxmlformats.org/officeDocument/2006/relationships" xmlns:p="http://schemas.openxmlformats.org/presentationml/2006/main">
   <p:cSld>
     <p:spTree>
@@ -19632,7 +17608,7 @@
         </p:nvSpPr>
         <p:spPr>
           <a:xfrm>
-            <a:off x="624114" y="1646155"/>
+            <a:off x="624114" y="1609579"/>
             <a:ext cx="10943771" cy="743986"/>
           </a:xfrm>
           <a:prstGeom prst="rect">
@@ -19743,38 +17719,32 @@
           <p:cNvGraphicFramePr>
             <a:graphicFrameLocks noGrp="1"/>
           </p:cNvGraphicFramePr>
-          <p:nvPr>
-            <p:extLst>
-              <p:ext uri="{D42A27DB-BD31-4B8C-83A1-F6EECF244321}">
-                <p14:modId xmlns:p14="http://schemas.microsoft.com/office/powerpoint/2010/main" val="3631112709"/>
-              </p:ext>
-            </p:extLst>
-          </p:nvPr>
+          <p:nvPr/>
         </p:nvGraphicFramePr>
         <p:xfrm>
           <a:off x="624115" y="2448196"/>
-          <a:ext cx="10914742" cy="3981633"/>
+          <a:ext cx="11054741" cy="2994770"/>
         </p:xfrm>
         <a:graphic>
           <a:graphicData uri="http://schemas.openxmlformats.org/drawingml/2006/table">
             <a:tbl>
               <a:tblPr/>
               <a:tblGrid>
-                <a:gridCol w="2010805">
+                <a:gridCol w="2036597">
                   <a:extLst>
                     <a:ext uri="{9D8B030D-6E8A-4147-A177-3AD203B41FA5}">
                       <a16:colId xmlns:a16="http://schemas.microsoft.com/office/drawing/2014/main" val="2283228956"/>
                     </a:ext>
                   </a:extLst>
                 </a:gridCol>
-                <a:gridCol w="4014192">
+                <a:gridCol w="4065680">
                   <a:extLst>
                     <a:ext uri="{9D8B030D-6E8A-4147-A177-3AD203B41FA5}">
                       <a16:colId xmlns:a16="http://schemas.microsoft.com/office/drawing/2014/main" val="1378140691"/>
                     </a:ext>
                   </a:extLst>
                 </a:gridCol>
-                <a:gridCol w="4889745">
+                <a:gridCol w="4952464">
                   <a:extLst>
                     <a:ext uri="{9D8B030D-6E8A-4147-A177-3AD203B41FA5}">
                       <a16:colId xmlns:a16="http://schemas.microsoft.com/office/drawing/2014/main" val="4108045389"/>
@@ -19782,7 +17752,7 @@
                   </a:extLst>
                 </a:gridCol>
               </a:tblGrid>
-              <a:tr h="799106">
+              <a:tr h="555412">
                 <a:tc>
                   <a:txBody>
                     <a:bodyPr/>
@@ -19794,7 +17764,7 @@
                         </a:lnSpc>
                       </a:pPr>
                       <a:r>
-                        <a:rPr lang="zh-CN" altLang="en-US" sz="3200" b="1" dirty="0">
+                        <a:rPr lang="zh-CN" altLang="en-US" sz="2800" b="1" dirty="0">
                           <a:solidFill>
                             <a:schemeClr val="bg2"/>
                           </a:solidFill>
@@ -19857,7 +17827,7 @@
                         </a:lnSpc>
                       </a:pPr>
                       <a:r>
-                        <a:rPr lang="zh-CN" altLang="en-US" sz="3200" b="1">
+                        <a:rPr lang="zh-CN" altLang="en-US" sz="2800" b="1">
                           <a:solidFill>
                             <a:schemeClr val="bg2"/>
                           </a:solidFill>
@@ -19920,7 +17890,7 @@
                         </a:lnSpc>
                       </a:pPr>
                       <a:r>
-                        <a:rPr lang="zh-CN" altLang="en-US" sz="3200" b="1">
+                        <a:rPr lang="zh-CN" altLang="en-US" sz="2800" b="1">
                           <a:solidFill>
                             <a:schemeClr val="bg2"/>
                           </a:solidFill>
@@ -19978,7 +17948,7 @@
                   </a:ext>
                 </a:extLst>
               </a:tr>
-              <a:tr h="900124">
+              <a:tr h="624207">
                 <a:tc>
                   <a:txBody>
                     <a:bodyPr/>
@@ -19990,7 +17960,7 @@
                         </a:lnSpc>
                       </a:pPr>
                       <a:r>
-                        <a:rPr lang="en-US" sz="3200" dirty="0">
+                        <a:rPr lang="en-US" sz="2800" dirty="0">
                           <a:solidFill>
                             <a:schemeClr val="bg2"/>
                           </a:solidFill>
@@ -20053,7 +18023,7 @@
                         </a:lnSpc>
                       </a:pPr>
                       <a:r>
-                        <a:rPr lang="zh-CN" altLang="en-US" sz="3200">
+                        <a:rPr lang="zh-CN" altLang="en-US" sz="2800">
                           <a:solidFill>
                             <a:schemeClr val="bg2"/>
                           </a:solidFill>
@@ -20116,7 +18086,7 @@
                         </a:lnSpc>
                       </a:pPr>
                       <a:r>
-                        <a:rPr lang="zh-CN" altLang="en-US" sz="3200">
+                        <a:rPr lang="zh-CN" altLang="en-US" sz="2800">
                           <a:solidFill>
                             <a:schemeClr val="bg2"/>
                           </a:solidFill>
@@ -20174,7 +18144,7 @@
                   </a:ext>
                 </a:extLst>
               </a:tr>
-              <a:tr h="1483297">
+              <a:tr h="1028618">
                 <a:tc>
                   <a:txBody>
                     <a:bodyPr/>
@@ -20186,7 +18156,7 @@
                         </a:lnSpc>
                       </a:pPr>
                       <a:r>
-                        <a:rPr lang="en-US" sz="3200">
+                        <a:rPr lang="en-US" sz="2800">
                           <a:solidFill>
                             <a:schemeClr val="bg2"/>
                           </a:solidFill>
@@ -20249,7 +18219,7 @@
                         </a:lnSpc>
                       </a:pPr>
                       <a:r>
-                        <a:rPr lang="zh-CN" altLang="en-US" sz="3200" dirty="0">
+                        <a:rPr lang="zh-CN" altLang="en-US" sz="2800" dirty="0">
                           <a:solidFill>
                             <a:schemeClr val="bg2"/>
                           </a:solidFill>
@@ -20312,7 +18282,7 @@
                         </a:lnSpc>
                       </a:pPr>
                       <a:r>
-                        <a:rPr lang="zh-CN" altLang="en-US" sz="3200">
+                        <a:rPr lang="zh-CN" altLang="en-US" sz="2800">
                           <a:solidFill>
                             <a:schemeClr val="bg2"/>
                           </a:solidFill>
@@ -20370,7 +18340,7 @@
                   </a:ext>
                 </a:extLst>
               </a:tr>
-              <a:tr h="799106">
+              <a:tr h="555412">
                 <a:tc>
                   <a:txBody>
                     <a:bodyPr/>
@@ -20382,7 +18352,7 @@
                         </a:lnSpc>
                       </a:pPr>
                       <a:r>
-                        <a:rPr lang="en-US" sz="3200" dirty="0">
+                        <a:rPr lang="en-US" sz="2800" dirty="0">
                           <a:solidFill>
                             <a:schemeClr val="bg2"/>
                           </a:solidFill>
@@ -20445,7 +18415,7 @@
                         </a:lnSpc>
                       </a:pPr>
                       <a:r>
-                        <a:rPr lang="zh-CN" altLang="en-US" sz="3200" dirty="0">
+                        <a:rPr lang="zh-CN" altLang="en-US" sz="2800" dirty="0">
                           <a:solidFill>
                             <a:schemeClr val="bg2"/>
                           </a:solidFill>
@@ -20508,7 +18478,7 @@
                         </a:lnSpc>
                       </a:pPr>
                       <a:r>
-                        <a:rPr lang="zh-CN" altLang="en-US" sz="3200" dirty="0">
+                        <a:rPr lang="zh-CN" altLang="en-US" sz="2800" dirty="0">
                           <a:solidFill>
                             <a:schemeClr val="bg2"/>
                           </a:solidFill>
@@ -20570,10 +18540,317 @@
           </a:graphicData>
         </a:graphic>
       </p:graphicFrame>
+      <p:sp>
+        <p:nvSpPr>
+          <p:cNvPr id="6" name="TextBox 5">
+            <a:extLst>
+              <a:ext uri="{FF2B5EF4-FFF2-40B4-BE49-F238E27FC236}">
+                <a16:creationId xmlns:a16="http://schemas.microsoft.com/office/drawing/2014/main" id="{C0258A42-D03D-C8BA-9C3E-F18BE2978705}"/>
+              </a:ext>
+            </a:extLst>
+          </p:cNvPr>
+          <p:cNvSpPr txBox="1"/>
+          <p:nvPr/>
+        </p:nvSpPr>
+        <p:spPr>
+          <a:xfrm>
+            <a:off x="490002" y="5649640"/>
+            <a:ext cx="3497396" cy="1015663"/>
+          </a:xfrm>
+          <a:prstGeom prst="rect">
+            <a:avLst/>
+          </a:prstGeom>
+          <a:solidFill>
+            <a:schemeClr val="accent6">
+              <a:alpha val="35999"/>
+            </a:schemeClr>
+          </a:solidFill>
+          <a:ln w="28575">
+            <a:solidFill>
+              <a:schemeClr val="bg1"/>
+            </a:solidFill>
+          </a:ln>
+        </p:spPr>
+        <p:txBody>
+          <a:bodyPr wrap="square">
+            <a:spAutoFit/>
+          </a:bodyPr>
+          <a:lstStyle/>
+          <a:p>
+            <a:pPr algn="l"/>
+            <a:r>
+              <a:rPr lang="en-US" altLang="zh-CN" sz="2400" dirty="0">
+                <a:solidFill>
+                  <a:schemeClr val="bg2"/>
+                </a:solidFill>
+                <a:latin typeface="+mn-ea"/>
+                <a:ea typeface="+mn-ea"/>
+              </a:rPr>
+              <a:t>pip install </a:t>
+            </a:r>
+            <a:r>
+              <a:rPr lang="en-US" altLang="zh-CN" sz="2400" dirty="0" err="1">
+                <a:solidFill>
+                  <a:schemeClr val="bg2"/>
+                </a:solidFill>
+                <a:latin typeface="+mn-ea"/>
+                <a:ea typeface="+mn-ea"/>
+              </a:rPr>
+              <a:t>numpy</a:t>
+            </a:r>
+            <a:r>
+              <a:rPr lang="en-US" altLang="zh-CN" sz="2400" dirty="0">
+                <a:solidFill>
+                  <a:schemeClr val="bg2"/>
+                </a:solidFill>
+                <a:latin typeface="+mn-ea"/>
+                <a:ea typeface="+mn-ea"/>
+              </a:rPr>
+              <a:t> </a:t>
+            </a:r>
+          </a:p>
+          <a:p>
+            <a:pPr algn="l"/>
+            <a:r>
+              <a:rPr lang="en-US" altLang="zh-CN" sz="2400" dirty="0" err="1">
+                <a:solidFill>
+                  <a:schemeClr val="bg2"/>
+                </a:solidFill>
+                <a:latin typeface="+mn-ea"/>
+                <a:ea typeface="+mn-ea"/>
+              </a:rPr>
+              <a:t>conda</a:t>
+            </a:r>
+            <a:r>
+              <a:rPr lang="en-US" altLang="zh-CN" sz="2400" dirty="0">
+                <a:solidFill>
+                  <a:schemeClr val="bg2"/>
+                </a:solidFill>
+                <a:latin typeface="+mn-ea"/>
+                <a:ea typeface="+mn-ea"/>
+              </a:rPr>
+              <a:t> install </a:t>
+            </a:r>
+            <a:r>
+              <a:rPr lang="en-US" altLang="zh-CN" sz="2400" dirty="0" err="1">
+                <a:solidFill>
+                  <a:schemeClr val="bg2"/>
+                </a:solidFill>
+                <a:latin typeface="+mn-ea"/>
+                <a:ea typeface="+mn-ea"/>
+              </a:rPr>
+              <a:t>numpy</a:t>
+            </a:r>
+            <a:endParaRPr lang="en-US" altLang="zh-CN" sz="2400" dirty="0">
+              <a:solidFill>
+                <a:schemeClr val="bg2"/>
+              </a:solidFill>
+              <a:latin typeface="+mn-ea"/>
+              <a:ea typeface="+mn-ea"/>
+            </a:endParaRPr>
+          </a:p>
+        </p:txBody>
+      </p:sp>
+      <p:sp>
+        <p:nvSpPr>
+          <p:cNvPr id="7" name="TextBox 6">
+            <a:extLst>
+              <a:ext uri="{FF2B5EF4-FFF2-40B4-BE49-F238E27FC236}">
+                <a16:creationId xmlns:a16="http://schemas.microsoft.com/office/drawing/2014/main" id="{08BA4C88-3ABE-D7A7-86B3-E60B1329735C}"/>
+              </a:ext>
+            </a:extLst>
+          </p:cNvPr>
+          <p:cNvSpPr txBox="1"/>
+          <p:nvPr/>
+        </p:nvSpPr>
+        <p:spPr>
+          <a:xfrm>
+            <a:off x="4346301" y="5649639"/>
+            <a:ext cx="3497396" cy="1015663"/>
+          </a:xfrm>
+          <a:prstGeom prst="rect">
+            <a:avLst/>
+          </a:prstGeom>
+          <a:solidFill>
+            <a:schemeClr val="accent6">
+              <a:alpha val="35999"/>
+            </a:schemeClr>
+          </a:solidFill>
+          <a:ln w="28575">
+            <a:solidFill>
+              <a:schemeClr val="bg1"/>
+            </a:solidFill>
+          </a:ln>
+        </p:spPr>
+        <p:txBody>
+          <a:bodyPr wrap="square">
+            <a:spAutoFit/>
+          </a:bodyPr>
+          <a:lstStyle/>
+          <a:p>
+            <a:pPr algn="l"/>
+            <a:r>
+              <a:rPr lang="en-US" altLang="zh-CN" sz="2400" dirty="0">
+                <a:solidFill>
+                  <a:schemeClr val="bg2"/>
+                </a:solidFill>
+                <a:latin typeface="+mn-ea"/>
+                <a:ea typeface="+mn-ea"/>
+              </a:rPr>
+              <a:t>pip install pandas</a:t>
+            </a:r>
+          </a:p>
+          <a:p>
+            <a:pPr algn="l"/>
+            <a:r>
+              <a:rPr lang="en-US" altLang="zh-CN" sz="2400" dirty="0" err="1">
+                <a:solidFill>
+                  <a:schemeClr val="bg2"/>
+                </a:solidFill>
+                <a:latin typeface="+mn-ea"/>
+                <a:ea typeface="+mn-ea"/>
+              </a:rPr>
+              <a:t>conda</a:t>
+            </a:r>
+            <a:r>
+              <a:rPr lang="en-US" altLang="zh-CN" sz="2400" dirty="0">
+                <a:solidFill>
+                  <a:schemeClr val="bg2"/>
+                </a:solidFill>
+                <a:latin typeface="+mn-ea"/>
+                <a:ea typeface="+mn-ea"/>
+              </a:rPr>
+              <a:t> install </a:t>
+            </a:r>
+            <a:r>
+              <a:rPr lang="en-US" altLang="zh-CN" dirty="0">
+                <a:solidFill>
+                  <a:schemeClr val="bg2"/>
+                </a:solidFill>
+                <a:latin typeface="+mn-ea"/>
+              </a:rPr>
+              <a:t>pandas</a:t>
+            </a:r>
+            <a:endParaRPr lang="en-US" altLang="zh-CN" sz="2400" dirty="0">
+              <a:solidFill>
+                <a:schemeClr val="bg2"/>
+              </a:solidFill>
+              <a:latin typeface="+mn-ea"/>
+              <a:ea typeface="+mn-ea"/>
+            </a:endParaRPr>
+          </a:p>
+        </p:txBody>
+      </p:sp>
+      <p:sp>
+        <p:nvSpPr>
+          <p:cNvPr id="11" name="TextBox 10">
+            <a:extLst>
+              <a:ext uri="{FF2B5EF4-FFF2-40B4-BE49-F238E27FC236}">
+                <a16:creationId xmlns:a16="http://schemas.microsoft.com/office/drawing/2014/main" id="{388EAC60-5A2B-2CD5-A10F-60834F7FE0B7}"/>
+              </a:ext>
+            </a:extLst>
+          </p:cNvPr>
+          <p:cNvSpPr txBox="1"/>
+          <p:nvPr/>
+        </p:nvSpPr>
+        <p:spPr>
+          <a:xfrm>
+            <a:off x="8202600" y="5649639"/>
+            <a:ext cx="3649879" cy="1015663"/>
+          </a:xfrm>
+          <a:prstGeom prst="rect">
+            <a:avLst/>
+          </a:prstGeom>
+          <a:solidFill>
+            <a:schemeClr val="accent6">
+              <a:alpha val="35999"/>
+            </a:schemeClr>
+          </a:solidFill>
+          <a:ln w="28575">
+            <a:solidFill>
+              <a:schemeClr val="bg1"/>
+            </a:solidFill>
+          </a:ln>
+        </p:spPr>
+        <p:txBody>
+          <a:bodyPr wrap="square">
+            <a:spAutoFit/>
+          </a:bodyPr>
+          <a:lstStyle/>
+          <a:p>
+            <a:pPr algn="l"/>
+            <a:r>
+              <a:rPr lang="en-US" altLang="zh-CN" sz="2400" dirty="0">
+                <a:solidFill>
+                  <a:schemeClr val="bg2"/>
+                </a:solidFill>
+                <a:latin typeface="+mn-ea"/>
+                <a:ea typeface="+mn-ea"/>
+              </a:rPr>
+              <a:t>pip install </a:t>
+            </a:r>
+            <a:r>
+              <a:rPr lang="en-US" altLang="zh-CN" dirty="0">
+                <a:solidFill>
+                  <a:schemeClr val="bg2"/>
+                </a:solidFill>
+                <a:latin typeface="+mn-ea"/>
+              </a:rPr>
+              <a:t>matplotlib</a:t>
+            </a:r>
+            <a:endParaRPr lang="en-US" altLang="zh-CN" sz="2400" dirty="0">
+              <a:solidFill>
+                <a:schemeClr val="bg2"/>
+              </a:solidFill>
+              <a:latin typeface="+mn-ea"/>
+              <a:ea typeface="+mn-ea"/>
+            </a:endParaRPr>
+          </a:p>
+          <a:p>
+            <a:pPr algn="l"/>
+            <a:r>
+              <a:rPr lang="en-US" altLang="zh-CN" sz="2400" dirty="0" err="1">
+                <a:solidFill>
+                  <a:schemeClr val="bg2"/>
+                </a:solidFill>
+                <a:latin typeface="+mn-ea"/>
+                <a:ea typeface="+mn-ea"/>
+              </a:rPr>
+              <a:t>conda</a:t>
+            </a:r>
+            <a:r>
+              <a:rPr lang="en-US" altLang="zh-CN" sz="2400" dirty="0">
+                <a:solidFill>
+                  <a:schemeClr val="bg2"/>
+                </a:solidFill>
+                <a:latin typeface="+mn-ea"/>
+                <a:ea typeface="+mn-ea"/>
+              </a:rPr>
+              <a:t> install </a:t>
+            </a:r>
+            <a:r>
+              <a:rPr lang="en-US" altLang="zh-CN" dirty="0">
+                <a:solidFill>
+                  <a:schemeClr val="bg2"/>
+                </a:solidFill>
+                <a:latin typeface="+mn-ea"/>
+              </a:rPr>
+              <a:t>matplotlib</a:t>
+            </a:r>
+            <a:endParaRPr lang="en-US" altLang="zh-CN" sz="2400" dirty="0">
+              <a:solidFill>
+                <a:schemeClr val="bg2"/>
+              </a:solidFill>
+              <a:latin typeface="+mn-ea"/>
+              <a:ea typeface="+mn-ea"/>
+            </a:endParaRPr>
+          </a:p>
+        </p:txBody>
+      </p:sp>
     </p:spTree>
     <p:extLst>
       <p:ext uri="{BB962C8B-B14F-4D97-AF65-F5344CB8AC3E}">
-        <p14:creationId xmlns:p14="http://schemas.microsoft.com/office/powerpoint/2010/main" val="4290921164"/>
+        <p14:creationId xmlns:p14="http://schemas.microsoft.com/office/powerpoint/2010/main" val="1507537084"/>
       </p:ext>
     </p:extLst>
   </p:cSld>
@@ -20609,36 +18886,6 @@
           <a:chExt cx="0" cy="0"/>
         </a:xfrm>
       </p:grpSpPr>
-      <p:pic>
-        <p:nvPicPr>
-          <p:cNvPr id="5" name="Picture 4" descr="A screen shot of a computer program&#10;&#10;AI-generated content may be incorrect.">
-            <a:extLst>
-              <a:ext uri="{FF2B5EF4-FFF2-40B4-BE49-F238E27FC236}">
-                <a16:creationId xmlns:a16="http://schemas.microsoft.com/office/drawing/2014/main" id="{DB89A35B-C430-30E2-F904-5689AF3E524D}"/>
-              </a:ext>
-            </a:extLst>
-          </p:cNvPr>
-          <p:cNvPicPr>
-            <a:picLocks noChangeAspect="1"/>
-          </p:cNvPicPr>
-          <p:nvPr/>
-        </p:nvPicPr>
-        <p:blipFill>
-          <a:blip r:embed="rId3"/>
-          <a:stretch>
-            <a:fillRect/>
-          </a:stretch>
-        </p:blipFill>
-        <p:spPr>
-          <a:xfrm>
-            <a:off x="1298854" y="2216088"/>
-            <a:ext cx="9180460" cy="4553212"/>
-          </a:xfrm>
-          <a:prstGeom prst="rect">
-            <a:avLst/>
-          </a:prstGeom>
-        </p:spPr>
-      </p:pic>
       <p:sp>
         <p:nvSpPr>
           <p:cNvPr id="4" name="标题 3">
@@ -20696,8 +18943,8 @@
         </p:nvSpPr>
         <p:spPr>
           <a:xfrm>
-            <a:off x="522513" y="800688"/>
-            <a:ext cx="3962401" cy="743986"/>
+            <a:off x="611712" y="844210"/>
+            <a:ext cx="7741811" cy="743986"/>
           </a:xfrm>
           <a:prstGeom prst="rect">
             <a:avLst/>
@@ -20859,6 +19106,26 @@
               </a:rPr>
               <a:t>第三方库</a:t>
             </a:r>
+            <a:r>
+              <a:rPr lang="en-US" altLang="zh-CN" sz="3200" b="1" dirty="0">
+                <a:solidFill>
+                  <a:schemeClr val="accent2"/>
+                </a:solidFill>
+                <a:latin typeface="+mn-ea"/>
+                <a:ea typeface="+mn-ea"/>
+              </a:rPr>
+              <a:t>-</a:t>
+            </a:r>
+            <a:r>
+              <a:rPr lang="en-US" altLang="zh-CN" sz="3200" b="1" dirty="0" err="1">
+                <a:solidFill>
+                  <a:schemeClr val="accent2"/>
+                </a:solidFill>
+                <a:latin typeface="+mn-ea"/>
+                <a:ea typeface="+mn-ea"/>
+              </a:rPr>
+              <a:t>Numpy</a:t>
+            </a:r>
             <a:endParaRPr lang="en-US" altLang="zh-CN" sz="3200" b="1" dirty="0">
               <a:solidFill>
                 <a:schemeClr val="accent2"/>
@@ -20871,10 +19138,10 @@
       </p:sp>
       <p:sp>
         <p:nvSpPr>
-          <p:cNvPr id="7" name="TextBox 8">
+          <p:cNvPr id="2" name="TextBox 1">
             <a:extLst>
               <a:ext uri="{FF2B5EF4-FFF2-40B4-BE49-F238E27FC236}">
-                <a16:creationId xmlns:a16="http://schemas.microsoft.com/office/drawing/2014/main" id="{BAEA8241-F27A-BC22-6D1D-C320943718E9}"/>
+                <a16:creationId xmlns:a16="http://schemas.microsoft.com/office/drawing/2014/main" id="{72D56E66-3806-91F3-E44F-E429181BD448}"/>
               </a:ext>
             </a:extLst>
           </p:cNvPr>
@@ -20883,8 +19150,8 @@
         </p:nvSpPr>
         <p:spPr>
           <a:xfrm>
-            <a:off x="834571" y="1435817"/>
-            <a:ext cx="9865180" cy="743986"/>
+            <a:off x="611712" y="1631755"/>
+            <a:ext cx="11275488" cy="2170594"/>
           </a:xfrm>
           <a:prstGeom prst="rect">
             <a:avLst/>
@@ -20893,6 +19160,835 @@
         </p:spPr>
         <p:txBody>
           <a:bodyPr wrap="square">
+            <a:spAutoFit/>
+          </a:bodyPr>
+          <a:lstStyle/>
+          <a:p>
+            <a:pPr marL="342900" indent="-342900" algn="l">
+              <a:lnSpc>
+                <a:spcPct val="150000"/>
+              </a:lnSpc>
+              <a:buFont typeface="Arial" panose="020B0604020202020204" pitchFamily="34" charset="0"/>
+              <a:buChar char="•"/>
+            </a:pPr>
+            <a:r>
+              <a:rPr lang="zh-CN" altLang="en-US" sz="2800" dirty="0">
+                <a:solidFill>
+                  <a:schemeClr val="bg2"/>
+                </a:solidFill>
+                <a:latin typeface="+mn-ea"/>
+                <a:ea typeface="+mn-ea"/>
+              </a:rPr>
+              <a:t>是开源</a:t>
+            </a:r>
+            <a:r>
+              <a:rPr lang="en-US" sz="2800" dirty="0">
+                <a:solidFill>
+                  <a:schemeClr val="bg2"/>
+                </a:solidFill>
+                <a:latin typeface="+mn-ea"/>
+                <a:ea typeface="+mn-ea"/>
+              </a:rPr>
+              <a:t>Python</a:t>
+            </a:r>
+            <a:r>
+              <a:rPr lang="zh-CN" altLang="en-US" sz="2800" dirty="0">
+                <a:solidFill>
+                  <a:schemeClr val="bg2"/>
+                </a:solidFill>
+                <a:latin typeface="+mn-ea"/>
+                <a:ea typeface="+mn-ea"/>
+              </a:rPr>
+              <a:t>库，广泛应用在</a:t>
+            </a:r>
+            <a:r>
+              <a:rPr lang="zh-CN" altLang="en-US" sz="2800" b="1" dirty="0">
+                <a:solidFill>
+                  <a:schemeClr val="bg2"/>
+                </a:solidFill>
+                <a:latin typeface="+mn-ea"/>
+                <a:ea typeface="+mn-ea"/>
+              </a:rPr>
+              <a:t>数据分析和科学计算</a:t>
+            </a:r>
+            <a:r>
+              <a:rPr lang="zh-CN" altLang="en-US" sz="2800" dirty="0">
+                <a:solidFill>
+                  <a:schemeClr val="bg2"/>
+                </a:solidFill>
+                <a:latin typeface="+mn-ea"/>
+                <a:ea typeface="+mn-ea"/>
+              </a:rPr>
+              <a:t>领域。</a:t>
+            </a:r>
+            <a:endParaRPr lang="en-US" altLang="zh-CN" sz="2800" dirty="0">
+              <a:solidFill>
+                <a:schemeClr val="bg2"/>
+              </a:solidFill>
+              <a:latin typeface="+mn-ea"/>
+              <a:ea typeface="+mn-ea"/>
+            </a:endParaRPr>
+          </a:p>
+          <a:p>
+            <a:pPr marL="342900" indent="-342900" algn="l">
+              <a:lnSpc>
+                <a:spcPct val="150000"/>
+              </a:lnSpc>
+              <a:buFont typeface="Arial" panose="020B0604020202020204" pitchFamily="34" charset="0"/>
+              <a:buChar char="•"/>
+            </a:pPr>
+            <a:r>
+              <a:rPr lang="en-US" altLang="zh-CN" sz="2800" dirty="0">
+                <a:solidFill>
+                  <a:schemeClr val="bg2"/>
+                </a:solidFill>
+                <a:latin typeface="+mn-ea"/>
+                <a:ea typeface="+mn-ea"/>
+              </a:rPr>
+              <a:t>NumPy</a:t>
+            </a:r>
+            <a:r>
+              <a:rPr lang="zh-CN" altLang="en-US" sz="2800" dirty="0">
+                <a:solidFill>
+                  <a:schemeClr val="bg2"/>
+                </a:solidFill>
+                <a:latin typeface="+mn-ea"/>
+                <a:ea typeface="+mn-ea"/>
+              </a:rPr>
+              <a:t>的许多底层函数由</a:t>
+            </a:r>
+            <a:r>
+              <a:rPr lang="en-US" altLang="zh-CN" sz="2800" dirty="0">
+                <a:solidFill>
+                  <a:schemeClr val="bg2"/>
+                </a:solidFill>
+                <a:latin typeface="+mn-ea"/>
+                <a:ea typeface="+mn-ea"/>
+              </a:rPr>
+              <a:t>C</a:t>
+            </a:r>
+            <a:r>
+              <a:rPr lang="zh-CN" altLang="en-US" sz="2800" dirty="0">
+                <a:solidFill>
+                  <a:schemeClr val="bg2"/>
+                </a:solidFill>
+                <a:latin typeface="+mn-ea"/>
+                <a:ea typeface="+mn-ea"/>
+              </a:rPr>
+              <a:t>语言实现，因此</a:t>
+            </a:r>
+            <a:r>
+              <a:rPr lang="en-US" altLang="zh-CN" sz="2800" dirty="0">
+                <a:solidFill>
+                  <a:schemeClr val="bg2"/>
+                </a:solidFill>
+                <a:latin typeface="+mn-ea"/>
+                <a:ea typeface="+mn-ea"/>
+              </a:rPr>
+              <a:t>NumPy</a:t>
+            </a:r>
+            <a:r>
+              <a:rPr lang="zh-CN" altLang="en-US" sz="2800" dirty="0">
+                <a:solidFill>
+                  <a:schemeClr val="bg2"/>
+                </a:solidFill>
+                <a:latin typeface="+mn-ea"/>
+                <a:ea typeface="+mn-ea"/>
+              </a:rPr>
+              <a:t>具有</a:t>
+            </a:r>
+            <a:r>
+              <a:rPr lang="zh-CN" altLang="en-US" sz="2800" b="1" dirty="0">
+                <a:solidFill>
+                  <a:schemeClr val="bg2"/>
+                </a:solidFill>
+                <a:latin typeface="+mn-ea"/>
+                <a:ea typeface="+mn-ea"/>
+              </a:rPr>
+              <a:t>较高的运算效率</a:t>
+            </a:r>
+            <a:r>
+              <a:rPr lang="zh-CN" altLang="en-US" sz="2800" dirty="0">
+                <a:solidFill>
+                  <a:schemeClr val="bg2"/>
+                </a:solidFill>
+                <a:latin typeface="+mn-ea"/>
+                <a:ea typeface="+mn-ea"/>
+              </a:rPr>
+              <a:t>。</a:t>
+            </a:r>
+            <a:endParaRPr lang="en-US" altLang="zh-CN" sz="2800" dirty="0">
+              <a:solidFill>
+                <a:schemeClr val="bg2"/>
+              </a:solidFill>
+              <a:latin typeface="+mn-ea"/>
+              <a:ea typeface="+mn-ea"/>
+            </a:endParaRPr>
+          </a:p>
+        </p:txBody>
+      </p:sp>
+      <p:sp>
+        <p:nvSpPr>
+          <p:cNvPr id="8" name="TextBox 7">
+            <a:extLst>
+              <a:ext uri="{FF2B5EF4-FFF2-40B4-BE49-F238E27FC236}">
+                <a16:creationId xmlns:a16="http://schemas.microsoft.com/office/drawing/2014/main" id="{01E289D6-1B85-CAA3-8E75-FEB9ED8D5043}"/>
+              </a:ext>
+            </a:extLst>
+          </p:cNvPr>
+          <p:cNvSpPr txBox="1"/>
+          <p:nvPr/>
+        </p:nvSpPr>
+        <p:spPr>
+          <a:xfrm>
+            <a:off x="2561001" y="3228988"/>
+            <a:ext cx="9584700" cy="3351046"/>
+          </a:xfrm>
+          <a:prstGeom prst="rect">
+            <a:avLst/>
+          </a:prstGeom>
+          <a:noFill/>
+          <a:ln w="28575">
+            <a:solidFill>
+              <a:srgbClr val="00B050"/>
+            </a:solidFill>
+            <a:prstDash val="dash"/>
+          </a:ln>
+        </p:spPr>
+        <p:txBody>
+          <a:bodyPr wrap="square">
+            <a:spAutoFit/>
+          </a:bodyPr>
+          <a:lstStyle/>
+          <a:p>
+            <a:pPr algn="l">
+              <a:lnSpc>
+                <a:spcPct val="150000"/>
+              </a:lnSpc>
+            </a:pPr>
+            <a:r>
+              <a:rPr lang="zh-CN" altLang="en-US" b="1" dirty="0">
+                <a:solidFill>
+                  <a:schemeClr val="bg2"/>
+                </a:solidFill>
+                <a:latin typeface="+mn-ea"/>
+                <a:ea typeface="+mn-ea"/>
+              </a:rPr>
+              <a:t>创建数组</a:t>
+            </a:r>
+            <a:r>
+              <a:rPr lang="zh-CN" altLang="en-US" dirty="0">
+                <a:solidFill>
+                  <a:schemeClr val="bg2"/>
+                </a:solidFill>
+                <a:latin typeface="+mn-ea"/>
+                <a:ea typeface="+mn-ea"/>
+              </a:rPr>
+              <a:t>：</a:t>
+            </a:r>
+            <a:r>
+              <a:rPr lang="en-CN" altLang="zh-CN" dirty="0">
+                <a:solidFill>
+                  <a:schemeClr val="bg2"/>
+                </a:solidFill>
+                <a:latin typeface="+mn-ea"/>
+                <a:ea typeface="+mn-ea"/>
+              </a:rPr>
+              <a:t>np.array()</a:t>
+            </a:r>
+            <a:r>
+              <a:rPr lang="zh-CN" altLang="en-US" dirty="0">
+                <a:solidFill>
+                  <a:schemeClr val="bg2"/>
+                </a:solidFill>
+                <a:latin typeface="+mn-ea"/>
+                <a:ea typeface="+mn-ea"/>
+              </a:rPr>
+              <a:t>，</a:t>
+            </a:r>
+            <a:r>
+              <a:rPr lang="en-CN" altLang="zh-CN" dirty="0">
+                <a:solidFill>
+                  <a:schemeClr val="bg2"/>
+                </a:solidFill>
+                <a:latin typeface="+mn-ea"/>
+                <a:ea typeface="+mn-ea"/>
+              </a:rPr>
+              <a:t>np</a:t>
+            </a:r>
+            <a:r>
+              <a:rPr lang="en-US" altLang="zh-CN" dirty="0">
+                <a:solidFill>
+                  <a:schemeClr val="bg2"/>
+                </a:solidFill>
+                <a:latin typeface="+mn-ea"/>
+                <a:ea typeface="+mn-ea"/>
+              </a:rPr>
+              <a:t>.zeros(), </a:t>
+            </a:r>
+            <a:r>
+              <a:rPr lang="en-US" altLang="zh-CN" dirty="0" err="1">
+                <a:solidFill>
+                  <a:schemeClr val="bg2"/>
+                </a:solidFill>
+                <a:latin typeface="+mn-ea"/>
+                <a:ea typeface="+mn-ea"/>
+              </a:rPr>
+              <a:t>np.ones</a:t>
+            </a:r>
+            <a:r>
+              <a:rPr lang="en-US" altLang="zh-CN" dirty="0">
+                <a:solidFill>
+                  <a:schemeClr val="bg2"/>
+                </a:solidFill>
+                <a:latin typeface="+mn-ea"/>
+                <a:ea typeface="+mn-ea"/>
+              </a:rPr>
+              <a:t>()…</a:t>
+            </a:r>
+          </a:p>
+          <a:p>
+            <a:pPr algn="l">
+              <a:lnSpc>
+                <a:spcPct val="150000"/>
+              </a:lnSpc>
+            </a:pPr>
+            <a:r>
+              <a:rPr lang="zh-CN" altLang="en-US" b="1" dirty="0">
+                <a:solidFill>
+                  <a:schemeClr val="bg2"/>
+                </a:solidFill>
+                <a:latin typeface="+mn-ea"/>
+                <a:ea typeface="+mn-ea"/>
+              </a:rPr>
+              <a:t>矩阵运算</a:t>
+            </a:r>
+            <a:r>
+              <a:rPr lang="zh-CN" altLang="en-US" dirty="0">
+                <a:solidFill>
+                  <a:schemeClr val="bg2"/>
+                </a:solidFill>
+                <a:latin typeface="+mn-ea"/>
+                <a:ea typeface="+mn-ea"/>
+              </a:rPr>
+              <a:t>：*</a:t>
+            </a:r>
+            <a:r>
+              <a:rPr lang="en-US" altLang="zh-CN" dirty="0">
+                <a:solidFill>
+                  <a:schemeClr val="bg2"/>
+                </a:solidFill>
+                <a:latin typeface="+mn-ea"/>
+                <a:ea typeface="+mn-ea"/>
+              </a:rPr>
+              <a:t>(</a:t>
+            </a:r>
+            <a:r>
+              <a:rPr lang="zh-CN" altLang="en-US" dirty="0">
+                <a:solidFill>
+                  <a:schemeClr val="bg2"/>
+                </a:solidFill>
+                <a:latin typeface="+mn-ea"/>
+                <a:ea typeface="+mn-ea"/>
+              </a:rPr>
+              <a:t>对应元素相乘</a:t>
+            </a:r>
+            <a:r>
+              <a:rPr lang="en-US" altLang="zh-CN" dirty="0">
+                <a:solidFill>
+                  <a:schemeClr val="bg2"/>
+                </a:solidFill>
+                <a:latin typeface="+mn-ea"/>
+                <a:ea typeface="+mn-ea"/>
+              </a:rPr>
+              <a:t>)</a:t>
+            </a:r>
+            <a:r>
+              <a:rPr lang="zh-CN" altLang="en-US" dirty="0">
+                <a:solidFill>
+                  <a:schemeClr val="bg2"/>
+                </a:solidFill>
+                <a:latin typeface="+mn-ea"/>
+                <a:ea typeface="+mn-ea"/>
+              </a:rPr>
+              <a:t>， </a:t>
+            </a:r>
+            <a:r>
+              <a:rPr lang="en-CN" altLang="zh-CN" dirty="0">
+                <a:solidFill>
+                  <a:schemeClr val="bg2"/>
+                </a:solidFill>
+                <a:latin typeface="+mn-ea"/>
+                <a:ea typeface="+mn-ea"/>
+              </a:rPr>
+              <a:t>np</a:t>
+            </a:r>
+            <a:r>
+              <a:rPr lang="en-US" altLang="zh-CN" dirty="0">
+                <a:solidFill>
+                  <a:schemeClr val="bg2"/>
+                </a:solidFill>
+                <a:latin typeface="+mn-ea"/>
+                <a:ea typeface="+mn-ea"/>
+              </a:rPr>
+              <a:t>.dot()</a:t>
+            </a:r>
+            <a:r>
+              <a:rPr lang="zh-CN" altLang="en-US" dirty="0">
+                <a:solidFill>
+                  <a:schemeClr val="bg2"/>
+                </a:solidFill>
+                <a:latin typeface="+mn-ea"/>
+                <a:ea typeface="+mn-ea"/>
+              </a:rPr>
+              <a:t>（矩阵内积）、</a:t>
+            </a:r>
+            <a:r>
+              <a:rPr lang="en-CN" altLang="zh-CN" dirty="0">
+                <a:solidFill>
+                  <a:schemeClr val="bg2"/>
+                </a:solidFill>
+                <a:latin typeface="+mn-ea"/>
+                <a:ea typeface="+mn-ea"/>
+              </a:rPr>
+              <a:t>np</a:t>
+            </a:r>
+            <a:r>
+              <a:rPr lang="en-US" altLang="zh-CN" dirty="0">
+                <a:solidFill>
+                  <a:schemeClr val="bg2"/>
+                </a:solidFill>
+                <a:latin typeface="+mn-ea"/>
+                <a:ea typeface="+mn-ea"/>
+              </a:rPr>
+              <a:t>.mean()(</a:t>
+            </a:r>
+            <a:r>
+              <a:rPr lang="zh-CN" altLang="en-US" dirty="0">
+                <a:solidFill>
+                  <a:schemeClr val="bg2"/>
+                </a:solidFill>
+                <a:latin typeface="+mn-ea"/>
+                <a:ea typeface="+mn-ea"/>
+              </a:rPr>
+              <a:t>平均值</a:t>
+            </a:r>
+            <a:r>
+              <a:rPr lang="en-US" altLang="zh-CN" dirty="0">
+                <a:solidFill>
+                  <a:schemeClr val="bg2"/>
+                </a:solidFill>
+                <a:latin typeface="+mn-ea"/>
+                <a:ea typeface="+mn-ea"/>
+              </a:rPr>
+              <a:t>)</a:t>
+            </a:r>
+            <a:r>
+              <a:rPr lang="zh-CN" altLang="en-US" dirty="0">
+                <a:solidFill>
+                  <a:schemeClr val="bg2"/>
+                </a:solidFill>
+                <a:latin typeface="+mn-ea"/>
+                <a:ea typeface="+mn-ea"/>
+              </a:rPr>
+              <a:t>，</a:t>
+            </a:r>
+            <a:r>
+              <a:rPr lang="en-CN" altLang="zh-CN" dirty="0">
+                <a:solidFill>
+                  <a:schemeClr val="bg2"/>
+                </a:solidFill>
+                <a:latin typeface="+mn-ea"/>
+                <a:ea typeface="+mn-ea"/>
+              </a:rPr>
+              <a:t>np.max()(</a:t>
+            </a:r>
+            <a:r>
+              <a:rPr lang="zh-CN" altLang="en-US" dirty="0">
+                <a:solidFill>
+                  <a:schemeClr val="bg2"/>
+                </a:solidFill>
+                <a:latin typeface="+mn-ea"/>
+                <a:ea typeface="+mn-ea"/>
+              </a:rPr>
+              <a:t>最大值</a:t>
+            </a:r>
+            <a:r>
+              <a:rPr lang="en-CN" altLang="zh-CN" dirty="0">
+                <a:solidFill>
+                  <a:schemeClr val="bg2"/>
+                </a:solidFill>
+                <a:latin typeface="+mn-ea"/>
+                <a:ea typeface="+mn-ea"/>
+              </a:rPr>
+              <a:t>)</a:t>
+            </a:r>
+            <a:r>
+              <a:rPr lang="zh-CN" altLang="en-CN" dirty="0">
+                <a:solidFill>
+                  <a:schemeClr val="bg2"/>
+                </a:solidFill>
+                <a:latin typeface="+mn-ea"/>
+                <a:ea typeface="+mn-ea"/>
+              </a:rPr>
+              <a:t>等</a:t>
+            </a:r>
+            <a:r>
+              <a:rPr lang="zh-CN" altLang="en-US" dirty="0">
+                <a:solidFill>
+                  <a:schemeClr val="bg2"/>
+                </a:solidFill>
+                <a:latin typeface="+mn-ea"/>
+                <a:ea typeface="+mn-ea"/>
+              </a:rPr>
+              <a:t>。</a:t>
+            </a:r>
+            <a:endParaRPr lang="en-US" altLang="zh-CN" dirty="0">
+              <a:solidFill>
+                <a:schemeClr val="bg2"/>
+              </a:solidFill>
+              <a:latin typeface="+mn-ea"/>
+              <a:ea typeface="+mn-ea"/>
+            </a:endParaRPr>
+          </a:p>
+          <a:p>
+            <a:pPr algn="l">
+              <a:lnSpc>
+                <a:spcPct val="150000"/>
+              </a:lnSpc>
+            </a:pPr>
+            <a:r>
+              <a:rPr lang="zh-CN" altLang="en-US" b="1" dirty="0">
+                <a:solidFill>
+                  <a:schemeClr val="bg2"/>
+                </a:solidFill>
+                <a:latin typeface="+mn-ea"/>
+                <a:ea typeface="+mn-ea"/>
+              </a:rPr>
+              <a:t>索引</a:t>
+            </a:r>
+            <a:r>
+              <a:rPr lang="zh-CN" altLang="en-US" dirty="0">
+                <a:solidFill>
+                  <a:schemeClr val="bg2"/>
+                </a:solidFill>
+                <a:latin typeface="+mn-ea"/>
+                <a:ea typeface="+mn-ea"/>
+              </a:rPr>
+              <a:t>：元素所在数组位置。</a:t>
+            </a:r>
+            <a:endParaRPr lang="en-US" altLang="zh-CN" dirty="0">
+              <a:solidFill>
+                <a:schemeClr val="bg2"/>
+              </a:solidFill>
+              <a:latin typeface="+mn-ea"/>
+              <a:ea typeface="+mn-ea"/>
+            </a:endParaRPr>
+          </a:p>
+          <a:p>
+            <a:pPr algn="l">
+              <a:lnSpc>
+                <a:spcPct val="150000"/>
+              </a:lnSpc>
+            </a:pPr>
+            <a:r>
+              <a:rPr lang="zh-CN" altLang="en-US" b="1" dirty="0">
+                <a:solidFill>
+                  <a:schemeClr val="bg2"/>
+                </a:solidFill>
+                <a:latin typeface="+mn-ea"/>
+                <a:ea typeface="+mn-ea"/>
+              </a:rPr>
+              <a:t>数组合并</a:t>
+            </a:r>
+            <a:r>
+              <a:rPr lang="zh-CN" altLang="en-US" dirty="0">
+                <a:solidFill>
+                  <a:schemeClr val="bg2"/>
+                </a:solidFill>
+                <a:latin typeface="+mn-ea"/>
+                <a:ea typeface="+mn-ea"/>
+              </a:rPr>
+              <a:t>：</a:t>
+            </a:r>
+            <a:r>
+              <a:rPr lang="en-US" altLang="zh-CN" dirty="0" err="1">
+                <a:solidFill>
+                  <a:schemeClr val="bg2"/>
+                </a:solidFill>
+                <a:latin typeface="+mn-ea"/>
+                <a:ea typeface="+mn-ea"/>
+              </a:rPr>
+              <a:t>np.vstack</a:t>
+            </a:r>
+            <a:r>
+              <a:rPr lang="en-US" altLang="zh-CN" dirty="0">
+                <a:solidFill>
+                  <a:schemeClr val="bg2"/>
+                </a:solidFill>
+                <a:latin typeface="+mn-ea"/>
+                <a:ea typeface="+mn-ea"/>
+              </a:rPr>
+              <a:t>(), </a:t>
+            </a:r>
+            <a:r>
+              <a:rPr lang="en-US" altLang="zh-CN" dirty="0" err="1">
+                <a:solidFill>
+                  <a:schemeClr val="bg2"/>
+                </a:solidFill>
+                <a:latin typeface="+mn-ea"/>
+                <a:ea typeface="+mn-ea"/>
+              </a:rPr>
+              <a:t>np.hstack</a:t>
+            </a:r>
+            <a:r>
+              <a:rPr lang="en-US" altLang="zh-CN" dirty="0">
+                <a:solidFill>
+                  <a:schemeClr val="bg2"/>
+                </a:solidFill>
+                <a:latin typeface="+mn-ea"/>
+                <a:ea typeface="+mn-ea"/>
+              </a:rPr>
+              <a:t>(), </a:t>
+            </a:r>
+            <a:r>
+              <a:rPr lang="en-US" altLang="zh-CN" dirty="0" err="1">
+                <a:solidFill>
+                  <a:schemeClr val="bg2"/>
+                </a:solidFill>
+                <a:latin typeface="+mn-ea"/>
+                <a:ea typeface="+mn-ea"/>
+              </a:rPr>
+              <a:t>np.newaxis</a:t>
+            </a:r>
+            <a:r>
+              <a:rPr lang="en-US" altLang="zh-CN" dirty="0">
+                <a:solidFill>
+                  <a:schemeClr val="bg2"/>
+                </a:solidFill>
+                <a:latin typeface="+mn-ea"/>
+                <a:ea typeface="+mn-ea"/>
+              </a:rPr>
+              <a:t>(), </a:t>
+            </a:r>
+            <a:r>
+              <a:rPr lang="en-US" altLang="zh-CN" dirty="0" err="1">
+                <a:solidFill>
+                  <a:schemeClr val="bg2"/>
+                </a:solidFill>
+                <a:latin typeface="+mn-ea"/>
+                <a:ea typeface="+mn-ea"/>
+              </a:rPr>
+              <a:t>np.concatenate</a:t>
+            </a:r>
+            <a:r>
+              <a:rPr lang="en-US" altLang="zh-CN" dirty="0">
+                <a:solidFill>
+                  <a:schemeClr val="bg2"/>
+                </a:solidFill>
+                <a:latin typeface="+mn-ea"/>
+                <a:ea typeface="+mn-ea"/>
+              </a:rPr>
+              <a:t>()</a:t>
+            </a:r>
+          </a:p>
+        </p:txBody>
+      </p:sp>
+      <p:sp>
+        <p:nvSpPr>
+          <p:cNvPr id="11" name="TextBox 10">
+            <a:extLst>
+              <a:ext uri="{FF2B5EF4-FFF2-40B4-BE49-F238E27FC236}">
+                <a16:creationId xmlns:a16="http://schemas.microsoft.com/office/drawing/2014/main" id="{4B1FCDB9-E706-31EB-1075-B5EE60F13E79}"/>
+              </a:ext>
+            </a:extLst>
+          </p:cNvPr>
+          <p:cNvSpPr txBox="1"/>
+          <p:nvPr/>
+        </p:nvSpPr>
+        <p:spPr>
+          <a:xfrm>
+            <a:off x="458985" y="4370918"/>
+            <a:ext cx="2006421" cy="954107"/>
+          </a:xfrm>
+          <a:prstGeom prst="rect">
+            <a:avLst/>
+          </a:prstGeom>
+          <a:noFill/>
+        </p:spPr>
+        <p:txBody>
+          <a:bodyPr wrap="square" rtlCol="0">
+            <a:spAutoFit/>
+          </a:bodyPr>
+          <a:lstStyle/>
+          <a:p>
+            <a:r>
+              <a:rPr lang="en-CN" sz="2800" dirty="0">
+                <a:solidFill>
+                  <a:schemeClr val="bg2"/>
+                </a:solidFill>
+                <a:latin typeface="+mn-ea"/>
+                <a:ea typeface="+mn-ea"/>
+              </a:rPr>
+              <a:t>主要功能及使用</a:t>
+            </a:r>
+            <a:r>
+              <a:rPr lang="zh-CN" altLang="en-US" sz="2800" dirty="0">
+                <a:solidFill>
+                  <a:schemeClr val="bg2"/>
+                </a:solidFill>
+                <a:latin typeface="+mn-ea"/>
+                <a:ea typeface="+mn-ea"/>
+              </a:rPr>
+              <a:t>：</a:t>
+            </a:r>
+            <a:endParaRPr lang="en-CN" sz="2800" dirty="0">
+              <a:solidFill>
+                <a:schemeClr val="bg2"/>
+              </a:solidFill>
+              <a:latin typeface="+mn-ea"/>
+              <a:ea typeface="+mn-ea"/>
+            </a:endParaRPr>
+          </a:p>
+        </p:txBody>
+      </p:sp>
+      <p:pic>
+        <p:nvPicPr>
+          <p:cNvPr id="3" name="Picture 2" descr="A screen shot of a computer program&#10;&#10;AI-generated content may be incorrect.">
+            <a:extLst>
+              <a:ext uri="{FF2B5EF4-FFF2-40B4-BE49-F238E27FC236}">
+                <a16:creationId xmlns:a16="http://schemas.microsoft.com/office/drawing/2014/main" id="{B3D7948F-BBEE-1157-7319-6DA3B0E17E96}"/>
+              </a:ext>
+            </a:extLst>
+          </p:cNvPr>
+          <p:cNvPicPr>
+            <a:picLocks noChangeAspect="1"/>
+          </p:cNvPicPr>
+          <p:nvPr/>
+        </p:nvPicPr>
+        <p:blipFill>
+          <a:blip r:embed="rId3"/>
+          <a:srcRect r="45199" b="69509"/>
+          <a:stretch>
+            <a:fillRect/>
+          </a:stretch>
+        </p:blipFill>
+        <p:spPr>
+          <a:xfrm>
+            <a:off x="7338349" y="4798975"/>
+            <a:ext cx="4017663" cy="1108687"/>
+          </a:xfrm>
+          <a:prstGeom prst="rect">
+            <a:avLst/>
+          </a:prstGeom>
+        </p:spPr>
+      </p:pic>
+    </p:spTree>
+    <p:extLst>
+      <p:ext uri="{BB962C8B-B14F-4D97-AF65-F5344CB8AC3E}">
+        <p14:creationId xmlns:p14="http://schemas.microsoft.com/office/powerpoint/2010/main" val="3887738081"/>
+      </p:ext>
+    </p:extLst>
+  </p:cSld>
+  <p:clrMapOvr>
+    <a:masterClrMapping/>
+  </p:clrMapOvr>
+  <p:transition>
+    <p:fade/>
+  </p:transition>
+</p:sld>
+</file>
+
+<file path=ppt/slides/slide23.xml><?xml version="1.0" encoding="utf-8"?>
+<p:sld xmlns:a="http://schemas.openxmlformats.org/drawingml/2006/main" xmlns:r="http://schemas.openxmlformats.org/officeDocument/2006/relationships" xmlns:p="http://schemas.openxmlformats.org/presentationml/2006/main">
+  <p:cSld>
+    <p:spTree>
+      <p:nvGrpSpPr>
+        <p:cNvPr id="1" name="">
+          <a:extLst>
+            <a:ext uri="{FF2B5EF4-FFF2-40B4-BE49-F238E27FC236}">
+              <a16:creationId xmlns:a16="http://schemas.microsoft.com/office/drawing/2014/main" id="{16F679A5-28AF-079A-9263-76B3671E201E}"/>
+            </a:ext>
+          </a:extLst>
+        </p:cNvPr>
+        <p:cNvGrpSpPr/>
+        <p:nvPr/>
+      </p:nvGrpSpPr>
+      <p:grpSpPr>
+        <a:xfrm>
+          <a:off x="0" y="0"/>
+          <a:ext cx="0" cy="0"/>
+          <a:chOff x="0" y="0"/>
+          <a:chExt cx="0" cy="0"/>
+        </a:xfrm>
+      </p:grpSpPr>
+      <p:sp>
+        <p:nvSpPr>
+          <p:cNvPr id="4" name="标题 3">
+            <a:extLst>
+              <a:ext uri="{FF2B5EF4-FFF2-40B4-BE49-F238E27FC236}">
+                <a16:creationId xmlns:a16="http://schemas.microsoft.com/office/drawing/2014/main" id="{5F886346-B0D4-D77D-ABFD-9537B1F0652B}"/>
+              </a:ext>
+            </a:extLst>
+          </p:cNvPr>
+          <p:cNvSpPr>
+            <a:spLocks noGrp="1"/>
+          </p:cNvSpPr>
+          <p:nvPr>
+            <p:ph type="title"/>
+          </p:nvPr>
+        </p:nvSpPr>
+        <p:spPr/>
+        <p:txBody>
+          <a:bodyPr/>
+          <a:lstStyle/>
+          <a:p>
+            <a:r>
+              <a:rPr lang="zh-CN" altLang="en-US" dirty="0">
+                <a:latin typeface="+mn-ea"/>
+              </a:rPr>
+              <a:t>三、</a:t>
+            </a:r>
+            <a:r>
+              <a:rPr lang="en-US" altLang="zh-CN" dirty="0">
+                <a:latin typeface="+mn-ea"/>
+              </a:rPr>
+              <a:t>Python</a:t>
+            </a:r>
+            <a:r>
+              <a:rPr lang="zh-CN" altLang="en-US" dirty="0">
+                <a:latin typeface="+mn-ea"/>
+              </a:rPr>
+              <a:t>标准库与第三方库</a:t>
+            </a:r>
+            <a:endParaRPr lang="zh-CN" altLang="en-US" dirty="0"/>
+          </a:p>
+        </p:txBody>
+      </p:sp>
+      <p:sp>
+        <p:nvSpPr>
+          <p:cNvPr id="6" name="TextBox 1">
+            <a:extLst>
+              <a:ext uri="{FF2B5EF4-FFF2-40B4-BE49-F238E27FC236}">
+                <a16:creationId xmlns:a16="http://schemas.microsoft.com/office/drawing/2014/main" id="{B04EF2B4-9F82-79D3-73A7-F7ABFD3D4677}"/>
+              </a:ext>
+            </a:extLst>
+          </p:cNvPr>
+          <p:cNvSpPr txBox="1"/>
+          <p:nvPr/>
+        </p:nvSpPr>
+        <p:spPr>
+          <a:xfrm>
+            <a:off x="522513" y="800688"/>
+            <a:ext cx="7741811" cy="743986"/>
+          </a:xfrm>
+          <a:prstGeom prst="rect">
+            <a:avLst/>
+          </a:prstGeom>
+          <a:noFill/>
+        </p:spPr>
+        <p:txBody>
+          <a:bodyPr wrap="square" rtlCol="0">
             <a:spAutoFit/>
           </a:bodyPr>
           <a:lstStyle>
@@ -21021,82 +20117,110 @@
             </a:lvl9pPr>
           </a:lstStyle>
           <a:p>
-            <a:pPr>
+            <a:pPr algn="just">
               <a:lnSpc>
                 <a:spcPct val="150000"/>
               </a:lnSpc>
             </a:pPr>
             <a:r>
-              <a:rPr lang="en-US" sz="3200" dirty="0" err="1">
+              <a:rPr lang="en-US" altLang="zh-CN" sz="3200" b="1" dirty="0">
+                <a:solidFill>
+                  <a:schemeClr val="accent2"/>
+                </a:solidFill>
+                <a:latin typeface="+mn-ea"/>
+                <a:ea typeface="+mn-ea"/>
+              </a:rPr>
+              <a:t>Python</a:t>
+            </a:r>
+            <a:r>
+              <a:rPr lang="zh-CN" altLang="en-US" sz="3200" b="1" dirty="0">
+                <a:solidFill>
+                  <a:schemeClr val="accent2"/>
+                </a:solidFill>
+                <a:latin typeface="+mn-ea"/>
+                <a:ea typeface="+mn-ea"/>
+              </a:rPr>
+              <a:t>第三方库</a:t>
+            </a:r>
+            <a:r>
+              <a:rPr lang="en-US" altLang="zh-CN" sz="3200" b="1" dirty="0">
+                <a:solidFill>
+                  <a:schemeClr val="accent2"/>
+                </a:solidFill>
+                <a:latin typeface="+mn-ea"/>
+                <a:ea typeface="+mn-ea"/>
+              </a:rPr>
+              <a:t>-Pandas</a:t>
+            </a:r>
+          </a:p>
+        </p:txBody>
+      </p:sp>
+      <p:sp>
+        <p:nvSpPr>
+          <p:cNvPr id="2" name="TextBox 1">
+            <a:extLst>
+              <a:ext uri="{FF2B5EF4-FFF2-40B4-BE49-F238E27FC236}">
+                <a16:creationId xmlns:a16="http://schemas.microsoft.com/office/drawing/2014/main" id="{14293719-93FC-5FBF-0F96-BA17A2740B07}"/>
+              </a:ext>
+            </a:extLst>
+          </p:cNvPr>
+          <p:cNvSpPr txBox="1"/>
+          <p:nvPr/>
+        </p:nvSpPr>
+        <p:spPr>
+          <a:xfrm>
+            <a:off x="611712" y="1631755"/>
+            <a:ext cx="11275488" cy="1519583"/>
+          </a:xfrm>
+          <a:prstGeom prst="rect">
+            <a:avLst/>
+          </a:prstGeom>
+          <a:noFill/>
+        </p:spPr>
+        <p:txBody>
+          <a:bodyPr wrap="square">
+            <a:spAutoFit/>
+          </a:bodyPr>
+          <a:lstStyle/>
+          <a:p>
+            <a:pPr marL="342900" indent="-342900" algn="l">
+              <a:lnSpc>
+                <a:spcPct val="150000"/>
+              </a:lnSpc>
+              <a:buFont typeface="Arial" panose="020B0604020202020204" pitchFamily="34" charset="0"/>
+              <a:buChar char="•"/>
+            </a:pPr>
+            <a:r>
+              <a:rPr lang="zh-CN" altLang="en-US" sz="2800" dirty="0">
                 <a:solidFill>
                   <a:schemeClr val="bg2"/>
                 </a:solidFill>
                 <a:latin typeface="+mn-ea"/>
                 <a:ea typeface="+mn-ea"/>
               </a:rPr>
-              <a:t>数据处理三剑客</a:t>
-            </a:r>
-            <a:r>
-              <a:rPr lang="zh-CN" altLang="en-US" sz="3200" dirty="0">
+              <a:t>基于</a:t>
+            </a:r>
+            <a:r>
+              <a:rPr lang="en-US" sz="2800" dirty="0" err="1">
                 <a:solidFill>
                   <a:schemeClr val="bg2"/>
                 </a:solidFill>
                 <a:latin typeface="+mn-ea"/>
                 <a:ea typeface="+mn-ea"/>
               </a:rPr>
-              <a:t>：</a:t>
-            </a:r>
-            <a:r>
-              <a:rPr lang="en-US" sz="3200" dirty="0" err="1">
+              <a:t>Numpy开发</a:t>
+            </a:r>
+            <a:r>
+              <a:rPr lang="zh-CN" altLang="en-US" sz="2800" dirty="0">
                 <a:solidFill>
                   <a:schemeClr val="bg2"/>
                 </a:solidFill>
                 <a:latin typeface="+mn-ea"/>
                 <a:ea typeface="+mn-ea"/>
               </a:rPr>
-              <a:t>Numpy</a:t>
-            </a:r>
-            <a:r>
-              <a:rPr lang="zh-CN" altLang="en-US" sz="3200" dirty="0">
-                <a:solidFill>
-                  <a:schemeClr val="bg2"/>
-                </a:solidFill>
-                <a:latin typeface="+mn-ea"/>
-                <a:ea typeface="+mn-ea"/>
-              </a:rPr>
-              <a:t>，</a:t>
-            </a:r>
-            <a:r>
-              <a:rPr lang="en-US" sz="3200" dirty="0">
-                <a:solidFill>
-                  <a:schemeClr val="bg2"/>
-                </a:solidFill>
-                <a:latin typeface="+mn-ea"/>
-                <a:ea typeface="+mn-ea"/>
-              </a:rPr>
-              <a:t>Pandas</a:t>
-            </a:r>
-            <a:r>
-              <a:rPr lang="zh-CN" altLang="en-US" sz="3200" dirty="0">
-                <a:solidFill>
-                  <a:schemeClr val="bg2"/>
-                </a:solidFill>
-                <a:latin typeface="+mn-ea"/>
-                <a:ea typeface="+mn-ea"/>
-              </a:rPr>
-              <a:t>， </a:t>
-            </a:r>
-            <a:r>
-              <a:rPr lang="en-US" altLang="zh-CN" sz="3200" dirty="0">
-                <a:solidFill>
-                  <a:schemeClr val="bg2"/>
-                </a:solidFill>
-                <a:latin typeface="+mn-ea"/>
-                <a:ea typeface="+mn-ea"/>
-              </a:rPr>
-              <a:t>Matplotlib</a:t>
-            </a:r>
-            <a:endParaRPr lang="en-US" sz="3200" dirty="0">
+              <a:t>，用于数据挖掘、数据分析以及数据处理。</a:t>
+            </a:r>
+            <a:endParaRPr lang="en-US" altLang="zh-CN" sz="2800" dirty="0">
               <a:solidFill>
                 <a:schemeClr val="bg2"/>
               </a:solidFill>
@@ -21104,12 +20228,414 @@
               <a:ea typeface="+mn-ea"/>
             </a:endParaRPr>
           </a:p>
+          <a:p>
+            <a:pPr marL="342900" indent="-342900" algn="l">
+              <a:lnSpc>
+                <a:spcPct val="150000"/>
+              </a:lnSpc>
+              <a:buFont typeface="Arial" panose="020B0604020202020204" pitchFamily="34" charset="0"/>
+              <a:buChar char="•"/>
+            </a:pPr>
+            <a:r>
+              <a:rPr lang="zh-CN" altLang="en-US" sz="2800" dirty="0">
+                <a:solidFill>
+                  <a:schemeClr val="bg2"/>
+                </a:solidFill>
+                <a:latin typeface="+mn-ea"/>
+                <a:ea typeface="+mn-ea"/>
+              </a:rPr>
+              <a:t>能够简单、直观地处理结构化数据。</a:t>
+            </a:r>
+            <a:endParaRPr lang="en-US" altLang="zh-CN" sz="2800" dirty="0">
+              <a:solidFill>
+                <a:schemeClr val="bg2"/>
+              </a:solidFill>
+              <a:latin typeface="+mn-ea"/>
+              <a:ea typeface="+mn-ea"/>
+            </a:endParaRPr>
+          </a:p>
         </p:txBody>
       </p:sp>
+      <p:sp>
+        <p:nvSpPr>
+          <p:cNvPr id="9" name="TextBox 8">
+            <a:extLst>
+              <a:ext uri="{FF2B5EF4-FFF2-40B4-BE49-F238E27FC236}">
+                <a16:creationId xmlns:a16="http://schemas.microsoft.com/office/drawing/2014/main" id="{B81A9E70-47A6-FE16-AC16-8CC8FC3C81C6}"/>
+              </a:ext>
+            </a:extLst>
+          </p:cNvPr>
+          <p:cNvSpPr txBox="1"/>
+          <p:nvPr/>
+        </p:nvSpPr>
+        <p:spPr>
+          <a:xfrm>
+            <a:off x="652040" y="4454961"/>
+            <a:ext cx="2200877" cy="954107"/>
+          </a:xfrm>
+          <a:prstGeom prst="rect">
+            <a:avLst/>
+          </a:prstGeom>
+          <a:noFill/>
+        </p:spPr>
+        <p:txBody>
+          <a:bodyPr wrap="square" rtlCol="0">
+            <a:spAutoFit/>
+          </a:bodyPr>
+          <a:lstStyle/>
+          <a:p>
+            <a:r>
+              <a:rPr lang="en-CN" sz="2800" dirty="0">
+                <a:solidFill>
+                  <a:schemeClr val="bg2"/>
+                </a:solidFill>
+                <a:latin typeface="+mn-ea"/>
+                <a:ea typeface="+mn-ea"/>
+              </a:rPr>
+              <a:t>主要功能及使用</a:t>
+            </a:r>
+            <a:r>
+              <a:rPr lang="zh-CN" altLang="en-US" sz="2800" dirty="0">
+                <a:solidFill>
+                  <a:schemeClr val="bg2"/>
+                </a:solidFill>
+                <a:latin typeface="+mn-ea"/>
+                <a:ea typeface="+mn-ea"/>
+              </a:rPr>
+              <a:t>：</a:t>
+            </a:r>
+            <a:endParaRPr lang="en-CN" sz="2800" dirty="0">
+              <a:solidFill>
+                <a:schemeClr val="bg2"/>
+              </a:solidFill>
+              <a:latin typeface="+mn-ea"/>
+              <a:ea typeface="+mn-ea"/>
+            </a:endParaRPr>
+          </a:p>
+        </p:txBody>
+      </p:sp>
+      <p:sp>
+        <p:nvSpPr>
+          <p:cNvPr id="3" name="TextBox 2">
+            <a:extLst>
+              <a:ext uri="{FF2B5EF4-FFF2-40B4-BE49-F238E27FC236}">
+                <a16:creationId xmlns:a16="http://schemas.microsoft.com/office/drawing/2014/main" id="{6EDA76CF-AD6F-7C0F-4ADE-91D33A036D3E}"/>
+              </a:ext>
+            </a:extLst>
+          </p:cNvPr>
+          <p:cNvSpPr txBox="1"/>
+          <p:nvPr/>
+        </p:nvSpPr>
+        <p:spPr>
+          <a:xfrm>
+            <a:off x="2882556" y="3238419"/>
+            <a:ext cx="8657404" cy="2677656"/>
+          </a:xfrm>
+          <a:prstGeom prst="rect">
+            <a:avLst/>
+          </a:prstGeom>
+          <a:noFill/>
+          <a:ln w="28575">
+            <a:solidFill>
+              <a:srgbClr val="00B050"/>
+            </a:solidFill>
+            <a:prstDash val="dash"/>
+          </a:ln>
+        </p:spPr>
+        <p:txBody>
+          <a:bodyPr wrap="square">
+            <a:spAutoFit/>
+          </a:bodyPr>
+          <a:lstStyle/>
+          <a:p>
+            <a:pPr algn="l"/>
+            <a:r>
+              <a:rPr lang="en-US" altLang="zh-CN" b="1" dirty="0" err="1">
+                <a:solidFill>
+                  <a:schemeClr val="bg2"/>
+                </a:solidFill>
+                <a:latin typeface="+mn-ea"/>
+                <a:ea typeface="+mn-ea"/>
+              </a:rPr>
+              <a:t>DataFrame</a:t>
+            </a:r>
+            <a:r>
+              <a:rPr lang="zh-CN" altLang="en-US" b="1" dirty="0">
+                <a:solidFill>
+                  <a:schemeClr val="bg2"/>
+                </a:solidFill>
+                <a:latin typeface="+mn-ea"/>
+                <a:ea typeface="+mn-ea"/>
+              </a:rPr>
+              <a:t>添加</a:t>
+            </a:r>
+            <a:r>
+              <a:rPr lang="en-US" altLang="zh-CN" b="1" dirty="0">
+                <a:solidFill>
+                  <a:schemeClr val="bg2"/>
+                </a:solidFill>
+                <a:latin typeface="+mn-ea"/>
+                <a:ea typeface="+mn-ea"/>
+              </a:rPr>
+              <a:t>/</a:t>
+            </a:r>
+            <a:r>
+              <a:rPr lang="zh-CN" altLang="en-US" b="1" dirty="0">
+                <a:solidFill>
+                  <a:schemeClr val="bg2"/>
+                </a:solidFill>
+                <a:latin typeface="+mn-ea"/>
+                <a:ea typeface="+mn-ea"/>
+              </a:rPr>
+              <a:t>删除数据</a:t>
+            </a:r>
+            <a:endParaRPr lang="en-US" altLang="zh-CN" b="1" dirty="0">
+              <a:solidFill>
+                <a:schemeClr val="bg2"/>
+              </a:solidFill>
+              <a:latin typeface="+mn-ea"/>
+              <a:ea typeface="+mn-ea"/>
+            </a:endParaRPr>
+          </a:p>
+          <a:p>
+            <a:pPr algn="l"/>
+            <a:r>
+              <a:rPr lang="zh-CN" altLang="en-US" b="1" dirty="0">
+                <a:solidFill>
+                  <a:schemeClr val="bg2"/>
+                </a:solidFill>
+                <a:latin typeface="+mn-ea"/>
+                <a:ea typeface="+mn-ea"/>
+              </a:rPr>
+              <a:t>处理丢失的数据</a:t>
+            </a:r>
+            <a:r>
+              <a:rPr lang="zh-CN" altLang="en-US" dirty="0">
+                <a:solidFill>
+                  <a:schemeClr val="bg2"/>
+                </a:solidFill>
+                <a:latin typeface="+mn-ea"/>
+                <a:ea typeface="+mn-ea"/>
+              </a:rPr>
+              <a:t>： </a:t>
+            </a:r>
+            <a:r>
+              <a:rPr lang="en-US" altLang="zh-CN" dirty="0" err="1">
+                <a:solidFill>
+                  <a:schemeClr val="bg2"/>
+                </a:solidFill>
+                <a:latin typeface="+mn-ea"/>
+                <a:ea typeface="+mn-ea"/>
+              </a:rPr>
+              <a:t>dataframe.drop</a:t>
+            </a:r>
+            <a:r>
+              <a:rPr lang="en-US" altLang="zh-CN" dirty="0">
+                <a:solidFill>
+                  <a:schemeClr val="bg2"/>
+                </a:solidFill>
+                <a:latin typeface="+mn-ea"/>
+                <a:ea typeface="+mn-ea"/>
+              </a:rPr>
+              <a:t>()</a:t>
+            </a:r>
+          </a:p>
+          <a:p>
+            <a:pPr algn="l"/>
+            <a:r>
+              <a:rPr lang="zh-CN" altLang="en-US" b="1" dirty="0">
+                <a:solidFill>
+                  <a:schemeClr val="bg2"/>
+                </a:solidFill>
+                <a:latin typeface="+mn-ea"/>
+                <a:ea typeface="+mn-ea"/>
+              </a:rPr>
+              <a:t>数据读写</a:t>
+            </a:r>
+            <a:r>
+              <a:rPr lang="zh-CN" altLang="en-US" dirty="0">
+                <a:solidFill>
+                  <a:schemeClr val="bg2"/>
+                </a:solidFill>
+                <a:latin typeface="+mn-ea"/>
+                <a:ea typeface="+mn-ea"/>
+              </a:rPr>
+              <a:t>：</a:t>
+            </a:r>
+            <a:r>
+              <a:rPr lang="en-US" altLang="zh-CN" dirty="0" err="1">
+                <a:solidFill>
+                  <a:schemeClr val="bg2"/>
+                </a:solidFill>
+                <a:latin typeface="+mn-ea"/>
+                <a:ea typeface="+mn-ea"/>
+              </a:rPr>
+              <a:t>pandas.read_csv</a:t>
+            </a:r>
+            <a:r>
+              <a:rPr lang="en-US" altLang="zh-CN" dirty="0">
+                <a:solidFill>
+                  <a:schemeClr val="bg2"/>
+                </a:solidFill>
+                <a:latin typeface="+mn-ea"/>
+                <a:ea typeface="+mn-ea"/>
+              </a:rPr>
+              <a:t>()</a:t>
+            </a:r>
+            <a:r>
+              <a:rPr lang="zh-CN" altLang="en-US" dirty="0">
+                <a:solidFill>
+                  <a:schemeClr val="bg2"/>
+                </a:solidFill>
+                <a:latin typeface="+mn-ea"/>
+                <a:ea typeface="+mn-ea"/>
+              </a:rPr>
+              <a:t>，</a:t>
+            </a:r>
+            <a:r>
+              <a:rPr lang="en-US" altLang="zh-CN" dirty="0" err="1">
+                <a:solidFill>
+                  <a:schemeClr val="bg2"/>
+                </a:solidFill>
+                <a:latin typeface="+mn-ea"/>
+                <a:ea typeface="+mn-ea"/>
+              </a:rPr>
+              <a:t>dataframe.to_csv</a:t>
+            </a:r>
+            <a:r>
+              <a:rPr lang="en-US" altLang="zh-CN" dirty="0">
+                <a:solidFill>
+                  <a:schemeClr val="bg2"/>
+                </a:solidFill>
+                <a:latin typeface="+mn-ea"/>
+                <a:ea typeface="+mn-ea"/>
+              </a:rPr>
+              <a:t>()</a:t>
+            </a:r>
+          </a:p>
+          <a:p>
+            <a:pPr algn="l"/>
+            <a:r>
+              <a:rPr lang="zh-CN" altLang="en-US" b="1" dirty="0">
+                <a:solidFill>
+                  <a:schemeClr val="bg2"/>
+                </a:solidFill>
+                <a:latin typeface="+mn-ea"/>
+                <a:ea typeface="+mn-ea"/>
+              </a:rPr>
+              <a:t>数据合并</a:t>
+            </a:r>
+            <a:r>
+              <a:rPr lang="zh-CN" altLang="en-US" dirty="0">
+                <a:solidFill>
+                  <a:schemeClr val="bg2"/>
+                </a:solidFill>
+                <a:latin typeface="+mn-ea"/>
+                <a:ea typeface="+mn-ea"/>
+              </a:rPr>
+              <a:t>：</a:t>
+            </a:r>
+            <a:r>
+              <a:rPr lang="en-US" altLang="zh-CN" dirty="0" err="1">
+                <a:solidFill>
+                  <a:schemeClr val="bg2"/>
+                </a:solidFill>
+                <a:latin typeface="+mn-ea"/>
+                <a:ea typeface="+mn-ea"/>
+              </a:rPr>
+              <a:t>pandas.concat</a:t>
+            </a:r>
+            <a:r>
+              <a:rPr lang="en-US" altLang="zh-CN" dirty="0">
+                <a:solidFill>
+                  <a:schemeClr val="bg2"/>
+                </a:solidFill>
+                <a:latin typeface="+mn-ea"/>
+                <a:ea typeface="+mn-ea"/>
+              </a:rPr>
+              <a:t>()</a:t>
+            </a:r>
+          </a:p>
+          <a:p>
+            <a:pPr algn="l"/>
+            <a:r>
+              <a:rPr lang="zh-CN" altLang="en-US" b="1" dirty="0">
+                <a:solidFill>
+                  <a:schemeClr val="bg2"/>
+                </a:solidFill>
+                <a:latin typeface="+mn-ea"/>
+                <a:ea typeface="+mn-ea"/>
+              </a:rPr>
+              <a:t>数据可视化</a:t>
+            </a:r>
+            <a:r>
+              <a:rPr lang="zh-CN" altLang="en-US" dirty="0">
+                <a:solidFill>
+                  <a:schemeClr val="bg2"/>
+                </a:solidFill>
+                <a:latin typeface="+mn-ea"/>
+                <a:ea typeface="+mn-ea"/>
+              </a:rPr>
+              <a:t>：</a:t>
+            </a:r>
+            <a:r>
+              <a:rPr lang="en-US" altLang="zh-CN" dirty="0" err="1">
+                <a:solidFill>
+                  <a:schemeClr val="bg2"/>
+                </a:solidFill>
+                <a:latin typeface="+mn-ea"/>
+                <a:ea typeface="+mn-ea"/>
+              </a:rPr>
+              <a:t>dataframe.plot</a:t>
+            </a:r>
+            <a:r>
+              <a:rPr lang="en-US" altLang="zh-CN" dirty="0">
+                <a:solidFill>
+                  <a:schemeClr val="bg2"/>
+                </a:solidFill>
+                <a:latin typeface="+mn-ea"/>
+                <a:ea typeface="+mn-ea"/>
+              </a:rPr>
+              <a:t>()</a:t>
+            </a:r>
+          </a:p>
+        </p:txBody>
+      </p:sp>
+      <p:pic>
+        <p:nvPicPr>
+          <p:cNvPr id="5" name="Picture 4" descr="A screen shot of a computer program&#10;&#10;AI-generated content may be incorrect.">
+            <a:extLst>
+              <a:ext uri="{FF2B5EF4-FFF2-40B4-BE49-F238E27FC236}">
+                <a16:creationId xmlns:a16="http://schemas.microsoft.com/office/drawing/2014/main" id="{F77C252D-3541-9366-B7F9-6605C0AEB1D8}"/>
+              </a:ext>
+            </a:extLst>
+          </p:cNvPr>
+          <p:cNvPicPr>
+            <a:picLocks noChangeAspect="1"/>
+          </p:cNvPicPr>
+          <p:nvPr/>
+        </p:nvPicPr>
+        <p:blipFill>
+          <a:blip r:embed="rId3"/>
+          <a:srcRect t="39939" b="39107"/>
+          <a:stretch>
+            <a:fillRect/>
+          </a:stretch>
+        </p:blipFill>
+        <p:spPr>
+          <a:xfrm>
+            <a:off x="2882556" y="6003156"/>
+            <a:ext cx="7214794" cy="749819"/>
+          </a:xfrm>
+          <a:prstGeom prst="rect">
+            <a:avLst/>
+          </a:prstGeom>
+        </p:spPr>
+      </p:pic>
     </p:spTree>
     <p:extLst>
       <p:ext uri="{BB962C8B-B14F-4D97-AF65-F5344CB8AC3E}">
-        <p14:creationId xmlns:p14="http://schemas.microsoft.com/office/powerpoint/2010/main" val="116747266"/>
+        <p14:creationId xmlns:p14="http://schemas.microsoft.com/office/powerpoint/2010/main" val="3232280249"/>
       </p:ext>
     </p:extLst>
   </p:cSld>
@@ -21122,7 +20648,924 @@
 </p:sld>
 </file>
 
-<file path=ppt/slides/slide23.xml><?xml version="1.0" encoding="utf-8"?>
+<file path=ppt/slides/slide24.xml><?xml version="1.0" encoding="utf-8"?>
+<p:sld xmlns:a="http://schemas.openxmlformats.org/drawingml/2006/main" xmlns:r="http://schemas.openxmlformats.org/officeDocument/2006/relationships" xmlns:p="http://schemas.openxmlformats.org/presentationml/2006/main">
+  <p:cSld>
+    <p:spTree>
+      <p:nvGrpSpPr>
+        <p:cNvPr id="1" name="">
+          <a:extLst>
+            <a:ext uri="{FF2B5EF4-FFF2-40B4-BE49-F238E27FC236}">
+              <a16:creationId xmlns:a16="http://schemas.microsoft.com/office/drawing/2014/main" id="{55EE737F-12F2-95E4-165E-27396F3F8D6D}"/>
+            </a:ext>
+          </a:extLst>
+        </p:cNvPr>
+        <p:cNvGrpSpPr/>
+        <p:nvPr/>
+      </p:nvGrpSpPr>
+      <p:grpSpPr>
+        <a:xfrm>
+          <a:off x="0" y="0"/>
+          <a:ext cx="0" cy="0"/>
+          <a:chOff x="0" y="0"/>
+          <a:chExt cx="0" cy="0"/>
+        </a:xfrm>
+      </p:grpSpPr>
+      <p:sp>
+        <p:nvSpPr>
+          <p:cNvPr id="4" name="标题 3">
+            <a:extLst>
+              <a:ext uri="{FF2B5EF4-FFF2-40B4-BE49-F238E27FC236}">
+                <a16:creationId xmlns:a16="http://schemas.microsoft.com/office/drawing/2014/main" id="{E7510DDC-500B-460B-DFBA-BEBC3BE67082}"/>
+              </a:ext>
+            </a:extLst>
+          </p:cNvPr>
+          <p:cNvSpPr>
+            <a:spLocks noGrp="1"/>
+          </p:cNvSpPr>
+          <p:nvPr>
+            <p:ph type="title"/>
+          </p:nvPr>
+        </p:nvSpPr>
+        <p:spPr/>
+        <p:txBody>
+          <a:bodyPr/>
+          <a:lstStyle/>
+          <a:p>
+            <a:r>
+              <a:rPr lang="zh-CN" altLang="en-US" dirty="0">
+                <a:latin typeface="+mn-ea"/>
+              </a:rPr>
+              <a:t>三、</a:t>
+            </a:r>
+            <a:r>
+              <a:rPr lang="en-US" altLang="zh-CN" dirty="0">
+                <a:latin typeface="+mn-ea"/>
+              </a:rPr>
+              <a:t>Python</a:t>
+            </a:r>
+            <a:r>
+              <a:rPr lang="zh-CN" altLang="en-US" dirty="0">
+                <a:latin typeface="+mn-ea"/>
+              </a:rPr>
+              <a:t>标准库与第三方库</a:t>
+            </a:r>
+            <a:endParaRPr lang="zh-CN" altLang="en-US" dirty="0"/>
+          </a:p>
+        </p:txBody>
+      </p:sp>
+      <p:sp>
+        <p:nvSpPr>
+          <p:cNvPr id="6" name="TextBox 1">
+            <a:extLst>
+              <a:ext uri="{FF2B5EF4-FFF2-40B4-BE49-F238E27FC236}">
+                <a16:creationId xmlns:a16="http://schemas.microsoft.com/office/drawing/2014/main" id="{220F6501-5206-179D-8A3B-BE0425DF4E8D}"/>
+              </a:ext>
+            </a:extLst>
+          </p:cNvPr>
+          <p:cNvSpPr txBox="1"/>
+          <p:nvPr/>
+        </p:nvSpPr>
+        <p:spPr>
+          <a:xfrm>
+            <a:off x="522513" y="800688"/>
+            <a:ext cx="7741811" cy="743986"/>
+          </a:xfrm>
+          <a:prstGeom prst="rect">
+            <a:avLst/>
+          </a:prstGeom>
+          <a:noFill/>
+        </p:spPr>
+        <p:txBody>
+          <a:bodyPr wrap="square" rtlCol="0">
+            <a:spAutoFit/>
+          </a:bodyPr>
+          <a:lstStyle>
+            <a:defPPr>
+              <a:defRPr lang="zh-CN"/>
+            </a:defPPr>
+            <a:lvl1pPr algn="ctr" rtl="0" fontAlgn="base">
+              <a:spcBef>
+                <a:spcPct val="50000"/>
+              </a:spcBef>
+              <a:spcAft>
+                <a:spcPct val="0"/>
+              </a:spcAft>
+              <a:defRPr sz="2400" kern="1200">
+                <a:solidFill>
+                  <a:schemeClr val="tx1"/>
+                </a:solidFill>
+                <a:latin typeface="Times New Roman" charset="0"/>
+                <a:ea typeface="宋体" charset="0"/>
+                <a:cs typeface="宋体" charset="0"/>
+              </a:defRPr>
+            </a:lvl1pPr>
+            <a:lvl2pPr marL="457200" algn="ctr" rtl="0" fontAlgn="base">
+              <a:spcBef>
+                <a:spcPct val="50000"/>
+              </a:spcBef>
+              <a:spcAft>
+                <a:spcPct val="0"/>
+              </a:spcAft>
+              <a:defRPr sz="2400" kern="1200">
+                <a:solidFill>
+                  <a:schemeClr val="tx1"/>
+                </a:solidFill>
+                <a:latin typeface="Times New Roman" charset="0"/>
+                <a:ea typeface="宋体" charset="0"/>
+                <a:cs typeface="宋体" charset="0"/>
+              </a:defRPr>
+            </a:lvl2pPr>
+            <a:lvl3pPr marL="914400" algn="ctr" rtl="0" fontAlgn="base">
+              <a:spcBef>
+                <a:spcPct val="50000"/>
+              </a:spcBef>
+              <a:spcAft>
+                <a:spcPct val="0"/>
+              </a:spcAft>
+              <a:defRPr sz="2400" kern="1200">
+                <a:solidFill>
+                  <a:schemeClr val="tx1"/>
+                </a:solidFill>
+                <a:latin typeface="Times New Roman" charset="0"/>
+                <a:ea typeface="宋体" charset="0"/>
+                <a:cs typeface="宋体" charset="0"/>
+              </a:defRPr>
+            </a:lvl3pPr>
+            <a:lvl4pPr marL="1371600" algn="ctr" rtl="0" fontAlgn="base">
+              <a:spcBef>
+                <a:spcPct val="50000"/>
+              </a:spcBef>
+              <a:spcAft>
+                <a:spcPct val="0"/>
+              </a:spcAft>
+              <a:defRPr sz="2400" kern="1200">
+                <a:solidFill>
+                  <a:schemeClr val="tx1"/>
+                </a:solidFill>
+                <a:latin typeface="Times New Roman" charset="0"/>
+                <a:ea typeface="宋体" charset="0"/>
+                <a:cs typeface="宋体" charset="0"/>
+              </a:defRPr>
+            </a:lvl4pPr>
+            <a:lvl5pPr marL="1828800" algn="ctr" rtl="0" fontAlgn="base">
+              <a:spcBef>
+                <a:spcPct val="50000"/>
+              </a:spcBef>
+              <a:spcAft>
+                <a:spcPct val="0"/>
+              </a:spcAft>
+              <a:defRPr sz="2400" kern="1200">
+                <a:solidFill>
+                  <a:schemeClr val="tx1"/>
+                </a:solidFill>
+                <a:latin typeface="Times New Roman" charset="0"/>
+                <a:ea typeface="宋体" charset="0"/>
+                <a:cs typeface="宋体" charset="0"/>
+              </a:defRPr>
+            </a:lvl5pPr>
+            <a:lvl6pPr marL="2286000" algn="l" defTabSz="457200" rtl="0" eaLnBrk="1" latinLnBrk="0" hangingPunct="1">
+              <a:defRPr sz="2400" kern="1200">
+                <a:solidFill>
+                  <a:schemeClr val="tx1"/>
+                </a:solidFill>
+                <a:latin typeface="Times New Roman" charset="0"/>
+                <a:ea typeface="宋体" charset="0"/>
+                <a:cs typeface="宋体" charset="0"/>
+              </a:defRPr>
+            </a:lvl6pPr>
+            <a:lvl7pPr marL="2743200" algn="l" defTabSz="457200" rtl="0" eaLnBrk="1" latinLnBrk="0" hangingPunct="1">
+              <a:defRPr sz="2400" kern="1200">
+                <a:solidFill>
+                  <a:schemeClr val="tx1"/>
+                </a:solidFill>
+                <a:latin typeface="Times New Roman" charset="0"/>
+                <a:ea typeface="宋体" charset="0"/>
+                <a:cs typeface="宋体" charset="0"/>
+              </a:defRPr>
+            </a:lvl7pPr>
+            <a:lvl8pPr marL="3200400" algn="l" defTabSz="457200" rtl="0" eaLnBrk="1" latinLnBrk="0" hangingPunct="1">
+              <a:defRPr sz="2400" kern="1200">
+                <a:solidFill>
+                  <a:schemeClr val="tx1"/>
+                </a:solidFill>
+                <a:latin typeface="Times New Roman" charset="0"/>
+                <a:ea typeface="宋体" charset="0"/>
+                <a:cs typeface="宋体" charset="0"/>
+              </a:defRPr>
+            </a:lvl8pPr>
+            <a:lvl9pPr marL="3657600" algn="l" defTabSz="457200" rtl="0" eaLnBrk="1" latinLnBrk="0" hangingPunct="1">
+              <a:defRPr sz="2400" kern="1200">
+                <a:solidFill>
+                  <a:schemeClr val="tx1"/>
+                </a:solidFill>
+                <a:latin typeface="Times New Roman" charset="0"/>
+                <a:ea typeface="宋体" charset="0"/>
+                <a:cs typeface="宋体" charset="0"/>
+              </a:defRPr>
+            </a:lvl9pPr>
+          </a:lstStyle>
+          <a:p>
+            <a:pPr algn="just">
+              <a:lnSpc>
+                <a:spcPct val="150000"/>
+              </a:lnSpc>
+            </a:pPr>
+            <a:r>
+              <a:rPr lang="en-US" altLang="zh-CN" sz="3200" b="1" dirty="0">
+                <a:solidFill>
+                  <a:schemeClr val="accent2"/>
+                </a:solidFill>
+                <a:latin typeface="+mn-ea"/>
+                <a:ea typeface="+mn-ea"/>
+              </a:rPr>
+              <a:t>Python</a:t>
+            </a:r>
+            <a:r>
+              <a:rPr lang="zh-CN" altLang="en-US" sz="3200" b="1" dirty="0">
+                <a:solidFill>
+                  <a:schemeClr val="accent2"/>
+                </a:solidFill>
+                <a:latin typeface="+mn-ea"/>
+                <a:ea typeface="+mn-ea"/>
+              </a:rPr>
+              <a:t>第三方库</a:t>
+            </a:r>
+            <a:r>
+              <a:rPr lang="en-US" altLang="zh-CN" sz="3200" b="1" dirty="0">
+                <a:solidFill>
+                  <a:schemeClr val="accent2"/>
+                </a:solidFill>
+                <a:latin typeface="+mn-ea"/>
+                <a:ea typeface="+mn-ea"/>
+              </a:rPr>
+              <a:t>-Matplotlib</a:t>
+            </a:r>
+          </a:p>
+        </p:txBody>
+      </p:sp>
+      <p:sp>
+        <p:nvSpPr>
+          <p:cNvPr id="2" name="TextBox 1">
+            <a:extLst>
+              <a:ext uri="{FF2B5EF4-FFF2-40B4-BE49-F238E27FC236}">
+                <a16:creationId xmlns:a16="http://schemas.microsoft.com/office/drawing/2014/main" id="{ACF0A8AF-71B9-2AF1-7DBF-A61D590E4FBD}"/>
+              </a:ext>
+            </a:extLst>
+          </p:cNvPr>
+          <p:cNvSpPr txBox="1"/>
+          <p:nvPr/>
+        </p:nvSpPr>
+        <p:spPr>
+          <a:xfrm>
+            <a:off x="611712" y="1631755"/>
+            <a:ext cx="11275488" cy="1519583"/>
+          </a:xfrm>
+          <a:prstGeom prst="rect">
+            <a:avLst/>
+          </a:prstGeom>
+          <a:noFill/>
+        </p:spPr>
+        <p:txBody>
+          <a:bodyPr wrap="square">
+            <a:spAutoFit/>
+          </a:bodyPr>
+          <a:lstStyle/>
+          <a:p>
+            <a:pPr marL="342900" indent="-342900" algn="l">
+              <a:lnSpc>
+                <a:spcPct val="150000"/>
+              </a:lnSpc>
+              <a:buFont typeface="Arial" panose="020B0604020202020204" pitchFamily="34" charset="0"/>
+              <a:buChar char="•"/>
+            </a:pPr>
+            <a:r>
+              <a:rPr lang="zh-CN" altLang="en-US" sz="2800" dirty="0">
+                <a:solidFill>
+                  <a:schemeClr val="bg2"/>
+                </a:solidFill>
+                <a:latin typeface="+mn-ea"/>
+                <a:ea typeface="+mn-ea"/>
+              </a:rPr>
+              <a:t>用于绘制图形的</a:t>
+            </a:r>
+            <a:r>
+              <a:rPr lang="en-US" sz="2800" dirty="0" err="1">
+                <a:solidFill>
+                  <a:schemeClr val="bg2"/>
+                </a:solidFill>
+                <a:latin typeface="+mn-ea"/>
+                <a:ea typeface="+mn-ea"/>
+              </a:rPr>
+              <a:t>Python第三方库</a:t>
+            </a:r>
+            <a:endParaRPr lang="en-US" altLang="zh-CN" sz="2800" dirty="0">
+              <a:solidFill>
+                <a:schemeClr val="bg2"/>
+              </a:solidFill>
+              <a:latin typeface="+mn-ea"/>
+              <a:ea typeface="+mn-ea"/>
+            </a:endParaRPr>
+          </a:p>
+          <a:p>
+            <a:pPr marL="342900" indent="-342900" algn="l">
+              <a:lnSpc>
+                <a:spcPct val="150000"/>
+              </a:lnSpc>
+              <a:buFont typeface="Arial" panose="020B0604020202020204" pitchFamily="34" charset="0"/>
+              <a:buChar char="•"/>
+            </a:pPr>
+            <a:r>
+              <a:rPr lang="zh-CN" altLang="en-US" sz="2800" dirty="0">
+                <a:solidFill>
+                  <a:schemeClr val="bg2"/>
+                </a:solidFill>
+                <a:latin typeface="+mn-ea"/>
+                <a:ea typeface="+mn-ea"/>
+              </a:rPr>
+              <a:t>通常和 </a:t>
+            </a:r>
+            <a:r>
+              <a:rPr lang="en-US" altLang="zh-CN" sz="2800" dirty="0">
+                <a:solidFill>
+                  <a:schemeClr val="bg2"/>
+                </a:solidFill>
+                <a:latin typeface="+mn-ea"/>
+                <a:ea typeface="+mn-ea"/>
+              </a:rPr>
+              <a:t>P</a:t>
+            </a:r>
+            <a:r>
+              <a:rPr lang="en-US" sz="2800" dirty="0">
+                <a:solidFill>
+                  <a:schemeClr val="bg2"/>
+                </a:solidFill>
+                <a:latin typeface="+mn-ea"/>
+                <a:ea typeface="+mn-ea"/>
+              </a:rPr>
+              <a:t>andas </a:t>
+            </a:r>
+            <a:r>
+              <a:rPr lang="zh-CN" altLang="en-US" sz="2800" dirty="0">
+                <a:solidFill>
+                  <a:schemeClr val="bg2"/>
+                </a:solidFill>
+                <a:latin typeface="+mn-ea"/>
+                <a:ea typeface="+mn-ea"/>
+              </a:rPr>
+              <a:t>与 </a:t>
+            </a:r>
+            <a:r>
+              <a:rPr lang="en-US" sz="2800" dirty="0">
+                <a:solidFill>
+                  <a:schemeClr val="bg2"/>
+                </a:solidFill>
+                <a:latin typeface="+mn-ea"/>
+                <a:ea typeface="+mn-ea"/>
+              </a:rPr>
+              <a:t>NumPy </a:t>
+            </a:r>
+            <a:r>
+              <a:rPr lang="zh-CN" altLang="en-US" sz="2800" dirty="0">
+                <a:solidFill>
+                  <a:schemeClr val="bg2"/>
+                </a:solidFill>
+                <a:latin typeface="+mn-ea"/>
+                <a:ea typeface="+mn-ea"/>
+              </a:rPr>
+              <a:t>库一起使用。</a:t>
+            </a:r>
+            <a:endParaRPr lang="en-US" altLang="zh-CN" sz="2800" dirty="0">
+              <a:solidFill>
+                <a:schemeClr val="bg2"/>
+              </a:solidFill>
+              <a:latin typeface="+mn-ea"/>
+              <a:ea typeface="+mn-ea"/>
+            </a:endParaRPr>
+          </a:p>
+        </p:txBody>
+      </p:sp>
+      <p:sp>
+        <p:nvSpPr>
+          <p:cNvPr id="9" name="TextBox 8">
+            <a:extLst>
+              <a:ext uri="{FF2B5EF4-FFF2-40B4-BE49-F238E27FC236}">
+                <a16:creationId xmlns:a16="http://schemas.microsoft.com/office/drawing/2014/main" id="{3747EA68-9C36-4D28-ECFC-973A6DBB96A2}"/>
+              </a:ext>
+            </a:extLst>
+          </p:cNvPr>
+          <p:cNvSpPr txBox="1"/>
+          <p:nvPr/>
+        </p:nvSpPr>
+        <p:spPr>
+          <a:xfrm>
+            <a:off x="611712" y="4493935"/>
+            <a:ext cx="2200877" cy="954107"/>
+          </a:xfrm>
+          <a:prstGeom prst="rect">
+            <a:avLst/>
+          </a:prstGeom>
+          <a:noFill/>
+        </p:spPr>
+        <p:txBody>
+          <a:bodyPr wrap="square" rtlCol="0">
+            <a:spAutoFit/>
+          </a:bodyPr>
+          <a:lstStyle/>
+          <a:p>
+            <a:r>
+              <a:rPr lang="en-CN" sz="2800" dirty="0">
+                <a:solidFill>
+                  <a:schemeClr val="bg2"/>
+                </a:solidFill>
+                <a:latin typeface="+mn-ea"/>
+                <a:ea typeface="+mn-ea"/>
+              </a:rPr>
+              <a:t>主要功能及使用</a:t>
+            </a:r>
+            <a:r>
+              <a:rPr lang="zh-CN" altLang="en-US" sz="2800" dirty="0">
+                <a:solidFill>
+                  <a:schemeClr val="bg2"/>
+                </a:solidFill>
+                <a:latin typeface="+mn-ea"/>
+                <a:ea typeface="+mn-ea"/>
+              </a:rPr>
+              <a:t>：</a:t>
+            </a:r>
+            <a:endParaRPr lang="en-CN" sz="2800" dirty="0">
+              <a:solidFill>
+                <a:schemeClr val="bg2"/>
+              </a:solidFill>
+              <a:latin typeface="+mn-ea"/>
+              <a:ea typeface="+mn-ea"/>
+            </a:endParaRPr>
+          </a:p>
+        </p:txBody>
+      </p:sp>
+      <p:sp>
+        <p:nvSpPr>
+          <p:cNvPr id="5" name="TextBox 4">
+            <a:extLst>
+              <a:ext uri="{FF2B5EF4-FFF2-40B4-BE49-F238E27FC236}">
+                <a16:creationId xmlns:a16="http://schemas.microsoft.com/office/drawing/2014/main" id="{B06F60CF-7048-7CBE-EA1F-6948C155BB6F}"/>
+              </a:ext>
+            </a:extLst>
+          </p:cNvPr>
+          <p:cNvSpPr txBox="1"/>
+          <p:nvPr/>
+        </p:nvSpPr>
+        <p:spPr>
+          <a:xfrm>
+            <a:off x="2821733" y="3355162"/>
+            <a:ext cx="9065467" cy="3231654"/>
+          </a:xfrm>
+          <a:prstGeom prst="rect">
+            <a:avLst/>
+          </a:prstGeom>
+          <a:noFill/>
+          <a:ln w="28575">
+            <a:solidFill>
+              <a:srgbClr val="00B050"/>
+            </a:solidFill>
+            <a:prstDash val="dash"/>
+          </a:ln>
+        </p:spPr>
+        <p:txBody>
+          <a:bodyPr wrap="square">
+            <a:spAutoFit/>
+          </a:bodyPr>
+          <a:lstStyle/>
+          <a:p>
+            <a:pPr algn="l"/>
+            <a:r>
+              <a:rPr lang="zh-CN" altLang="en-US" b="1" dirty="0">
+                <a:solidFill>
+                  <a:schemeClr val="bg2"/>
+                </a:solidFill>
+                <a:latin typeface="+mn-ea"/>
+                <a:ea typeface="+mn-ea"/>
+              </a:rPr>
+              <a:t>绘制画布</a:t>
+            </a:r>
+            <a:r>
+              <a:rPr lang="en-US" altLang="zh-CN" b="1" dirty="0">
+                <a:solidFill>
+                  <a:schemeClr val="bg2"/>
+                </a:solidFill>
+                <a:latin typeface="+mn-ea"/>
+                <a:ea typeface="+mn-ea"/>
+              </a:rPr>
+              <a:t>/</a:t>
+            </a:r>
+            <a:r>
+              <a:rPr lang="zh-CN" altLang="en-US" b="1" dirty="0">
+                <a:solidFill>
+                  <a:schemeClr val="bg2"/>
+                </a:solidFill>
+                <a:latin typeface="+mn-ea"/>
+                <a:ea typeface="+mn-ea"/>
+              </a:rPr>
+              <a:t>画板：</a:t>
+            </a:r>
+            <a:r>
+              <a:rPr lang="en-US" altLang="zh-CN" b="1" dirty="0" err="1">
+                <a:solidFill>
+                  <a:schemeClr val="bg2"/>
+                </a:solidFill>
+                <a:latin typeface="+mn-ea"/>
+                <a:ea typeface="+mn-ea"/>
+              </a:rPr>
+              <a:t>plt.figure</a:t>
+            </a:r>
+            <a:r>
+              <a:rPr lang="en-US" altLang="zh-CN" b="1" dirty="0">
+                <a:solidFill>
+                  <a:schemeClr val="bg2"/>
+                </a:solidFill>
+                <a:latin typeface="+mn-ea"/>
+                <a:ea typeface="+mn-ea"/>
+              </a:rPr>
+              <a:t>()</a:t>
+            </a:r>
+            <a:r>
+              <a:rPr lang="zh-CN" altLang="en-US" b="1" dirty="0">
+                <a:solidFill>
+                  <a:schemeClr val="bg2"/>
+                </a:solidFill>
+                <a:latin typeface="+mn-ea"/>
+                <a:ea typeface="+mn-ea"/>
+              </a:rPr>
+              <a:t>，</a:t>
+            </a:r>
+            <a:r>
+              <a:rPr lang="en-US" altLang="zh-CN" b="1" dirty="0">
+                <a:solidFill>
+                  <a:schemeClr val="bg2"/>
+                </a:solidFill>
+                <a:latin typeface="+mn-ea"/>
+                <a:ea typeface="+mn-ea"/>
+              </a:rPr>
+              <a:t>.subplots(1,1)</a:t>
+            </a:r>
+            <a:endParaRPr lang="en-CN" dirty="0">
+              <a:solidFill>
+                <a:schemeClr val="bg2"/>
+              </a:solidFill>
+              <a:latin typeface="+mn-ea"/>
+              <a:ea typeface="+mn-ea"/>
+            </a:endParaRPr>
+          </a:p>
+          <a:p>
+            <a:pPr algn="l"/>
+            <a:r>
+              <a:rPr lang="en-CN" b="1" dirty="0">
+                <a:solidFill>
+                  <a:schemeClr val="bg2"/>
+                </a:solidFill>
+                <a:latin typeface="+mn-ea"/>
+                <a:ea typeface="+mn-ea"/>
+              </a:rPr>
+              <a:t>线性图绘制</a:t>
+            </a:r>
+            <a:r>
+              <a:rPr lang="zh-CN" altLang="en-US" dirty="0">
+                <a:solidFill>
+                  <a:schemeClr val="bg2"/>
+                </a:solidFill>
+                <a:latin typeface="+mn-ea"/>
+                <a:ea typeface="+mn-ea"/>
+              </a:rPr>
+              <a:t>：</a:t>
+            </a:r>
+            <a:r>
+              <a:rPr lang="en-US" altLang="zh-CN" dirty="0" err="1">
+                <a:solidFill>
+                  <a:schemeClr val="bg2"/>
+                </a:solidFill>
+                <a:latin typeface="+mn-ea"/>
+                <a:ea typeface="+mn-ea"/>
+              </a:rPr>
+              <a:t>plt.plot</a:t>
+            </a:r>
+            <a:r>
+              <a:rPr lang="en-US" altLang="zh-CN" dirty="0">
+                <a:solidFill>
+                  <a:schemeClr val="bg2"/>
+                </a:solidFill>
+                <a:latin typeface="+mn-ea"/>
+                <a:ea typeface="+mn-ea"/>
+              </a:rPr>
+              <a:t>()</a:t>
+            </a:r>
+            <a:endParaRPr lang="en-CN" dirty="0">
+              <a:solidFill>
+                <a:schemeClr val="bg2"/>
+              </a:solidFill>
+              <a:latin typeface="+mn-ea"/>
+              <a:ea typeface="+mn-ea"/>
+            </a:endParaRPr>
+          </a:p>
+          <a:p>
+            <a:pPr algn="l"/>
+            <a:r>
+              <a:rPr lang="en-CN" b="1" dirty="0">
+                <a:solidFill>
+                  <a:schemeClr val="bg2"/>
+                </a:solidFill>
+                <a:latin typeface="+mn-ea"/>
+                <a:ea typeface="+mn-ea"/>
+              </a:rPr>
+              <a:t>坐标系设置</a:t>
+            </a:r>
+            <a:r>
+              <a:rPr lang="zh-CN" altLang="en-US" dirty="0">
+                <a:solidFill>
+                  <a:schemeClr val="bg2"/>
+                </a:solidFill>
+                <a:latin typeface="+mn-ea"/>
+                <a:ea typeface="+mn-ea"/>
+              </a:rPr>
+              <a:t>：</a:t>
+            </a:r>
+            <a:r>
+              <a:rPr lang="en-CN" altLang="zh-CN" dirty="0">
+                <a:solidFill>
+                  <a:schemeClr val="bg2"/>
+                </a:solidFill>
+                <a:latin typeface="+mn-ea"/>
+                <a:ea typeface="+mn-ea"/>
+              </a:rPr>
+              <a:t>plt</a:t>
+            </a:r>
+            <a:r>
+              <a:rPr lang="en-US" altLang="zh-CN" dirty="0">
+                <a:solidFill>
+                  <a:schemeClr val="bg2"/>
+                </a:solidFill>
+                <a:latin typeface="+mn-ea"/>
+                <a:ea typeface="+mn-ea"/>
+              </a:rPr>
+              <a:t>.</a:t>
+            </a:r>
+            <a:r>
+              <a:rPr lang="en-US" altLang="zh-CN" dirty="0" err="1">
+                <a:solidFill>
+                  <a:schemeClr val="bg2"/>
+                </a:solidFill>
+                <a:latin typeface="+mn-ea"/>
+                <a:ea typeface="+mn-ea"/>
+              </a:rPr>
+              <a:t>set_xlabel</a:t>
+            </a:r>
+            <a:r>
+              <a:rPr lang="en-US" altLang="zh-CN" dirty="0">
+                <a:solidFill>
+                  <a:schemeClr val="bg2"/>
+                </a:solidFill>
+                <a:latin typeface="+mn-ea"/>
+                <a:ea typeface="+mn-ea"/>
+              </a:rPr>
+              <a:t>(),</a:t>
+            </a:r>
+            <a:r>
+              <a:rPr lang="en-CN" altLang="zh-CN" dirty="0">
+                <a:solidFill>
+                  <a:schemeClr val="bg2"/>
+                </a:solidFill>
+                <a:latin typeface="+mn-ea"/>
+                <a:ea typeface="+mn-ea"/>
+              </a:rPr>
+              <a:t> </a:t>
+            </a:r>
+            <a:r>
+              <a:rPr lang="en-US" altLang="zh-CN" dirty="0" err="1">
+                <a:solidFill>
+                  <a:schemeClr val="bg2"/>
+                </a:solidFill>
+                <a:latin typeface="+mn-ea"/>
+                <a:ea typeface="+mn-ea"/>
+              </a:rPr>
+              <a:t>plt.set_ylabel</a:t>
+            </a:r>
+            <a:r>
+              <a:rPr lang="en-US" altLang="zh-CN" dirty="0">
+                <a:solidFill>
+                  <a:schemeClr val="bg2"/>
+                </a:solidFill>
+                <a:latin typeface="+mn-ea"/>
+                <a:ea typeface="+mn-ea"/>
+              </a:rPr>
+              <a:t>()…</a:t>
+            </a:r>
+            <a:endParaRPr lang="en-CN" dirty="0">
+              <a:solidFill>
+                <a:schemeClr val="bg2"/>
+              </a:solidFill>
+              <a:latin typeface="+mn-ea"/>
+              <a:ea typeface="+mn-ea"/>
+            </a:endParaRPr>
+          </a:p>
+          <a:p>
+            <a:pPr algn="l"/>
+            <a:r>
+              <a:rPr lang="en-US" b="1" dirty="0" err="1">
+                <a:solidFill>
+                  <a:schemeClr val="bg2"/>
+                </a:solidFill>
+                <a:latin typeface="+mn-ea"/>
+                <a:ea typeface="+mn-ea"/>
+              </a:rPr>
+              <a:t>添加图例</a:t>
+            </a:r>
+            <a:r>
+              <a:rPr lang="en-US" dirty="0">
+                <a:solidFill>
+                  <a:schemeClr val="bg2"/>
+                </a:solidFill>
+                <a:latin typeface="+mn-ea"/>
+                <a:ea typeface="+mn-ea"/>
+              </a:rPr>
+              <a:t>: </a:t>
+            </a:r>
+            <a:r>
+              <a:rPr lang="en-US" dirty="0" err="1">
+                <a:solidFill>
+                  <a:schemeClr val="bg2"/>
+                </a:solidFill>
+                <a:latin typeface="+mn-ea"/>
+                <a:ea typeface="+mn-ea"/>
+              </a:rPr>
+              <a:t>plt.legend</a:t>
+            </a:r>
+            <a:r>
+              <a:rPr lang="en-US" dirty="0">
+                <a:solidFill>
+                  <a:schemeClr val="bg2"/>
+                </a:solidFill>
+                <a:latin typeface="+mn-ea"/>
+                <a:ea typeface="+mn-ea"/>
+              </a:rPr>
+              <a:t>()</a:t>
+            </a:r>
+            <a:endParaRPr lang="en-US" altLang="zh-CN" dirty="0">
+              <a:solidFill>
+                <a:schemeClr val="bg2"/>
+              </a:solidFill>
+              <a:latin typeface="+mn-ea"/>
+              <a:ea typeface="+mn-ea"/>
+            </a:endParaRPr>
+          </a:p>
+          <a:p>
+            <a:pPr algn="l"/>
+            <a:r>
+              <a:rPr lang="en-US" b="1" dirty="0" err="1">
+                <a:solidFill>
+                  <a:schemeClr val="bg2"/>
+                </a:solidFill>
+                <a:latin typeface="+mn-ea"/>
+                <a:ea typeface="+mn-ea"/>
+              </a:rPr>
+              <a:t>柱状图</a:t>
+            </a:r>
+            <a:r>
+              <a:rPr lang="zh-CN" altLang="en-US" dirty="0">
+                <a:solidFill>
+                  <a:schemeClr val="bg2"/>
+                </a:solidFill>
+                <a:latin typeface="+mn-ea"/>
+                <a:ea typeface="+mn-ea"/>
+              </a:rPr>
+              <a:t>：</a:t>
+            </a:r>
+            <a:r>
+              <a:rPr lang="en-US" altLang="zh-CN" dirty="0" err="1">
+                <a:solidFill>
+                  <a:schemeClr val="bg2"/>
+                </a:solidFill>
+                <a:latin typeface="+mn-ea"/>
+                <a:ea typeface="+mn-ea"/>
+              </a:rPr>
+              <a:t>plt.bar</a:t>
+            </a:r>
+            <a:r>
+              <a:rPr lang="en-US" altLang="zh-CN" dirty="0">
+                <a:solidFill>
+                  <a:schemeClr val="bg2"/>
+                </a:solidFill>
+                <a:latin typeface="+mn-ea"/>
+                <a:ea typeface="+mn-ea"/>
+              </a:rPr>
+              <a:t>()</a:t>
+            </a:r>
+            <a:endParaRPr lang="en-US" dirty="0">
+              <a:solidFill>
+                <a:schemeClr val="bg2"/>
+              </a:solidFill>
+              <a:latin typeface="+mn-ea"/>
+              <a:ea typeface="+mn-ea"/>
+            </a:endParaRPr>
+          </a:p>
+          <a:p>
+            <a:pPr algn="l"/>
+            <a:r>
+              <a:rPr lang="en-US" b="1" dirty="0" err="1">
+                <a:solidFill>
+                  <a:schemeClr val="bg2"/>
+                </a:solidFill>
+                <a:latin typeface="+mn-ea"/>
+                <a:ea typeface="+mn-ea"/>
+              </a:rPr>
+              <a:t>图像显示</a:t>
+            </a:r>
+            <a:r>
+              <a:rPr lang="zh-CN" altLang="en-US" dirty="0">
+                <a:solidFill>
+                  <a:schemeClr val="bg2"/>
+                </a:solidFill>
+                <a:latin typeface="+mn-ea"/>
+                <a:ea typeface="+mn-ea"/>
+              </a:rPr>
+              <a:t>：</a:t>
+            </a:r>
+            <a:r>
+              <a:rPr lang="en-US" altLang="zh-CN" dirty="0" err="1">
+                <a:solidFill>
+                  <a:schemeClr val="bg2"/>
+                </a:solidFill>
+                <a:latin typeface="+mn-ea"/>
+                <a:ea typeface="+mn-ea"/>
+              </a:rPr>
+              <a:t>plt.imshow</a:t>
+            </a:r>
+            <a:r>
+              <a:rPr lang="en-US" altLang="zh-CN" dirty="0">
+                <a:solidFill>
+                  <a:schemeClr val="bg2"/>
+                </a:solidFill>
+                <a:latin typeface="+mn-ea"/>
+                <a:ea typeface="+mn-ea"/>
+              </a:rPr>
+              <a:t>()</a:t>
+            </a:r>
+            <a:endParaRPr lang="en-US" dirty="0">
+              <a:solidFill>
+                <a:schemeClr val="bg2"/>
+              </a:solidFill>
+              <a:latin typeface="+mn-ea"/>
+              <a:ea typeface="+mn-ea"/>
+            </a:endParaRPr>
+          </a:p>
+        </p:txBody>
+      </p:sp>
+      <p:pic>
+        <p:nvPicPr>
+          <p:cNvPr id="3" name="Picture 2" descr="A screen shot of a computer program&#10;&#10;AI-generated content may be incorrect.">
+            <a:extLst>
+              <a:ext uri="{FF2B5EF4-FFF2-40B4-BE49-F238E27FC236}">
+                <a16:creationId xmlns:a16="http://schemas.microsoft.com/office/drawing/2014/main" id="{D476F4E8-0C4C-6A6D-DD99-EA0A40043ACD}"/>
+              </a:ext>
+            </a:extLst>
+          </p:cNvPr>
+          <p:cNvPicPr>
+            <a:picLocks noChangeAspect="1"/>
+          </p:cNvPicPr>
+          <p:nvPr/>
+        </p:nvPicPr>
+        <p:blipFill>
+          <a:blip r:embed="rId3"/>
+          <a:srcRect t="66626" r="37113"/>
+          <a:stretch>
+            <a:fillRect/>
+          </a:stretch>
+        </p:blipFill>
+        <p:spPr>
+          <a:xfrm>
+            <a:off x="6605980" y="5064199"/>
+            <a:ext cx="5166034" cy="1359750"/>
+          </a:xfrm>
+          <a:prstGeom prst="rect">
+            <a:avLst/>
+          </a:prstGeom>
+        </p:spPr>
+      </p:pic>
+    </p:spTree>
+    <p:extLst>
+      <p:ext uri="{BB962C8B-B14F-4D97-AF65-F5344CB8AC3E}">
+        <p14:creationId xmlns:p14="http://schemas.microsoft.com/office/powerpoint/2010/main" val="140327686"/>
+      </p:ext>
+    </p:extLst>
+  </p:cSld>
+  <p:clrMapOvr>
+    <a:masterClrMapping/>
+  </p:clrMapOvr>
+  <p:transition>
+    <p:fade/>
+  </p:transition>
+</p:sld>
+</file>
+
+<file path=ppt/slides/slide25.xml><?xml version="1.0" encoding="utf-8"?>
 <p:sld xmlns:a="http://schemas.openxmlformats.org/drawingml/2006/main" xmlns:r="http://schemas.openxmlformats.org/officeDocument/2006/relationships" xmlns:p="http://schemas.openxmlformats.org/presentationml/2006/main">
   <p:cSld>
     <p:spTree>
@@ -21884,7 +22327,7 @@
 </p:sld>
 </file>
 
-<file path=ppt/slides/slide24.xml><?xml version="1.0" encoding="utf-8"?>
+<file path=ppt/slides/slide26.xml><?xml version="1.0" encoding="utf-8"?>
 <p:sld xmlns:a="http://schemas.openxmlformats.org/drawingml/2006/main" xmlns:r="http://schemas.openxmlformats.org/officeDocument/2006/relationships" xmlns:p="http://schemas.openxmlformats.org/presentationml/2006/main">
   <p:cSld>
     <p:spTree>
@@ -22403,7 +22846,7 @@
 </p:sld>
 </file>
 
-<file path=ppt/slides/slide25.xml><?xml version="1.0" encoding="utf-8"?>
+<file path=ppt/slides/slide27.xml><?xml version="1.0" encoding="utf-8"?>
 <p:sld xmlns:a="http://schemas.openxmlformats.org/drawingml/2006/main" xmlns:r="http://schemas.openxmlformats.org/officeDocument/2006/relationships" xmlns:p="http://schemas.openxmlformats.org/presentationml/2006/main">
   <p:cSld>
     <p:spTree>
@@ -22533,7 +22976,7 @@
         <p:spPr>
           <a:xfrm>
             <a:off x="583007" y="2126994"/>
-            <a:ext cx="11273508" cy="4431983"/>
+            <a:ext cx="11273508" cy="4462760"/>
           </a:xfrm>
           <a:prstGeom prst="rect">
             <a:avLst/>
@@ -22566,38 +23009,28 @@
             </a:endParaRPr>
           </a:p>
           <a:p>
-            <a:pPr algn="just"/>
-            <a:r>
-              <a:rPr lang="zh-CN" altLang="en-US" sz="2800" dirty="0">
+            <a:pPr algn="l"/>
+            <a:r>
+              <a:rPr lang="en-US" dirty="0">
                 <a:solidFill>
                   <a:srgbClr val="333333"/>
                 </a:solidFill>
                 <a:latin typeface="+mn-ea"/>
                 <a:ea typeface="+mn-ea"/>
               </a:rPr>
-              <a:t>（</a:t>
-            </a:r>
-            <a:r>
-              <a:rPr lang="en-US" altLang="zh-CN" sz="2800" dirty="0">
+              <a:t>1. </a:t>
+            </a:r>
+            <a:r>
+              <a:rPr lang="zh-CN" altLang="en-US" dirty="0">
                 <a:solidFill>
                   <a:srgbClr val="333333"/>
                 </a:solidFill>
                 <a:latin typeface="+mn-ea"/>
                 <a:ea typeface="+mn-ea"/>
               </a:rPr>
-              <a:t>1</a:t>
-            </a:r>
-            <a:r>
-              <a:rPr lang="zh-CN" altLang="en-US" sz="2800" dirty="0">
-                <a:solidFill>
-                  <a:srgbClr val="333333"/>
-                </a:solidFill>
-                <a:latin typeface="+mn-ea"/>
-                <a:ea typeface="+mn-ea"/>
-              </a:rPr>
-              <a:t>）利用条件循环语句、函数、模块等对选课同学地理信息进行统计；</a:t>
-            </a:r>
-            <a:endParaRPr lang="en-US" altLang="zh-CN" sz="2800" dirty="0">
+              <a:t>结合所学内容设计学生成绩管理函数，代码需逐行注释。</a:t>
+            </a:r>
+            <a:endParaRPr lang="en-CN" dirty="0">
               <a:solidFill>
                 <a:srgbClr val="333333"/>
               </a:solidFill>
@@ -22606,58 +23039,148 @@
             </a:endParaRPr>
           </a:p>
           <a:p>
-            <a:pPr algn="just"/>
-            <a:r>
-              <a:rPr lang="zh-CN" altLang="en-US" sz="2800" dirty="0">
+            <a:pPr algn="l"/>
+            <a:r>
+              <a:rPr lang="en-US" dirty="0">
                 <a:solidFill>
                   <a:srgbClr val="333333"/>
                 </a:solidFill>
                 <a:latin typeface="+mn-ea"/>
                 <a:ea typeface="+mn-ea"/>
               </a:rPr>
-              <a:t>（</a:t>
-            </a:r>
-            <a:r>
-              <a:rPr lang="en-US" altLang="zh-CN" sz="2800" dirty="0">
+              <a:t>2. </a:t>
+            </a:r>
+            <a:r>
+              <a:rPr lang="zh-CN" altLang="en-US" dirty="0">
                 <a:solidFill>
                   <a:srgbClr val="333333"/>
                 </a:solidFill>
                 <a:latin typeface="+mn-ea"/>
                 <a:ea typeface="+mn-ea"/>
               </a:rPr>
+              <a:t>需具备以下功能（函数）：（</a:t>
+            </a:r>
+            <a:r>
+              <a:rPr lang="en-US" dirty="0">
+                <a:solidFill>
+                  <a:srgbClr val="333333"/>
+                </a:solidFill>
+                <a:latin typeface="+mn-ea"/>
+                <a:ea typeface="+mn-ea"/>
+              </a:rPr>
+              <a:t>1</a:t>
+            </a:r>
+            <a:r>
+              <a:rPr lang="zh-CN" altLang="en-US" dirty="0">
+                <a:solidFill>
+                  <a:srgbClr val="333333"/>
+                </a:solidFill>
+                <a:latin typeface="+mn-ea"/>
+                <a:ea typeface="+mn-ea"/>
+              </a:rPr>
+              <a:t>）添加科目及对应学分；（</a:t>
+            </a:r>
+            <a:r>
+              <a:rPr lang="en-US" dirty="0">
+                <a:solidFill>
+                  <a:srgbClr val="333333"/>
+                </a:solidFill>
+                <a:latin typeface="+mn-ea"/>
+                <a:ea typeface="+mn-ea"/>
+              </a:rPr>
               <a:t>2</a:t>
             </a:r>
             <a:r>
-              <a:rPr lang="zh-CN" altLang="en-US" sz="2800" dirty="0">
+              <a:rPr lang="zh-CN" altLang="en-US" dirty="0">
                 <a:solidFill>
                   <a:srgbClr val="333333"/>
                 </a:solidFill>
                 <a:latin typeface="+mn-ea"/>
                 <a:ea typeface="+mn-ea"/>
               </a:rPr>
-              <a:t>）利用</a:t>
-            </a:r>
-            <a:r>
-              <a:rPr lang="en-US" altLang="zh-CN" sz="2800" dirty="0">
+              <a:t>）录入科目成绩；（</a:t>
+            </a:r>
+            <a:r>
+              <a:rPr lang="en-US" altLang="zh-CN" dirty="0">
                 <a:solidFill>
                   <a:srgbClr val="333333"/>
                 </a:solidFill>
                 <a:latin typeface="+mn-ea"/>
                 <a:ea typeface="+mn-ea"/>
               </a:rPr>
-              <a:t>matplotlib</a:t>
-            </a:r>
-            <a:r>
-              <a:rPr lang="zh-CN" altLang="en-US" sz="2800" dirty="0">
+              <a:t>3</a:t>
+            </a:r>
+            <a:r>
+              <a:rPr lang="zh-CN" altLang="en-US" dirty="0">
                 <a:solidFill>
                   <a:srgbClr val="333333"/>
                 </a:solidFill>
                 <a:latin typeface="+mn-ea"/>
                 <a:ea typeface="+mn-ea"/>
               </a:rPr>
-              <a:t>库对选课同学家乡信息进行可视化分析。</a:t>
-            </a:r>
-            <a:endParaRPr lang="en-US" altLang="zh-CN" sz="2800" dirty="0">
+              <a:t>）计算各科目平均分；（</a:t>
+            </a:r>
+            <a:r>
+              <a:rPr lang="en-US" altLang="zh-CN" dirty="0">
+                <a:solidFill>
+                  <a:srgbClr val="333333"/>
+                </a:solidFill>
+                <a:latin typeface="+mn-ea"/>
+                <a:ea typeface="+mn-ea"/>
+              </a:rPr>
+              <a:t>4</a:t>
+            </a:r>
+            <a:r>
+              <a:rPr lang="zh-CN" altLang="en-US" dirty="0">
+                <a:solidFill>
+                  <a:srgbClr val="333333"/>
+                </a:solidFill>
+                <a:latin typeface="+mn-ea"/>
+                <a:ea typeface="+mn-ea"/>
+              </a:rPr>
+              <a:t>）根据学分计算加权平均分；（</a:t>
+            </a:r>
+            <a:r>
+              <a:rPr lang="en-US" altLang="zh-CN" dirty="0">
+                <a:solidFill>
+                  <a:srgbClr val="333333"/>
+                </a:solidFill>
+                <a:latin typeface="+mn-ea"/>
+                <a:ea typeface="+mn-ea"/>
+              </a:rPr>
+              <a:t>5</a:t>
+            </a:r>
+            <a:r>
+              <a:rPr lang="zh-CN" altLang="en-US" dirty="0">
+                <a:solidFill>
+                  <a:srgbClr val="333333"/>
+                </a:solidFill>
+                <a:latin typeface="+mn-ea"/>
+                <a:ea typeface="+mn-ea"/>
+              </a:rPr>
+              <a:t>）计算所有同学某科目平均分；（</a:t>
+            </a:r>
+            <a:r>
+              <a:rPr lang="en-US" altLang="zh-CN" dirty="0">
+                <a:solidFill>
+                  <a:srgbClr val="333333"/>
+                </a:solidFill>
+                <a:latin typeface="+mn-ea"/>
+                <a:ea typeface="+mn-ea"/>
+              </a:rPr>
+              <a:t>6</a:t>
+            </a:r>
+            <a:r>
+              <a:rPr lang="zh-CN" altLang="en-US" dirty="0">
+                <a:solidFill>
+                  <a:srgbClr val="333333"/>
+                </a:solidFill>
+                <a:latin typeface="+mn-ea"/>
+                <a:ea typeface="+mn-ea"/>
+              </a:rPr>
+              <a:t>）查看某科目最高分等。</a:t>
+            </a:r>
+            <a:endParaRPr lang="en-CN" dirty="0">
               <a:solidFill>
                 <a:srgbClr val="333333"/>
               </a:solidFill>
@@ -22666,38 +23189,28 @@
             </a:endParaRPr>
           </a:p>
           <a:p>
-            <a:pPr algn="just"/>
-            <a:r>
-              <a:rPr lang="zh-CN" altLang="en-US" sz="2800" dirty="0">
+            <a:pPr algn="l"/>
+            <a:r>
+              <a:rPr lang="en-US" dirty="0">
                 <a:solidFill>
                   <a:srgbClr val="333333"/>
                 </a:solidFill>
                 <a:latin typeface="+mn-ea"/>
                 <a:ea typeface="+mn-ea"/>
               </a:rPr>
-              <a:t>（</a:t>
-            </a:r>
-            <a:r>
-              <a:rPr lang="en-US" altLang="zh-CN" sz="2800" dirty="0">
+              <a:t>3. </a:t>
+            </a:r>
+            <a:r>
+              <a:rPr lang="zh-CN" altLang="en-US" dirty="0">
                 <a:solidFill>
                   <a:srgbClr val="333333"/>
                 </a:solidFill>
                 <a:latin typeface="+mn-ea"/>
                 <a:ea typeface="+mn-ea"/>
               </a:rPr>
-              <a:t>3</a:t>
-            </a:r>
-            <a:r>
-              <a:rPr lang="zh-CN" altLang="en-US" sz="2800" dirty="0">
-                <a:solidFill>
-                  <a:srgbClr val="333333"/>
-                </a:solidFill>
-                <a:latin typeface="+mn-ea"/>
-                <a:ea typeface="+mn-ea"/>
-              </a:rPr>
-              <a:t>）对实验过程所遇到问题与解决过程进行总结。</a:t>
-            </a:r>
-            <a:endParaRPr lang="en-US" altLang="zh-CN" sz="2800" dirty="0">
+              <a:t>对函数功能进行代码演示及实验总结。</a:t>
+            </a:r>
+            <a:endParaRPr lang="en-CN" dirty="0">
               <a:solidFill>
                 <a:srgbClr val="333333"/>
               </a:solidFill>
@@ -22718,7 +23231,7 @@
               <a:t>作业提交：</a:t>
             </a:r>
             <a:r>
-              <a:rPr lang="en-US" altLang="zh-CN" sz="2800" u="sng" dirty="0">
+              <a:rPr lang="en-US" altLang="zh-CN" u="sng" dirty="0">
                 <a:solidFill>
                   <a:srgbClr val="333333"/>
                 </a:solidFill>
@@ -22728,7 +23241,7 @@
               <a:t>pdf</a:t>
             </a:r>
             <a:r>
-              <a:rPr lang="zh-CN" altLang="en-US" sz="2800" u="sng" dirty="0">
+              <a:rPr lang="zh-CN" altLang="en-US" u="sng" dirty="0">
                 <a:solidFill>
                   <a:srgbClr val="333333"/>
                 </a:solidFill>
@@ -22738,7 +23251,7 @@
               <a:t>格式实验文档</a:t>
             </a:r>
             <a:r>
-              <a:rPr lang="zh-CN" altLang="en-US" sz="2800" dirty="0">
+              <a:rPr lang="zh-CN" altLang="en-US" dirty="0">
                 <a:solidFill>
                   <a:srgbClr val="333333"/>
                 </a:solidFill>
@@ -22748,7 +23261,7 @@
               <a:t>，要求</a:t>
             </a:r>
             <a:r>
-              <a:rPr lang="zh-CN" altLang="en-US" sz="2800" u="sng" dirty="0">
+              <a:rPr lang="zh-CN" altLang="en-US" u="sng" dirty="0">
                 <a:solidFill>
                   <a:srgbClr val="333333"/>
                 </a:solidFill>
@@ -22758,7 +23271,7 @@
               <a:t>格式规范</a:t>
             </a:r>
             <a:r>
-              <a:rPr lang="zh-CN" altLang="en-US" sz="2800" dirty="0">
+              <a:rPr lang="zh-CN" altLang="en-US" dirty="0">
                 <a:solidFill>
                   <a:srgbClr val="333333"/>
                 </a:solidFill>
@@ -22768,7 +23281,7 @@
               <a:t>、</a:t>
             </a:r>
             <a:r>
-              <a:rPr lang="zh-CN" altLang="en-US" sz="2800" u="sng" dirty="0">
+              <a:rPr lang="zh-CN" altLang="en-US" u="sng" dirty="0">
                 <a:solidFill>
                   <a:srgbClr val="333333"/>
                 </a:solidFill>
@@ -22778,7 +23291,7 @@
               <a:t>内容准确</a:t>
             </a:r>
             <a:r>
-              <a:rPr lang="zh-CN" altLang="en-US" sz="2800" dirty="0">
+              <a:rPr lang="zh-CN" altLang="en-US" dirty="0">
                 <a:solidFill>
                   <a:srgbClr val="333333"/>
                 </a:solidFill>
@@ -22788,7 +23301,7 @@
               <a:t>且实验</a:t>
             </a:r>
             <a:r>
-              <a:rPr lang="zh-CN" altLang="en-US" sz="2800" u="sng" dirty="0">
+              <a:rPr lang="zh-CN" altLang="en-US" u="sng" dirty="0">
                 <a:solidFill>
                   <a:srgbClr val="333333"/>
                 </a:solidFill>
@@ -22798,7 +23311,7 @@
               <a:t>细节充分</a:t>
             </a:r>
             <a:r>
-              <a:rPr lang="zh-CN" altLang="en-US" sz="2800" dirty="0">
+              <a:rPr lang="zh-CN" altLang="en-US" dirty="0">
                 <a:solidFill>
                   <a:srgbClr val="333333"/>
                 </a:solidFill>
@@ -22993,7 +23506,7 @@
                 <a:latin typeface="+mn-ea"/>
                 <a:ea typeface="+mn-ea"/>
               </a:rPr>
-              <a:t>题目：选课同学地理信息统计分析</a:t>
+              <a:t>题目：学生成绩管理程序设计</a:t>
             </a:r>
             <a:endParaRPr lang="en-US" altLang="zh-CN" sz="3200" b="1" u="sng" dirty="0">
               <a:solidFill>

--- a/第4章-函数与模块化编程/第4章-函数与模块化编程.pptx
+++ b/第4章-函数与模块化编程/第4章-函数与模块化编程.pptx
@@ -11089,7 +11089,7 @@
         </p:nvSpPr>
         <p:spPr>
           <a:xfrm>
-            <a:off x="246741" y="938418"/>
+            <a:off x="202291" y="938418"/>
             <a:ext cx="6381450" cy="4518738"/>
           </a:xfrm>
           <a:prstGeom prst="rect">
@@ -11174,10 +11174,10 @@
       </p:sp>
       <p:pic>
         <p:nvPicPr>
-          <p:cNvPr id="5" name="图片 4">
+          <p:cNvPr id="6" name="图片 5">
             <a:extLst>
               <a:ext uri="{FF2B5EF4-FFF2-40B4-BE49-F238E27FC236}">
-                <a16:creationId xmlns:a16="http://schemas.microsoft.com/office/drawing/2014/main" id="{7AE08F48-E5E7-FD81-A97D-4663E29C119D}"/>
+                <a16:creationId xmlns:a16="http://schemas.microsoft.com/office/drawing/2014/main" id="{0324CCAD-3AAE-B85A-CE24-100219306DE0}"/>
               </a:ext>
             </a:extLst>
           </p:cNvPr>
@@ -11194,83 +11194,13 @@
         </p:blipFill>
         <p:spPr>
           <a:xfrm>
-            <a:off x="6628191" y="938418"/>
-            <a:ext cx="5317553" cy="1807776"/>
+            <a:off x="6657955" y="990580"/>
+            <a:ext cx="5429290" cy="5524540"/>
           </a:xfrm>
           <a:prstGeom prst="rect">
             <a:avLst/>
           </a:prstGeom>
-          <a:ln w="12700">
-            <a:solidFill>
-              <a:schemeClr val="bg2"/>
-            </a:solidFill>
-          </a:ln>
-        </p:spPr>
-      </p:pic>
-      <p:pic>
-        <p:nvPicPr>
-          <p:cNvPr id="8" name="图片 7">
-            <a:extLst>
-              <a:ext uri="{FF2B5EF4-FFF2-40B4-BE49-F238E27FC236}">
-                <a16:creationId xmlns:a16="http://schemas.microsoft.com/office/drawing/2014/main" id="{E371BD0E-9C61-DCD6-9362-4BBAEC1566DC}"/>
-              </a:ext>
-            </a:extLst>
-          </p:cNvPr>
-          <p:cNvPicPr>
-            <a:picLocks noChangeAspect="1"/>
-          </p:cNvPicPr>
-          <p:nvPr/>
-        </p:nvPicPr>
-        <p:blipFill>
-          <a:blip r:embed="rId4"/>
-          <a:stretch>
-            <a:fillRect/>
-          </a:stretch>
-        </p:blipFill>
-        <p:spPr>
-          <a:xfrm>
-            <a:off x="6857955" y="2812463"/>
-            <a:ext cx="4850100" cy="1909123"/>
-          </a:xfrm>
-          <a:prstGeom prst="rect">
-            <a:avLst/>
-          </a:prstGeom>
-          <a:ln w="12700">
-            <a:solidFill>
-              <a:schemeClr val="bg2"/>
-            </a:solidFill>
-          </a:ln>
-        </p:spPr>
-      </p:pic>
-      <p:pic>
-        <p:nvPicPr>
-          <p:cNvPr id="10" name="图片 9">
-            <a:extLst>
-              <a:ext uri="{FF2B5EF4-FFF2-40B4-BE49-F238E27FC236}">
-                <a16:creationId xmlns:a16="http://schemas.microsoft.com/office/drawing/2014/main" id="{21981528-DCC3-298E-CFF7-2B3D20D9BCFC}"/>
-              </a:ext>
-            </a:extLst>
-          </p:cNvPr>
-          <p:cNvPicPr>
-            <a:picLocks noChangeAspect="1"/>
-          </p:cNvPicPr>
-          <p:nvPr/>
-        </p:nvPicPr>
-        <p:blipFill>
-          <a:blip r:embed="rId5"/>
-          <a:stretch>
-            <a:fillRect/>
-          </a:stretch>
-        </p:blipFill>
-        <p:spPr>
-          <a:xfrm>
-            <a:off x="6857955" y="4790008"/>
-            <a:ext cx="4850100" cy="1990280"/>
-          </a:xfrm>
-          <a:prstGeom prst="rect">
-            <a:avLst/>
-          </a:prstGeom>
-          <a:ln w="12700">
+          <a:ln w="19050">
             <a:solidFill>
               <a:schemeClr val="bg2"/>
             </a:solidFill>
@@ -11447,7 +11377,27 @@
                 <a:latin typeface="+mn-ea"/>
                 <a:ea typeface="+mn-ea"/>
               </a:rPr>
-              <a:t>，我们不会将所有元素进行一次性生成，而是通过算法在需要使用时才生成特定元素。这种边循环边计算的机制，称为生成器（</a:t>
+              <a:t>，我们不会将所有元素进行一次性生成，而是通过算法在需要使用时才生成特定元素。这种</a:t>
+            </a:r>
+            <a:r>
+              <a:rPr lang="zh-CN" altLang="en-US" sz="3000" b="1" dirty="0">
+                <a:solidFill>
+                  <a:schemeClr val="bg2"/>
+                </a:solidFill>
+                <a:latin typeface="+mn-ea"/>
+                <a:ea typeface="+mn-ea"/>
+              </a:rPr>
+              <a:t>边循环边计算的机制，称为生成器</a:t>
+            </a:r>
+            <a:r>
+              <a:rPr lang="zh-CN" altLang="en-US" sz="3000" dirty="0">
+                <a:solidFill>
+                  <a:schemeClr val="bg2"/>
+                </a:solidFill>
+                <a:latin typeface="+mn-ea"/>
+                <a:ea typeface="+mn-ea"/>
+              </a:rPr>
+              <a:t>（</a:t>
             </a:r>
             <a:r>
               <a:rPr lang="en-US" sz="3000" dirty="0">
@@ -15295,7 +15245,7 @@
         </p:nvSpPr>
         <p:spPr>
           <a:xfrm>
-            <a:off x="174171" y="855532"/>
+            <a:off x="174171" y="842832"/>
             <a:ext cx="11850914" cy="3206199"/>
           </a:xfrm>
           <a:prstGeom prst="rect">
@@ -15503,13 +15453,13 @@
           <p:nvPr>
             <p:extLst>
               <p:ext uri="{D42A27DB-BD31-4B8C-83A1-F6EECF244321}">
-                <p14:modId xmlns:p14="http://schemas.microsoft.com/office/powerpoint/2010/main" val="2027250885"/>
+                <p14:modId xmlns:p14="http://schemas.microsoft.com/office/powerpoint/2010/main" val="1064033403"/>
               </p:ext>
             </p:extLst>
           </p:nvPr>
         </p:nvGraphicFramePr>
         <p:xfrm>
-          <a:off x="661481" y="4098015"/>
+          <a:off x="578931" y="4117065"/>
           <a:ext cx="11138634" cy="2578556"/>
         </p:xfrm>
         <a:graphic>
@@ -17723,7 +17673,7 @@
         </p:nvGraphicFramePr>
         <p:xfrm>
           <a:off x="624115" y="2448196"/>
-          <a:ext cx="11054741" cy="2994770"/>
+          <a:ext cx="11054741" cy="2994959"/>
         </p:xfrm>
         <a:graphic>
           <a:graphicData uri="http://schemas.openxmlformats.org/drawingml/2006/table">
@@ -22949,7 +22899,7 @@
                 <a:latin typeface="+mn-ea"/>
                 <a:ea typeface="+mn-ea"/>
               </a:rPr>
-              <a:t>第二次选做作业</a:t>
+              <a:t>第一次作业</a:t>
             </a:r>
             <a:endParaRPr lang="en-US" altLang="zh-CN" sz="3200" b="1" dirty="0">
               <a:solidFill>
@@ -23338,127 +23288,17 @@
                 <a:latin typeface="+mn-ea"/>
                 <a:ea typeface="+mn-ea"/>
               </a:rPr>
-              <a:t>难度</a:t>
-            </a:r>
-            <a:r>
-              <a:rPr lang="zh-CN" altLang="en-US" sz="3200" dirty="0">
-                <a:solidFill>
-                  <a:srgbClr val="333333"/>
-                </a:solidFill>
-                <a:latin typeface="+mn-ea"/>
-                <a:ea typeface="+mn-ea"/>
-              </a:rPr>
-              <a:t>：</a:t>
-            </a:r>
-            <a:r>
-              <a:rPr lang="en-US" altLang="zh-CN" sz="3200" b="1" dirty="0">
+              <a:t>截止日期：</a:t>
+            </a:r>
+            <a:r>
+              <a:rPr lang="en-US" altLang="zh-CN" sz="2800" b="1" u="sng" dirty="0" err="1">
                 <a:solidFill>
                   <a:srgbClr val="FF0000"/>
                 </a:solidFill>
                 <a:latin typeface="+mn-ea"/>
                 <a:ea typeface="+mn-ea"/>
               </a:rPr>
-              <a:t>2</a:t>
-            </a:r>
-            <a:r>
-              <a:rPr lang="zh-CN" altLang="en-US" sz="2800" b="1" dirty="0">
-                <a:solidFill>
-                  <a:srgbClr val="FF0000"/>
-                </a:solidFill>
-                <a:latin typeface="+mn-ea"/>
-                <a:ea typeface="+mn-ea"/>
-              </a:rPr>
-              <a:t>星</a:t>
-            </a:r>
-            <a:r>
-              <a:rPr lang="zh-CN" altLang="en-US" sz="2800" b="1" dirty="0">
-                <a:solidFill>
-                  <a:schemeClr val="bg2"/>
-                </a:solidFill>
-                <a:latin typeface="+mn-ea"/>
-                <a:ea typeface="+mn-ea"/>
-              </a:rPr>
-              <a:t>；</a:t>
-            </a:r>
-            <a:r>
-              <a:rPr lang="zh-CN" altLang="en-US" sz="2800" b="1" dirty="0">
-                <a:solidFill>
-                  <a:srgbClr val="FF0000"/>
-                </a:solidFill>
-                <a:latin typeface="+mn-ea"/>
-                <a:ea typeface="+mn-ea"/>
-              </a:rPr>
-              <a:t> </a:t>
-            </a:r>
-            <a:r>
-              <a:rPr lang="zh-CN" altLang="en-US" sz="3200" b="1" dirty="0">
-                <a:solidFill>
-                  <a:srgbClr val="333333"/>
-                </a:solidFill>
-                <a:latin typeface="+mn-ea"/>
-                <a:ea typeface="+mn-ea"/>
-              </a:rPr>
-              <a:t>截止日期：</a:t>
-            </a:r>
-            <a:r>
-              <a:rPr lang="en-US" altLang="zh-CN" sz="2800" b="1" u="sng" dirty="0">
-                <a:solidFill>
-                  <a:srgbClr val="FF0000"/>
-                </a:solidFill>
-                <a:latin typeface="+mn-ea"/>
-                <a:ea typeface="+mn-ea"/>
-              </a:rPr>
-              <a:t>2025</a:t>
-            </a:r>
-            <a:r>
-              <a:rPr lang="zh-CN" altLang="en-US" sz="2800" b="1" u="sng" dirty="0">
-                <a:solidFill>
-                  <a:srgbClr val="FF0000"/>
-                </a:solidFill>
-                <a:latin typeface="+mn-ea"/>
-                <a:ea typeface="+mn-ea"/>
-              </a:rPr>
-              <a:t>年</a:t>
-            </a:r>
-            <a:r>
-              <a:rPr lang="en-US" altLang="zh-CN" sz="2800" b="1" u="sng" dirty="0">
-                <a:solidFill>
-                  <a:srgbClr val="FF0000"/>
-                </a:solidFill>
-                <a:latin typeface="+mn-ea"/>
-                <a:ea typeface="+mn-ea"/>
-              </a:rPr>
-              <a:t>12</a:t>
-            </a:r>
-            <a:r>
-              <a:rPr lang="zh-CN" altLang="en-US" sz="2800" b="1" u="sng" dirty="0">
-                <a:solidFill>
-                  <a:srgbClr val="FF0000"/>
-                </a:solidFill>
-                <a:latin typeface="+mn-ea"/>
-                <a:ea typeface="+mn-ea"/>
-              </a:rPr>
-              <a:t>月</a:t>
-            </a:r>
-            <a:r>
-              <a:rPr lang="en-US" altLang="zh-CN" sz="2800" b="1" u="sng" dirty="0">
-                <a:solidFill>
-                  <a:srgbClr val="FF0000"/>
-                </a:solidFill>
-                <a:latin typeface="+mn-ea"/>
-                <a:ea typeface="+mn-ea"/>
-              </a:rPr>
-              <a:t>10</a:t>
-            </a:r>
-            <a:r>
-              <a:rPr lang="zh-CN" altLang="en-US" sz="2800" b="1" u="sng" dirty="0">
-                <a:solidFill>
-                  <a:srgbClr val="FF0000"/>
-                </a:solidFill>
-                <a:latin typeface="+mn-ea"/>
-                <a:ea typeface="+mn-ea"/>
-              </a:rPr>
-              <a:t>日</a:t>
+              <a:t>xxxx</a:t>
             </a:r>
             <a:endParaRPr lang="en-US" altLang="zh-CN" sz="2800" b="1" u="sng" dirty="0">
               <a:solidFill>
@@ -26309,6 +26149,41 @@
           <a:chExt cx="0" cy="0"/>
         </a:xfrm>
       </p:grpSpPr>
+      <p:pic>
+        <p:nvPicPr>
+          <p:cNvPr id="5" name="图片 4">
+            <a:extLst>
+              <a:ext uri="{FF2B5EF4-FFF2-40B4-BE49-F238E27FC236}">
+                <a16:creationId xmlns:a16="http://schemas.microsoft.com/office/drawing/2014/main" id="{543C74BE-B879-97AF-F00C-0DB0718E9BAB}"/>
+              </a:ext>
+            </a:extLst>
+          </p:cNvPr>
+          <p:cNvPicPr>
+            <a:picLocks noChangeAspect="1"/>
+          </p:cNvPicPr>
+          <p:nvPr/>
+        </p:nvPicPr>
+        <p:blipFill>
+          <a:blip r:embed="rId3"/>
+          <a:stretch>
+            <a:fillRect/>
+          </a:stretch>
+        </p:blipFill>
+        <p:spPr>
+          <a:xfrm>
+            <a:off x="4939578" y="4278930"/>
+            <a:ext cx="7196782" cy="2480878"/>
+          </a:xfrm>
+          <a:prstGeom prst="rect">
+            <a:avLst/>
+          </a:prstGeom>
+          <a:ln w="19050">
+            <a:solidFill>
+              <a:schemeClr val="bg2"/>
+            </a:solidFill>
+          </a:ln>
+        </p:spPr>
+      </p:pic>
       <p:sp>
         <p:nvSpPr>
           <p:cNvPr id="3" name="标题 2">
@@ -26431,8 +26306,8 @@
         </p:nvSpPr>
         <p:spPr>
           <a:xfrm>
-            <a:off x="369052" y="1833285"/>
-            <a:ext cx="7045675" cy="2123658"/>
+            <a:off x="369053" y="1833285"/>
+            <a:ext cx="7045674" cy="2123658"/>
           </a:xfrm>
           <a:prstGeom prst="rect">
             <a:avLst/>
@@ -26550,42 +26425,12 @@
         </p:nvGrpSpPr>
         <p:grpSpPr>
           <a:xfrm>
-            <a:off x="5023574" y="4327058"/>
-            <a:ext cx="7045675" cy="2223053"/>
-            <a:chOff x="5023574" y="4327058"/>
-            <a:chExt cx="7045675" cy="2223053"/>
+            <a:off x="5457372" y="4925738"/>
+            <a:ext cx="4213537" cy="1236638"/>
+            <a:chOff x="5457372" y="5011656"/>
+            <a:chExt cx="4213537" cy="1236638"/>
           </a:xfrm>
         </p:grpSpPr>
-        <p:pic>
-          <p:nvPicPr>
-            <p:cNvPr id="16" name="图片 15">
-              <a:extLst>
-                <a:ext uri="{FF2B5EF4-FFF2-40B4-BE49-F238E27FC236}">
-                  <a16:creationId xmlns:a16="http://schemas.microsoft.com/office/drawing/2014/main" id="{4B41D3B2-CEF9-0AA1-E774-E15C0C79DAA0}"/>
-                </a:ext>
-              </a:extLst>
-            </p:cNvPr>
-            <p:cNvPicPr>
-              <a:picLocks noChangeAspect="1"/>
-            </p:cNvPicPr>
-            <p:nvPr/>
-          </p:nvPicPr>
-          <p:blipFill>
-            <a:blip r:embed="rId3"/>
-            <a:stretch>
-              <a:fillRect/>
-            </a:stretch>
-          </p:blipFill>
-          <p:spPr>
-            <a:xfrm>
-              <a:off x="5023574" y="4327058"/>
-              <a:ext cx="7045675" cy="2223053"/>
-            </a:xfrm>
-            <a:prstGeom prst="rect">
-              <a:avLst/>
-            </a:prstGeom>
-          </p:spPr>
-        </p:pic>
         <p:sp>
           <p:nvSpPr>
             <p:cNvPr id="10" name="Rectangle 9">
